--- a/Receivables_Collection_English_V4_filled.pptx
+++ b/Receivables_Collection_English_V4_filled.pptx
@@ -11,6 +11,8 @@
     <p:sldId id="256" r:id="rId2"/>
     <p:sldId id="257" r:id="rId3"/>
     <p:sldId id="258" r:id="rId4"/>
+    <p:sldId id="259" r:id="rId10"/>
+    <p:sldId id="260" r:id="rId11"/>
   </p:sldIdLst>
   <p:sldSz cx="12192000" cy="6858000"/>
   <p:notesSz cx="6858000" cy="12192000"/>
@@ -1733,7 +1735,7 @@
                 <a:ea typeface="Calibri" pitchFamily="34" charset="-122"/>
                 <a:cs typeface="Calibri" pitchFamily="34" charset="-120"/>
               </a:rPr>
-              <a:t>Monthly Dashboard &amp; Performance Measurement</a:t>
+              <a:t>Monthly Dashboard &amp; Performance Measurement – External Clients</a:t>
             </a:r>
             <a:endParaRPr lang="en-US" sz="2000" dirty="0"/>
           </a:p>
@@ -1944,7 +1946,7 @@
                             <a:srgbClr val="FFFFFF"/>
                           </a:solidFill>
                         </a:rPr>
-                        <a:t>Subsidiary</a:t>
+                        <a:t>Subsidiary (External Clients)</a:t>
                       </a:r>
                       <a:endParaRPr lang="en-US" sz="860" dirty="0"/>
                     </a:p>
@@ -5216,7 +5218,7 @@
                 <a:ea typeface="Calibri" pitchFamily="34" charset="-122"/>
                 <a:cs typeface="Calibri" pitchFamily="34" charset="-120"/>
               </a:rPr>
-              <a:t>e.g. NPS: 0.8 / 1.3 = 60%</a:t>
+              <a:t>NPS 60%  |  NPM n/a  |  Group 60%</a:t>
             </a:r>
             <a:endParaRPr lang="en-US" sz="950" dirty="0"/>
           </a:p>
@@ -5368,7 +5370,7 @@
                 <a:ea typeface="Calibri" pitchFamily="34" charset="-122"/>
                 <a:cs typeface="Calibri" pitchFamily="34" charset="-120"/>
               </a:rPr>
-              <a:t>e.g. NPS: 0.2 / 0.9 = 20%</a:t>
+              <a:t>NPS 20%  |  NPM n/a  |  Group 20%</a:t>
             </a:r>
             <a:endParaRPr lang="en-US" sz="950" dirty="0"/>
           </a:p>
@@ -5514,13 +5516,13 @@
           </a:p>
           <a:p>
             <a:pPr marL="0" indent="0">
+              <a:spcBef>
+                <a:spcPts val="600"/>
+              </a:spcBef>
               <a:lnSpc>
                 <a:spcPct val="120000"/>
               </a:lnSpc>
               <a:buNone/>
-              <a:spcBef>
-                <a:spcPts val="600"/>
-              </a:spcBef>
             </a:pPr>
             <a:r>
               <a:rPr lang="en-US" sz="950" dirty="0" b="1">
@@ -5531,7 +5533,7 @@
                 <a:ea typeface="Calibri" pitchFamily="34" charset="-122"/>
                 <a:cs typeface="Calibri" pitchFamily="34" charset="-120"/>
               </a:rPr>
-              <a:t>Group +91 days: 3.5m (clients + intercompany)</a:t>
+              <a:t>+91 days:  NPS nil  |  NPM nil  |  Group nil</a:t>
             </a:r>
             <a:endParaRPr lang="en-US" sz="950" dirty="0"/>
           </a:p>
@@ -5566,7 +5568,7 @@
                 </a:solidFill>
                 <a:latin typeface="Calibri"/>
               </a:rPr>
-              <a:t>External clients only (NPM has none – all intercompany). Outstanding and overdue are net of AED 36k collected 1–16 Oct; collection rate uses September collections only. Amounts in AED.</a:t>
+              <a:t>External clients only (NPM has none – all its receivables are intercompany). Outstanding and overdue are net of AED 36k collected 1–16 Oct; collection rate uses September collections only. Amounts in AED.</a:t>
             </a:r>
           </a:p>
         </p:txBody>
@@ -5666,7 +5668,7 @@
                 <a:ea typeface="Calibri" pitchFamily="34" charset="-122"/>
                 <a:cs typeface="Calibri" pitchFamily="34" charset="-120"/>
               </a:rPr>
-              <a:t>Top Overdue Customers &amp; Risk Monitoring</a:t>
+              <a:t>Top Overdue Customers &amp; Risk Monitoring – External Clients</a:t>
             </a:r>
             <a:endParaRPr lang="en-US" sz="2000" dirty="0"/>
           </a:p>
@@ -5777,7 +5779,7 @@
         </p:nvGraphicFramePr>
         <p:xfrm>
           <a:off x="457200" y="1371600"/>
-          <a:ext cx="11274552" cy="1960000"/>
+          <a:ext cx="11274552" cy="1150000"/>
         </p:xfrm>
         <a:graphic>
           <a:graphicData uri="http://schemas.openxmlformats.org/drawingml/2006/table">
@@ -6311,7 +6313,7 @@
                             <a:srgbClr val="1F2933"/>
                           </a:solidFill>
                         </a:rPr>
-                        <a:t>NPS – Tal Al Wathba Transport and General Contracting L.L.C - S.P.C</a:t>
+                        <a:t>NPS – Seattle International Services – L.L.C – S.P.C</a:t>
                       </a:r>
                       <a:endParaRPr lang="en-US" sz="950" dirty="0"/>
                     </a:p>
@@ -6372,7 +6374,7 @@
                             <a:srgbClr val="1F2933"/>
                           </a:solidFill>
                         </a:rPr>
-                        <a:t>2.83m</a:t>
+                        <a:t>0.47m</a:t>
                       </a:r>
                       <a:endParaRPr lang="en-US" sz="950" dirty="0"/>
                     </a:p>
@@ -6433,7 +6435,7 @@
                             <a:srgbClr val="1F2933"/>
                           </a:solidFill>
                         </a:rPr>
-                        <a:t>0 days</a:t>
+                        <a:t>61 days</a:t>
                       </a:r>
                       <a:endParaRPr lang="en-US" sz="950" dirty="0"/>
                     </a:p>
@@ -6745,7 +6747,7 @@
                             <a:srgbClr val="1F2933"/>
                           </a:solidFill>
                         </a:rPr>
-                        <a:t>NPS – Seattle International Services – L.L.C – S.P.C</a:t>
+                        <a:t>NPS – SML Abu Dhabi Engineering &amp; Contracting - L.L.C</a:t>
                       </a:r>
                       <a:endParaRPr lang="en-US" sz="950" dirty="0"/>
                     </a:p>
@@ -6806,7 +6808,7 @@
                             <a:srgbClr val="1F2933"/>
                           </a:solidFill>
                         </a:rPr>
-                        <a:t>0.47m</a:t>
+                        <a:t>0.30m</a:t>
                       </a:r>
                       <a:endParaRPr lang="en-US" sz="950" dirty="0"/>
                     </a:p>
@@ -6867,7 +6869,7 @@
                             <a:srgbClr val="1F2933"/>
                           </a:solidFill>
                         </a:rPr>
-                        <a:t>61 days</a:t>
+                        <a:t>30 days</a:t>
                       </a:r>
                       <a:endParaRPr lang="en-US" sz="950" dirty="0"/>
                     </a:p>
@@ -7179,7 +7181,7 @@
                             <a:srgbClr val="1F2933"/>
                           </a:solidFill>
                         </a:rPr>
-                        <a:t>NPS – SML Abu Dhabi Engineering &amp; Contracting - L.L.C</a:t>
+                        <a:t>NPM – no external client receivables at 30 Sep 2026</a:t>
                       </a:r>
                       <a:endParaRPr lang="en-US" sz="950" dirty="0"/>
                     </a:p>
@@ -7240,7 +7242,7 @@
                             <a:srgbClr val="1F2933"/>
                           </a:solidFill>
                         </a:rPr>
-                        <a:t>0.30m</a:t>
+                        <a:t>–</a:t>
                       </a:r>
                       <a:endParaRPr lang="en-US" sz="950" dirty="0"/>
                     </a:p>
@@ -7301,7 +7303,7 @@
                             <a:srgbClr val="1F2933"/>
                           </a:solidFill>
                         </a:rPr>
-                        <a:t>30 days</a:t>
+                        <a:t>–</a:t>
                       </a:r>
                       <a:endParaRPr lang="en-US" sz="950" dirty="0"/>
                     </a:p>
@@ -7362,7 +7364,7 @@
                             <a:srgbClr val="1F2933"/>
                           </a:solidFill>
                         </a:rPr>
-                        <a:t>TBD</a:t>
+                        <a:t>–</a:t>
                       </a:r>
                       <a:endParaRPr lang="en-US" sz="950" dirty="0"/>
                     </a:p>
@@ -7423,7 +7425,7 @@
                             <a:srgbClr val="1F2933"/>
                           </a:solidFill>
                         </a:rPr>
-                        <a:t>TBD</a:t>
+                        <a:t>–</a:t>
                       </a:r>
                       <a:endParaRPr lang="en-US" sz="950" dirty="0"/>
                     </a:p>
@@ -7484,7 +7486,7 @@
                             <a:srgbClr val="1F2933"/>
                           </a:solidFill>
                         </a:rPr>
-                        <a:t>To be determined in the meeting</a:t>
+                        <a:t>–</a:t>
                       </a:r>
                       <a:endParaRPr lang="en-US" sz="950" dirty="0"/>
                     </a:p>
@@ -7545,7 +7547,7 @@
                             <a:srgbClr val="1F2933"/>
                           </a:solidFill>
                         </a:rPr>
-                        <a:t>TBD</a:t>
+                        <a:t>–</a:t>
                       </a:r>
                       <a:endParaRPr lang="en-US" sz="950" dirty="0"/>
                     </a:p>
@@ -7595,1308 +7597,6 @@
                 <a:extLst>
                   <a:ext uri="{0D108BD9-81ED-4DB2-BD59-A6C34878D82A}">
                     <a16:rowId xmlns:a16="http://schemas.microsoft.com/office/drawing/2014/main" val="10001"/>
-                  </a:ext>
-                </a:extLst>
-              </a:tr>
-              <a:tr h="270000">
-                <a:tc>
-                  <a:txBody>
-                    <a:bodyPr/>
-                    <a:lstStyle/>
-                    <a:p>
-                      <a:pPr marL="0" indent="0" algn="l">
-                        <a:buNone/>
-                      </a:pPr>
-                      <a:r>
-                        <a:rPr lang="en-US" sz="900" b="1" dirty="0">
-                          <a:solidFill>
-                            <a:srgbClr val="1F2933"/>
-                          </a:solidFill>
-                        </a:rPr>
-                        <a:t>NPS – Due from EOM</a:t>
-                      </a:r>
-                      <a:endParaRPr lang="en-US" sz="950" dirty="0"/>
-                    </a:p>
-                  </a:txBody>
-                  <a:tcPr anchor="ctr">
-                    <a:lnL w="9525" cap="flat" cmpd="sng" algn="ctr">
-                      <a:solidFill>
-                        <a:srgbClr val="D9DEE4"/>
-                      </a:solidFill>
-                      <a:prstDash val="solid"/>
-                      <a:round/>
-                      <a:headEnd type="none" w="med" len="med"/>
-                      <a:tailEnd type="none" w="med" len="med"/>
-                    </a:lnL>
-                    <a:lnR w="9525" cap="flat" cmpd="sng" algn="ctr">
-                      <a:solidFill>
-                        <a:srgbClr val="D9DEE4"/>
-                      </a:solidFill>
-                      <a:prstDash val="solid"/>
-                      <a:round/>
-                      <a:headEnd type="none" w="med" len="med"/>
-                      <a:tailEnd type="none" w="med" len="med"/>
-                    </a:lnR>
-                    <a:lnT w="9525" cap="flat" cmpd="sng" algn="ctr">
-                      <a:solidFill>
-                        <a:srgbClr val="D9DEE4"/>
-                      </a:solidFill>
-                      <a:prstDash val="solid"/>
-                      <a:round/>
-                      <a:headEnd type="none" w="med" len="med"/>
-                      <a:tailEnd type="none" w="med" len="med"/>
-                    </a:lnT>
-                    <a:lnB w="9525" cap="flat" cmpd="sng" algn="ctr">
-                      <a:solidFill>
-                        <a:srgbClr val="D9DEE4"/>
-                      </a:solidFill>
-                      <a:prstDash val="solid"/>
-                      <a:round/>
-                      <a:headEnd type="none" w="med" len="med"/>
-                      <a:tailEnd type="none" w="med" len="med"/>
-                    </a:lnB>
-                    <a:solidFill>
-                      <a:srgbClr val="F4F6F8"/>
-                    </a:solidFill>
-                  </a:tcPr>
-                </a:tc>
-                <a:tc>
-                  <a:txBody>
-                    <a:bodyPr/>
-                    <a:lstStyle/>
-                    <a:p>
-                      <a:pPr marL="0" indent="0" algn="ctr">
-                        <a:buNone/>
-                      </a:pPr>
-                      <a:r>
-                        <a:rPr lang="en-US" sz="900" dirty="0">
-                          <a:solidFill>
-                            <a:srgbClr val="1F2933"/>
-                          </a:solidFill>
-                        </a:rPr>
-                        <a:t>0.28m</a:t>
-                      </a:r>
-                      <a:endParaRPr lang="en-US" sz="950" dirty="0"/>
-                    </a:p>
-                  </a:txBody>
-                  <a:tcPr anchor="ctr">
-                    <a:lnL w="9525" cap="flat" cmpd="sng" algn="ctr">
-                      <a:solidFill>
-                        <a:srgbClr val="D9DEE4"/>
-                      </a:solidFill>
-                      <a:prstDash val="solid"/>
-                      <a:round/>
-                      <a:headEnd type="none" w="med" len="med"/>
-                      <a:tailEnd type="none" w="med" len="med"/>
-                    </a:lnL>
-                    <a:lnR w="9525" cap="flat" cmpd="sng" algn="ctr">
-                      <a:solidFill>
-                        <a:srgbClr val="D9DEE4"/>
-                      </a:solidFill>
-                      <a:prstDash val="solid"/>
-                      <a:round/>
-                      <a:headEnd type="none" w="med" len="med"/>
-                      <a:tailEnd type="none" w="med" len="med"/>
-                    </a:lnR>
-                    <a:lnT w="9525" cap="flat" cmpd="sng" algn="ctr">
-                      <a:solidFill>
-                        <a:srgbClr val="D9DEE4"/>
-                      </a:solidFill>
-                      <a:prstDash val="solid"/>
-                      <a:round/>
-                      <a:headEnd type="none" w="med" len="med"/>
-                      <a:tailEnd type="none" w="med" len="med"/>
-                    </a:lnT>
-                    <a:lnB w="9525" cap="flat" cmpd="sng" algn="ctr">
-                      <a:solidFill>
-                        <a:srgbClr val="D9DEE4"/>
-                      </a:solidFill>
-                      <a:prstDash val="solid"/>
-                      <a:round/>
-                      <a:headEnd type="none" w="med" len="med"/>
-                      <a:tailEnd type="none" w="med" len="med"/>
-                    </a:lnB>
-                    <a:solidFill>
-                      <a:srgbClr val="F4F6F8"/>
-                    </a:solidFill>
-                  </a:tcPr>
-                </a:tc>
-                <a:tc>
-                  <a:txBody>
-                    <a:bodyPr/>
-                    <a:lstStyle/>
-                    <a:p>
-                      <a:pPr marL="0" indent="0" algn="ctr">
-                        <a:buNone/>
-                      </a:pPr>
-                      <a:r>
-                        <a:rPr lang="en-US" sz="900" dirty="0">
-                          <a:solidFill>
-                            <a:srgbClr val="1F2933"/>
-                          </a:solidFill>
-                        </a:rPr>
-                        <a:t>273 days</a:t>
-                      </a:r>
-                      <a:endParaRPr lang="en-US" sz="950" dirty="0"/>
-                    </a:p>
-                  </a:txBody>
-                  <a:tcPr anchor="ctr">
-                    <a:lnL w="9525" cap="flat" cmpd="sng" algn="ctr">
-                      <a:solidFill>
-                        <a:srgbClr val="D9DEE4"/>
-                      </a:solidFill>
-                      <a:prstDash val="solid"/>
-                      <a:round/>
-                      <a:headEnd type="none" w="med" len="med"/>
-                      <a:tailEnd type="none" w="med" len="med"/>
-                    </a:lnL>
-                    <a:lnR w="9525" cap="flat" cmpd="sng" algn="ctr">
-                      <a:solidFill>
-                        <a:srgbClr val="D9DEE4"/>
-                      </a:solidFill>
-                      <a:prstDash val="solid"/>
-                      <a:round/>
-                      <a:headEnd type="none" w="med" len="med"/>
-                      <a:tailEnd type="none" w="med" len="med"/>
-                    </a:lnR>
-                    <a:lnT w="9525" cap="flat" cmpd="sng" algn="ctr">
-                      <a:solidFill>
-                        <a:srgbClr val="D9DEE4"/>
-                      </a:solidFill>
-                      <a:prstDash val="solid"/>
-                      <a:round/>
-                      <a:headEnd type="none" w="med" len="med"/>
-                      <a:tailEnd type="none" w="med" len="med"/>
-                    </a:lnT>
-                    <a:lnB w="9525" cap="flat" cmpd="sng" algn="ctr">
-                      <a:solidFill>
-                        <a:srgbClr val="D9DEE4"/>
-                      </a:solidFill>
-                      <a:prstDash val="solid"/>
-                      <a:round/>
-                      <a:headEnd type="none" w="med" len="med"/>
-                      <a:tailEnd type="none" w="med" len="med"/>
-                    </a:lnB>
-                    <a:solidFill>
-                      <a:srgbClr val="F4F6F8"/>
-                    </a:solidFill>
-                  </a:tcPr>
-                </a:tc>
-                <a:tc>
-                  <a:txBody>
-                    <a:bodyPr/>
-                    <a:lstStyle/>
-                    <a:p>
-                      <a:pPr marL="0" indent="0" algn="l">
-                        <a:buNone/>
-                      </a:pPr>
-                      <a:r>
-                        <a:rPr lang="en-US" sz="900" dirty="0">
-                          <a:solidFill>
-                            <a:srgbClr val="1F2933"/>
-                          </a:solidFill>
-                        </a:rPr>
-                        <a:t>TBD</a:t>
-                      </a:r>
-                      <a:endParaRPr lang="en-US" sz="950" dirty="0"/>
-                    </a:p>
-                  </a:txBody>
-                  <a:tcPr anchor="ctr">
-                    <a:lnL w="9525" cap="flat" cmpd="sng" algn="ctr">
-                      <a:solidFill>
-                        <a:srgbClr val="D9DEE4"/>
-                      </a:solidFill>
-                      <a:prstDash val="solid"/>
-                      <a:round/>
-                      <a:headEnd type="none" w="med" len="med"/>
-                      <a:tailEnd type="none" w="med" len="med"/>
-                    </a:lnL>
-                    <a:lnR w="9525" cap="flat" cmpd="sng" algn="ctr">
-                      <a:solidFill>
-                        <a:srgbClr val="D9DEE4"/>
-                      </a:solidFill>
-                      <a:prstDash val="solid"/>
-                      <a:round/>
-                      <a:headEnd type="none" w="med" len="med"/>
-                      <a:tailEnd type="none" w="med" len="med"/>
-                    </a:lnR>
-                    <a:lnT w="9525" cap="flat" cmpd="sng" algn="ctr">
-                      <a:solidFill>
-                        <a:srgbClr val="D9DEE4"/>
-                      </a:solidFill>
-                      <a:prstDash val="solid"/>
-                      <a:round/>
-                      <a:headEnd type="none" w="med" len="med"/>
-                      <a:tailEnd type="none" w="med" len="med"/>
-                    </a:lnT>
-                    <a:lnB w="9525" cap="flat" cmpd="sng" algn="ctr">
-                      <a:solidFill>
-                        <a:srgbClr val="D9DEE4"/>
-                      </a:solidFill>
-                      <a:prstDash val="solid"/>
-                      <a:round/>
-                      <a:headEnd type="none" w="med" len="med"/>
-                      <a:tailEnd type="none" w="med" len="med"/>
-                    </a:lnB>
-                    <a:solidFill>
-                      <a:srgbClr val="F4F6F8"/>
-                    </a:solidFill>
-                  </a:tcPr>
-                </a:tc>
-                <a:tc>
-                  <a:txBody>
-                    <a:bodyPr/>
-                    <a:lstStyle/>
-                    <a:p>
-                      <a:pPr marL="0" indent="0" algn="ctr">
-                        <a:buNone/>
-                      </a:pPr>
-                      <a:r>
-                        <a:rPr lang="en-US" sz="900" dirty="0">
-                          <a:solidFill>
-                            <a:srgbClr val="1F2933"/>
-                          </a:solidFill>
-                        </a:rPr>
-                        <a:t>TBD</a:t>
-                      </a:r>
-                      <a:endParaRPr lang="en-US" sz="950" dirty="0"/>
-                    </a:p>
-                  </a:txBody>
-                  <a:tcPr anchor="ctr">
-                    <a:lnL w="9525" cap="flat" cmpd="sng" algn="ctr">
-                      <a:solidFill>
-                        <a:srgbClr val="D9DEE4"/>
-                      </a:solidFill>
-                      <a:prstDash val="solid"/>
-                      <a:round/>
-                      <a:headEnd type="none" w="med" len="med"/>
-                      <a:tailEnd type="none" w="med" len="med"/>
-                    </a:lnL>
-                    <a:lnR w="9525" cap="flat" cmpd="sng" algn="ctr">
-                      <a:solidFill>
-                        <a:srgbClr val="D9DEE4"/>
-                      </a:solidFill>
-                      <a:prstDash val="solid"/>
-                      <a:round/>
-                      <a:headEnd type="none" w="med" len="med"/>
-                      <a:tailEnd type="none" w="med" len="med"/>
-                    </a:lnR>
-                    <a:lnT w="9525" cap="flat" cmpd="sng" algn="ctr">
-                      <a:solidFill>
-                        <a:srgbClr val="D9DEE4"/>
-                      </a:solidFill>
-                      <a:prstDash val="solid"/>
-                      <a:round/>
-                      <a:headEnd type="none" w="med" len="med"/>
-                      <a:tailEnd type="none" w="med" len="med"/>
-                    </a:lnT>
-                    <a:lnB w="9525" cap="flat" cmpd="sng" algn="ctr">
-                      <a:solidFill>
-                        <a:srgbClr val="D9DEE4"/>
-                      </a:solidFill>
-                      <a:prstDash val="solid"/>
-                      <a:round/>
-                      <a:headEnd type="none" w="med" len="med"/>
-                      <a:tailEnd type="none" w="med" len="med"/>
-                    </a:lnB>
-                    <a:solidFill>
-                      <a:srgbClr val="F4F6F8"/>
-                    </a:solidFill>
-                  </a:tcPr>
-                </a:tc>
-                <a:tc>
-                  <a:txBody>
-                    <a:bodyPr/>
-                    <a:lstStyle/>
-                    <a:p>
-                      <a:pPr marL="0" indent="0" algn="l">
-                        <a:buNone/>
-                      </a:pPr>
-                      <a:r>
-                        <a:rPr lang="en-US" sz="900" i="1" dirty="0">
-                          <a:solidFill>
-                            <a:srgbClr val="1F2933"/>
-                          </a:solidFill>
-                        </a:rPr>
-                        <a:t>To be determined in the meeting</a:t>
-                      </a:r>
-                      <a:endParaRPr lang="en-US" sz="950" dirty="0"/>
-                    </a:p>
-                  </a:txBody>
-                  <a:tcPr anchor="ctr">
-                    <a:lnL w="9525" cap="flat" cmpd="sng" algn="ctr">
-                      <a:solidFill>
-                        <a:srgbClr val="D9DEE4"/>
-                      </a:solidFill>
-                      <a:prstDash val="solid"/>
-                      <a:round/>
-                      <a:headEnd type="none" w="med" len="med"/>
-                      <a:tailEnd type="none" w="med" len="med"/>
-                    </a:lnL>
-                    <a:lnR w="9525" cap="flat" cmpd="sng" algn="ctr">
-                      <a:solidFill>
-                        <a:srgbClr val="D9DEE4"/>
-                      </a:solidFill>
-                      <a:prstDash val="solid"/>
-                      <a:round/>
-                      <a:headEnd type="none" w="med" len="med"/>
-                      <a:tailEnd type="none" w="med" len="med"/>
-                    </a:lnR>
-                    <a:lnT w="9525" cap="flat" cmpd="sng" algn="ctr">
-                      <a:solidFill>
-                        <a:srgbClr val="D9DEE4"/>
-                      </a:solidFill>
-                      <a:prstDash val="solid"/>
-                      <a:round/>
-                      <a:headEnd type="none" w="med" len="med"/>
-                      <a:tailEnd type="none" w="med" len="med"/>
-                    </a:lnT>
-                    <a:lnB w="9525" cap="flat" cmpd="sng" algn="ctr">
-                      <a:solidFill>
-                        <a:srgbClr val="D9DEE4"/>
-                      </a:solidFill>
-                      <a:prstDash val="solid"/>
-                      <a:round/>
-                      <a:headEnd type="none" w="med" len="med"/>
-                      <a:tailEnd type="none" w="med" len="med"/>
-                    </a:lnB>
-                    <a:solidFill>
-                      <a:srgbClr val="F4F6F8"/>
-                    </a:solidFill>
-                  </a:tcPr>
-                </a:tc>
-                <a:tc>
-                  <a:txBody>
-                    <a:bodyPr/>
-                    <a:lstStyle/>
-                    <a:p>
-                      <a:pPr marL="0" indent="0" algn="ctr">
-                        <a:buNone/>
-                      </a:pPr>
-                      <a:r>
-                        <a:rPr lang="en-US" sz="900" dirty="0">
-                          <a:solidFill>
-                            <a:srgbClr val="1F2933"/>
-                          </a:solidFill>
-                        </a:rPr>
-                        <a:t>TBD</a:t>
-                      </a:r>
-                      <a:endParaRPr lang="en-US" sz="950" dirty="0"/>
-                    </a:p>
-                  </a:txBody>
-                  <a:tcPr anchor="ctr">
-                    <a:lnL w="9525" cap="flat" cmpd="sng" algn="ctr">
-                      <a:solidFill>
-                        <a:srgbClr val="D9DEE4"/>
-                      </a:solidFill>
-                      <a:prstDash val="solid"/>
-                      <a:round/>
-                      <a:headEnd type="none" w="med" len="med"/>
-                      <a:tailEnd type="none" w="med" len="med"/>
-                    </a:lnL>
-                    <a:lnR w="9525" cap="flat" cmpd="sng" algn="ctr">
-                      <a:solidFill>
-                        <a:srgbClr val="D9DEE4"/>
-                      </a:solidFill>
-                      <a:prstDash val="solid"/>
-                      <a:round/>
-                      <a:headEnd type="none" w="med" len="med"/>
-                      <a:tailEnd type="none" w="med" len="med"/>
-                    </a:lnR>
-                    <a:lnT w="9525" cap="flat" cmpd="sng" algn="ctr">
-                      <a:solidFill>
-                        <a:srgbClr val="D9DEE4"/>
-                      </a:solidFill>
-                      <a:prstDash val="solid"/>
-                      <a:round/>
-                      <a:headEnd type="none" w="med" len="med"/>
-                      <a:tailEnd type="none" w="med" len="med"/>
-                    </a:lnT>
-                    <a:lnB w="9525" cap="flat" cmpd="sng" algn="ctr">
-                      <a:solidFill>
-                        <a:srgbClr val="D9DEE4"/>
-                      </a:solidFill>
-                      <a:prstDash val="solid"/>
-                      <a:round/>
-                      <a:headEnd type="none" w="med" len="med"/>
-                      <a:tailEnd type="none" w="med" len="med"/>
-                    </a:lnB>
-                    <a:solidFill>
-                      <a:srgbClr val="F4F6F8"/>
-                    </a:solidFill>
-                  </a:tcPr>
-                </a:tc>
-                <a:extLst>
-                  <a:ext uri="{0D108BD9-81ED-4DB2-BD59-A6C34878D82A}">
-                    <a16:rowId xmlns:a16="http://schemas.microsoft.com/office/drawing/2014/main" val="10002"/>
-                  </a:ext>
-                </a:extLst>
-              </a:tr>
-              <a:tr h="270000">
-                <a:tc>
-                  <a:txBody>
-                    <a:bodyPr/>
-                    <a:lstStyle/>
-                    <a:p>
-                      <a:pPr marL="0" indent="0" algn="l">
-                        <a:buNone/>
-                      </a:pPr>
-                      <a:r>
-                        <a:rPr lang="en-US" sz="900" b="1" dirty="0">
-                          <a:solidFill>
-                            <a:srgbClr val="1F2933"/>
-                          </a:solidFill>
-                        </a:rPr>
-                        <a:t>NPM – H.H. Sheikh Mansour Bin Zayed Al Nahyan Engineering Office</a:t>
-                      </a:r>
-                      <a:endParaRPr lang="en-US" sz="950" dirty="0"/>
-                    </a:p>
-                  </a:txBody>
-                  <a:tcPr anchor="ctr">
-                    <a:lnL w="9525" cap="flat" cmpd="sng" algn="ctr">
-                      <a:solidFill>
-                        <a:srgbClr val="D9DEE4"/>
-                      </a:solidFill>
-                      <a:prstDash val="solid"/>
-                      <a:round/>
-                      <a:headEnd type="none" w="med" len="med"/>
-                      <a:tailEnd type="none" w="med" len="med"/>
-                    </a:lnL>
-                    <a:lnR w="9525" cap="flat" cmpd="sng" algn="ctr">
-                      <a:solidFill>
-                        <a:srgbClr val="D9DEE4"/>
-                      </a:solidFill>
-                      <a:prstDash val="solid"/>
-                      <a:round/>
-                      <a:headEnd type="none" w="med" len="med"/>
-                      <a:tailEnd type="none" w="med" len="med"/>
-                    </a:lnR>
-                    <a:lnT w="9525" cap="flat" cmpd="sng" algn="ctr">
-                      <a:solidFill>
-                        <a:srgbClr val="D9DEE4"/>
-                      </a:solidFill>
-                      <a:prstDash val="solid"/>
-                      <a:round/>
-                      <a:headEnd type="none" w="med" len="med"/>
-                      <a:tailEnd type="none" w="med" len="med"/>
-                    </a:lnT>
-                    <a:lnB w="9525" cap="flat" cmpd="sng" algn="ctr">
-                      <a:solidFill>
-                        <a:srgbClr val="D9DEE4"/>
-                      </a:solidFill>
-                      <a:prstDash val="solid"/>
-                      <a:round/>
-                      <a:headEnd type="none" w="med" len="med"/>
-                      <a:tailEnd type="none" w="med" len="med"/>
-                    </a:lnB>
-                    <a:solidFill>
-                      <a:srgbClr val="FFFFFF"/>
-                    </a:solidFill>
-                  </a:tcPr>
-                </a:tc>
-                <a:tc>
-                  <a:txBody>
-                    <a:bodyPr/>
-                    <a:lstStyle/>
-                    <a:p>
-                      <a:pPr marL="0" indent="0" algn="ctr">
-                        <a:buNone/>
-                      </a:pPr>
-                      <a:r>
-                        <a:rPr lang="en-US" sz="900" dirty="0">
-                          <a:solidFill>
-                            <a:srgbClr val="1F2933"/>
-                          </a:solidFill>
-                        </a:rPr>
-                        <a:t>7.28m</a:t>
-                      </a:r>
-                      <a:endParaRPr lang="en-US" sz="950" dirty="0"/>
-                    </a:p>
-                  </a:txBody>
-                  <a:tcPr anchor="ctr">
-                    <a:lnL w="9525" cap="flat" cmpd="sng" algn="ctr">
-                      <a:solidFill>
-                        <a:srgbClr val="D9DEE4"/>
-                      </a:solidFill>
-                      <a:prstDash val="solid"/>
-                      <a:round/>
-                      <a:headEnd type="none" w="med" len="med"/>
-                      <a:tailEnd type="none" w="med" len="med"/>
-                    </a:lnL>
-                    <a:lnR w="9525" cap="flat" cmpd="sng" algn="ctr">
-                      <a:solidFill>
-                        <a:srgbClr val="D9DEE4"/>
-                      </a:solidFill>
-                      <a:prstDash val="solid"/>
-                      <a:round/>
-                      <a:headEnd type="none" w="med" len="med"/>
-                      <a:tailEnd type="none" w="med" len="med"/>
-                    </a:lnR>
-                    <a:lnT w="9525" cap="flat" cmpd="sng" algn="ctr">
-                      <a:solidFill>
-                        <a:srgbClr val="D9DEE4"/>
-                      </a:solidFill>
-                      <a:prstDash val="solid"/>
-                      <a:round/>
-                      <a:headEnd type="none" w="med" len="med"/>
-                      <a:tailEnd type="none" w="med" len="med"/>
-                    </a:lnT>
-                    <a:lnB w="9525" cap="flat" cmpd="sng" algn="ctr">
-                      <a:solidFill>
-                        <a:srgbClr val="D9DEE4"/>
-                      </a:solidFill>
-                      <a:prstDash val="solid"/>
-                      <a:round/>
-                      <a:headEnd type="none" w="med" len="med"/>
-                      <a:tailEnd type="none" w="med" len="med"/>
-                    </a:lnB>
-                    <a:solidFill>
-                      <a:srgbClr val="FFFFFF"/>
-                    </a:solidFill>
-                  </a:tcPr>
-                </a:tc>
-                <a:tc>
-                  <a:txBody>
-                    <a:bodyPr/>
-                    <a:lstStyle/>
-                    <a:p>
-                      <a:pPr marL="0" indent="0" algn="ctr">
-                        <a:buNone/>
-                      </a:pPr>
-                      <a:r>
-                        <a:rPr lang="en-US" sz="900" dirty="0">
-                          <a:solidFill>
-                            <a:srgbClr val="1F2933"/>
-                          </a:solidFill>
-                        </a:rPr>
-                        <a:t>60 days</a:t>
-                      </a:r>
-                      <a:endParaRPr lang="en-US" sz="950" dirty="0"/>
-                    </a:p>
-                  </a:txBody>
-                  <a:tcPr anchor="ctr">
-                    <a:lnL w="9525" cap="flat" cmpd="sng" algn="ctr">
-                      <a:solidFill>
-                        <a:srgbClr val="D9DEE4"/>
-                      </a:solidFill>
-                      <a:prstDash val="solid"/>
-                      <a:round/>
-                      <a:headEnd type="none" w="med" len="med"/>
-                      <a:tailEnd type="none" w="med" len="med"/>
-                    </a:lnL>
-                    <a:lnR w="9525" cap="flat" cmpd="sng" algn="ctr">
-                      <a:solidFill>
-                        <a:srgbClr val="D9DEE4"/>
-                      </a:solidFill>
-                      <a:prstDash val="solid"/>
-                      <a:round/>
-                      <a:headEnd type="none" w="med" len="med"/>
-                      <a:tailEnd type="none" w="med" len="med"/>
-                    </a:lnR>
-                    <a:lnT w="9525" cap="flat" cmpd="sng" algn="ctr">
-                      <a:solidFill>
-                        <a:srgbClr val="D9DEE4"/>
-                      </a:solidFill>
-                      <a:prstDash val="solid"/>
-                      <a:round/>
-                      <a:headEnd type="none" w="med" len="med"/>
-                      <a:tailEnd type="none" w="med" len="med"/>
-                    </a:lnT>
-                    <a:lnB w="9525" cap="flat" cmpd="sng" algn="ctr">
-                      <a:solidFill>
-                        <a:srgbClr val="D9DEE4"/>
-                      </a:solidFill>
-                      <a:prstDash val="solid"/>
-                      <a:round/>
-                      <a:headEnd type="none" w="med" len="med"/>
-                      <a:tailEnd type="none" w="med" len="med"/>
-                    </a:lnB>
-                    <a:solidFill>
-                      <a:srgbClr val="FFFFFF"/>
-                    </a:solidFill>
-                  </a:tcPr>
-                </a:tc>
-                <a:tc>
-                  <a:txBody>
-                    <a:bodyPr/>
-                    <a:lstStyle/>
-                    <a:p>
-                      <a:pPr marL="0" indent="0" algn="l">
-                        <a:buNone/>
-                      </a:pPr>
-                      <a:r>
-                        <a:rPr lang="en-US" sz="900" dirty="0">
-                          <a:solidFill>
-                            <a:srgbClr val="1F2933"/>
-                          </a:solidFill>
-                        </a:rPr>
-                        <a:t>TBD</a:t>
-                      </a:r>
-                      <a:endParaRPr lang="en-US" sz="950" dirty="0"/>
-                    </a:p>
-                  </a:txBody>
-                  <a:tcPr anchor="ctr">
-                    <a:lnL w="9525" cap="flat" cmpd="sng" algn="ctr">
-                      <a:solidFill>
-                        <a:srgbClr val="D9DEE4"/>
-                      </a:solidFill>
-                      <a:prstDash val="solid"/>
-                      <a:round/>
-                      <a:headEnd type="none" w="med" len="med"/>
-                      <a:tailEnd type="none" w="med" len="med"/>
-                    </a:lnL>
-                    <a:lnR w="9525" cap="flat" cmpd="sng" algn="ctr">
-                      <a:solidFill>
-                        <a:srgbClr val="D9DEE4"/>
-                      </a:solidFill>
-                      <a:prstDash val="solid"/>
-                      <a:round/>
-                      <a:headEnd type="none" w="med" len="med"/>
-                      <a:tailEnd type="none" w="med" len="med"/>
-                    </a:lnR>
-                    <a:lnT w="9525" cap="flat" cmpd="sng" algn="ctr">
-                      <a:solidFill>
-                        <a:srgbClr val="D9DEE4"/>
-                      </a:solidFill>
-                      <a:prstDash val="solid"/>
-                      <a:round/>
-                      <a:headEnd type="none" w="med" len="med"/>
-                      <a:tailEnd type="none" w="med" len="med"/>
-                    </a:lnT>
-                    <a:lnB w="9525" cap="flat" cmpd="sng" algn="ctr">
-                      <a:solidFill>
-                        <a:srgbClr val="D9DEE4"/>
-                      </a:solidFill>
-                      <a:prstDash val="solid"/>
-                      <a:round/>
-                      <a:headEnd type="none" w="med" len="med"/>
-                      <a:tailEnd type="none" w="med" len="med"/>
-                    </a:lnB>
-                    <a:solidFill>
-                      <a:srgbClr val="FFFFFF"/>
-                    </a:solidFill>
-                  </a:tcPr>
-                </a:tc>
-                <a:tc>
-                  <a:txBody>
-                    <a:bodyPr/>
-                    <a:lstStyle/>
-                    <a:p>
-                      <a:pPr marL="0" indent="0" algn="ctr">
-                        <a:buNone/>
-                      </a:pPr>
-                      <a:r>
-                        <a:rPr lang="en-US" sz="900" dirty="0">
-                          <a:solidFill>
-                            <a:srgbClr val="1F2933"/>
-                          </a:solidFill>
-                        </a:rPr>
-                        <a:t>TBD</a:t>
-                      </a:r>
-                      <a:endParaRPr lang="en-US" sz="950" dirty="0"/>
-                    </a:p>
-                  </a:txBody>
-                  <a:tcPr anchor="ctr">
-                    <a:lnL w="9525" cap="flat" cmpd="sng" algn="ctr">
-                      <a:solidFill>
-                        <a:srgbClr val="D9DEE4"/>
-                      </a:solidFill>
-                      <a:prstDash val="solid"/>
-                      <a:round/>
-                      <a:headEnd type="none" w="med" len="med"/>
-                      <a:tailEnd type="none" w="med" len="med"/>
-                    </a:lnL>
-                    <a:lnR w="9525" cap="flat" cmpd="sng" algn="ctr">
-                      <a:solidFill>
-                        <a:srgbClr val="D9DEE4"/>
-                      </a:solidFill>
-                      <a:prstDash val="solid"/>
-                      <a:round/>
-                      <a:headEnd type="none" w="med" len="med"/>
-                      <a:tailEnd type="none" w="med" len="med"/>
-                    </a:lnR>
-                    <a:lnT w="9525" cap="flat" cmpd="sng" algn="ctr">
-                      <a:solidFill>
-                        <a:srgbClr val="D9DEE4"/>
-                      </a:solidFill>
-                      <a:prstDash val="solid"/>
-                      <a:round/>
-                      <a:headEnd type="none" w="med" len="med"/>
-                      <a:tailEnd type="none" w="med" len="med"/>
-                    </a:lnT>
-                    <a:lnB w="9525" cap="flat" cmpd="sng" algn="ctr">
-                      <a:solidFill>
-                        <a:srgbClr val="D9DEE4"/>
-                      </a:solidFill>
-                      <a:prstDash val="solid"/>
-                      <a:round/>
-                      <a:headEnd type="none" w="med" len="med"/>
-                      <a:tailEnd type="none" w="med" len="med"/>
-                    </a:lnB>
-                    <a:solidFill>
-                      <a:srgbClr val="FFFFFF"/>
-                    </a:solidFill>
-                  </a:tcPr>
-                </a:tc>
-                <a:tc>
-                  <a:txBody>
-                    <a:bodyPr/>
-                    <a:lstStyle/>
-                    <a:p>
-                      <a:pPr marL="0" indent="0" algn="l">
-                        <a:buNone/>
-                      </a:pPr>
-                      <a:r>
-                        <a:rPr lang="en-US" sz="900" i="1" dirty="0">
-                          <a:solidFill>
-                            <a:srgbClr val="1F2933"/>
-                          </a:solidFill>
-                        </a:rPr>
-                        <a:t>To be determined in the meeting</a:t>
-                      </a:r>
-                      <a:endParaRPr lang="en-US" sz="950" dirty="0"/>
-                    </a:p>
-                  </a:txBody>
-                  <a:tcPr anchor="ctr">
-                    <a:lnL w="9525" cap="flat" cmpd="sng" algn="ctr">
-                      <a:solidFill>
-                        <a:srgbClr val="D9DEE4"/>
-                      </a:solidFill>
-                      <a:prstDash val="solid"/>
-                      <a:round/>
-                      <a:headEnd type="none" w="med" len="med"/>
-                      <a:tailEnd type="none" w="med" len="med"/>
-                    </a:lnL>
-                    <a:lnR w="9525" cap="flat" cmpd="sng" algn="ctr">
-                      <a:solidFill>
-                        <a:srgbClr val="D9DEE4"/>
-                      </a:solidFill>
-                      <a:prstDash val="solid"/>
-                      <a:round/>
-                      <a:headEnd type="none" w="med" len="med"/>
-                      <a:tailEnd type="none" w="med" len="med"/>
-                    </a:lnR>
-                    <a:lnT w="9525" cap="flat" cmpd="sng" algn="ctr">
-                      <a:solidFill>
-                        <a:srgbClr val="D9DEE4"/>
-                      </a:solidFill>
-                      <a:prstDash val="solid"/>
-                      <a:round/>
-                      <a:headEnd type="none" w="med" len="med"/>
-                      <a:tailEnd type="none" w="med" len="med"/>
-                    </a:lnT>
-                    <a:lnB w="9525" cap="flat" cmpd="sng" algn="ctr">
-                      <a:solidFill>
-                        <a:srgbClr val="D9DEE4"/>
-                      </a:solidFill>
-                      <a:prstDash val="solid"/>
-                      <a:round/>
-                      <a:headEnd type="none" w="med" len="med"/>
-                      <a:tailEnd type="none" w="med" len="med"/>
-                    </a:lnB>
-                    <a:solidFill>
-                      <a:srgbClr val="FFFFFF"/>
-                    </a:solidFill>
-                  </a:tcPr>
-                </a:tc>
-                <a:tc>
-                  <a:txBody>
-                    <a:bodyPr/>
-                    <a:lstStyle/>
-                    <a:p>
-                      <a:pPr marL="0" indent="0" algn="ctr">
-                        <a:buNone/>
-                      </a:pPr>
-                      <a:r>
-                        <a:rPr lang="en-US" sz="900" dirty="0">
-                          <a:solidFill>
-                            <a:srgbClr val="1F2933"/>
-                          </a:solidFill>
-                        </a:rPr>
-                        <a:t>TBD</a:t>
-                      </a:r>
-                      <a:endParaRPr lang="en-US" sz="950" dirty="0"/>
-                    </a:p>
-                  </a:txBody>
-                  <a:tcPr anchor="ctr">
-                    <a:lnL w="9525" cap="flat" cmpd="sng" algn="ctr">
-                      <a:solidFill>
-                        <a:srgbClr val="D9DEE4"/>
-                      </a:solidFill>
-                      <a:prstDash val="solid"/>
-                      <a:round/>
-                      <a:headEnd type="none" w="med" len="med"/>
-                      <a:tailEnd type="none" w="med" len="med"/>
-                    </a:lnL>
-                    <a:lnR w="9525" cap="flat" cmpd="sng" algn="ctr">
-                      <a:solidFill>
-                        <a:srgbClr val="D9DEE4"/>
-                      </a:solidFill>
-                      <a:prstDash val="solid"/>
-                      <a:round/>
-                      <a:headEnd type="none" w="med" len="med"/>
-                      <a:tailEnd type="none" w="med" len="med"/>
-                    </a:lnR>
-                    <a:lnT w="9525" cap="flat" cmpd="sng" algn="ctr">
-                      <a:solidFill>
-                        <a:srgbClr val="D9DEE4"/>
-                      </a:solidFill>
-                      <a:prstDash val="solid"/>
-                      <a:round/>
-                      <a:headEnd type="none" w="med" len="med"/>
-                      <a:tailEnd type="none" w="med" len="med"/>
-                    </a:lnT>
-                    <a:lnB w="9525" cap="flat" cmpd="sng" algn="ctr">
-                      <a:solidFill>
-                        <a:srgbClr val="D9DEE4"/>
-                      </a:solidFill>
-                      <a:prstDash val="solid"/>
-                      <a:round/>
-                      <a:headEnd type="none" w="med" len="med"/>
-                      <a:tailEnd type="none" w="med" len="med"/>
-                    </a:lnB>
-                    <a:solidFill>
-                      <a:srgbClr val="FFFFFF"/>
-                    </a:solidFill>
-                  </a:tcPr>
-                </a:tc>
-                <a:extLst>
-                  <a:ext uri="{0D108BD9-81ED-4DB2-BD59-A6C34878D82A}">
-                    <a16:rowId xmlns:a16="http://schemas.microsoft.com/office/drawing/2014/main" val="10001"/>
-                  </a:ext>
-                </a:extLst>
-              </a:tr>
-              <a:tr h="270000">
-                <a:tc>
-                  <a:txBody>
-                    <a:bodyPr/>
-                    <a:lstStyle/>
-                    <a:p>
-                      <a:pPr marL="0" indent="0" algn="l">
-                        <a:buNone/>
-                      </a:pPr>
-                      <a:r>
-                        <a:rPr lang="en-US" sz="900" b="1" dirty="0">
-                          <a:solidFill>
-                            <a:srgbClr val="1F2933"/>
-                          </a:solidFill>
-                        </a:rPr>
-                        <a:t>NPM – E11 Eng Conslt And Project Mgt - N</a:t>
-                      </a:r>
-                      <a:endParaRPr lang="en-US" sz="950" dirty="0"/>
-                    </a:p>
-                  </a:txBody>
-                  <a:tcPr anchor="ctr">
-                    <a:lnL w="9525" cap="flat" cmpd="sng" algn="ctr">
-                      <a:solidFill>
-                        <a:srgbClr val="D9DEE4"/>
-                      </a:solidFill>
-                      <a:prstDash val="solid"/>
-                      <a:round/>
-                      <a:headEnd type="none" w="med" len="med"/>
-                      <a:tailEnd type="none" w="med" len="med"/>
-                    </a:lnL>
-                    <a:lnR w="9525" cap="flat" cmpd="sng" algn="ctr">
-                      <a:solidFill>
-                        <a:srgbClr val="D9DEE4"/>
-                      </a:solidFill>
-                      <a:prstDash val="solid"/>
-                      <a:round/>
-                      <a:headEnd type="none" w="med" len="med"/>
-                      <a:tailEnd type="none" w="med" len="med"/>
-                    </a:lnR>
-                    <a:lnT w="9525" cap="flat" cmpd="sng" algn="ctr">
-                      <a:solidFill>
-                        <a:srgbClr val="D9DEE4"/>
-                      </a:solidFill>
-                      <a:prstDash val="solid"/>
-                      <a:round/>
-                      <a:headEnd type="none" w="med" len="med"/>
-                      <a:tailEnd type="none" w="med" len="med"/>
-                    </a:lnT>
-                    <a:lnB w="9525" cap="flat" cmpd="sng" algn="ctr">
-                      <a:solidFill>
-                        <a:srgbClr val="D9DEE4"/>
-                      </a:solidFill>
-                      <a:prstDash val="solid"/>
-                      <a:round/>
-                      <a:headEnd type="none" w="med" len="med"/>
-                      <a:tailEnd type="none" w="med" len="med"/>
-                    </a:lnB>
-                    <a:solidFill>
-                      <a:srgbClr val="F4F6F8"/>
-                    </a:solidFill>
-                  </a:tcPr>
-                </a:tc>
-                <a:tc>
-                  <a:txBody>
-                    <a:bodyPr/>
-                    <a:lstStyle/>
-                    <a:p>
-                      <a:pPr marL="0" indent="0" algn="ctr">
-                        <a:buNone/>
-                      </a:pPr>
-                      <a:r>
-                        <a:rPr lang="en-US" sz="900" dirty="0">
-                          <a:solidFill>
-                            <a:srgbClr val="1F2933"/>
-                          </a:solidFill>
-                        </a:rPr>
-                        <a:t>1.74m</a:t>
-                      </a:r>
-                      <a:endParaRPr lang="en-US" sz="950" dirty="0"/>
-                    </a:p>
-                  </a:txBody>
-                  <a:tcPr anchor="ctr">
-                    <a:lnL w="9525" cap="flat" cmpd="sng" algn="ctr">
-                      <a:solidFill>
-                        <a:srgbClr val="D9DEE4"/>
-                      </a:solidFill>
-                      <a:prstDash val="solid"/>
-                      <a:round/>
-                      <a:headEnd type="none" w="med" len="med"/>
-                      <a:tailEnd type="none" w="med" len="med"/>
-                    </a:lnL>
-                    <a:lnR w="9525" cap="flat" cmpd="sng" algn="ctr">
-                      <a:solidFill>
-                        <a:srgbClr val="D9DEE4"/>
-                      </a:solidFill>
-                      <a:prstDash val="solid"/>
-                      <a:round/>
-                      <a:headEnd type="none" w="med" len="med"/>
-                      <a:tailEnd type="none" w="med" len="med"/>
-                    </a:lnR>
-                    <a:lnT w="9525" cap="flat" cmpd="sng" algn="ctr">
-                      <a:solidFill>
-                        <a:srgbClr val="D9DEE4"/>
-                      </a:solidFill>
-                      <a:prstDash val="solid"/>
-                      <a:round/>
-                      <a:headEnd type="none" w="med" len="med"/>
-                      <a:tailEnd type="none" w="med" len="med"/>
-                    </a:lnT>
-                    <a:lnB w="9525" cap="flat" cmpd="sng" algn="ctr">
-                      <a:solidFill>
-                        <a:srgbClr val="D9DEE4"/>
-                      </a:solidFill>
-                      <a:prstDash val="solid"/>
-                      <a:round/>
-                      <a:headEnd type="none" w="med" len="med"/>
-                      <a:tailEnd type="none" w="med" len="med"/>
-                    </a:lnB>
-                    <a:solidFill>
-                      <a:srgbClr val="F4F6F8"/>
-                    </a:solidFill>
-                  </a:tcPr>
-                </a:tc>
-                <a:tc>
-                  <a:txBody>
-                    <a:bodyPr/>
-                    <a:lstStyle/>
-                    <a:p>
-                      <a:pPr marL="0" indent="0" algn="ctr">
-                        <a:buNone/>
-                      </a:pPr>
-                      <a:r>
-                        <a:rPr lang="en-US" sz="900" dirty="0">
-                          <a:solidFill>
-                            <a:srgbClr val="1F2933"/>
-                          </a:solidFill>
-                        </a:rPr>
-                        <a:t>273 days</a:t>
-                      </a:r>
-                      <a:endParaRPr lang="en-US" sz="950" dirty="0"/>
-                    </a:p>
-                  </a:txBody>
-                  <a:tcPr anchor="ctr">
-                    <a:lnL w="9525" cap="flat" cmpd="sng" algn="ctr">
-                      <a:solidFill>
-                        <a:srgbClr val="D9DEE4"/>
-                      </a:solidFill>
-                      <a:prstDash val="solid"/>
-                      <a:round/>
-                      <a:headEnd type="none" w="med" len="med"/>
-                      <a:tailEnd type="none" w="med" len="med"/>
-                    </a:lnL>
-                    <a:lnR w="9525" cap="flat" cmpd="sng" algn="ctr">
-                      <a:solidFill>
-                        <a:srgbClr val="D9DEE4"/>
-                      </a:solidFill>
-                      <a:prstDash val="solid"/>
-                      <a:round/>
-                      <a:headEnd type="none" w="med" len="med"/>
-                      <a:tailEnd type="none" w="med" len="med"/>
-                    </a:lnR>
-                    <a:lnT w="9525" cap="flat" cmpd="sng" algn="ctr">
-                      <a:solidFill>
-                        <a:srgbClr val="D9DEE4"/>
-                      </a:solidFill>
-                      <a:prstDash val="solid"/>
-                      <a:round/>
-                      <a:headEnd type="none" w="med" len="med"/>
-                      <a:tailEnd type="none" w="med" len="med"/>
-                    </a:lnT>
-                    <a:lnB w="9525" cap="flat" cmpd="sng" algn="ctr">
-                      <a:solidFill>
-                        <a:srgbClr val="D9DEE4"/>
-                      </a:solidFill>
-                      <a:prstDash val="solid"/>
-                      <a:round/>
-                      <a:headEnd type="none" w="med" len="med"/>
-                      <a:tailEnd type="none" w="med" len="med"/>
-                    </a:lnB>
-                    <a:solidFill>
-                      <a:srgbClr val="F4F6F8"/>
-                    </a:solidFill>
-                  </a:tcPr>
-                </a:tc>
-                <a:tc>
-                  <a:txBody>
-                    <a:bodyPr/>
-                    <a:lstStyle/>
-                    <a:p>
-                      <a:pPr marL="0" indent="0" algn="l">
-                        <a:buNone/>
-                      </a:pPr>
-                      <a:r>
-                        <a:rPr lang="en-US" sz="900" dirty="0">
-                          <a:solidFill>
-                            <a:srgbClr val="1F2933"/>
-                          </a:solidFill>
-                        </a:rPr>
-                        <a:t>TBD</a:t>
-                      </a:r>
-                      <a:endParaRPr lang="en-US" sz="950" dirty="0"/>
-                    </a:p>
-                  </a:txBody>
-                  <a:tcPr anchor="ctr">
-                    <a:lnL w="9525" cap="flat" cmpd="sng" algn="ctr">
-                      <a:solidFill>
-                        <a:srgbClr val="D9DEE4"/>
-                      </a:solidFill>
-                      <a:prstDash val="solid"/>
-                      <a:round/>
-                      <a:headEnd type="none" w="med" len="med"/>
-                      <a:tailEnd type="none" w="med" len="med"/>
-                    </a:lnL>
-                    <a:lnR w="9525" cap="flat" cmpd="sng" algn="ctr">
-                      <a:solidFill>
-                        <a:srgbClr val="D9DEE4"/>
-                      </a:solidFill>
-                      <a:prstDash val="solid"/>
-                      <a:round/>
-                      <a:headEnd type="none" w="med" len="med"/>
-                      <a:tailEnd type="none" w="med" len="med"/>
-                    </a:lnR>
-                    <a:lnT w="9525" cap="flat" cmpd="sng" algn="ctr">
-                      <a:solidFill>
-                        <a:srgbClr val="D9DEE4"/>
-                      </a:solidFill>
-                      <a:prstDash val="solid"/>
-                      <a:round/>
-                      <a:headEnd type="none" w="med" len="med"/>
-                      <a:tailEnd type="none" w="med" len="med"/>
-                    </a:lnT>
-                    <a:lnB w="9525" cap="flat" cmpd="sng" algn="ctr">
-                      <a:solidFill>
-                        <a:srgbClr val="D9DEE4"/>
-                      </a:solidFill>
-                      <a:prstDash val="solid"/>
-                      <a:round/>
-                      <a:headEnd type="none" w="med" len="med"/>
-                      <a:tailEnd type="none" w="med" len="med"/>
-                    </a:lnB>
-                    <a:solidFill>
-                      <a:srgbClr val="F4F6F8"/>
-                    </a:solidFill>
-                  </a:tcPr>
-                </a:tc>
-                <a:tc>
-                  <a:txBody>
-                    <a:bodyPr/>
-                    <a:lstStyle/>
-                    <a:p>
-                      <a:pPr marL="0" indent="0" algn="ctr">
-                        <a:buNone/>
-                      </a:pPr>
-                      <a:r>
-                        <a:rPr lang="en-US" sz="900" dirty="0">
-                          <a:solidFill>
-                            <a:srgbClr val="1F2933"/>
-                          </a:solidFill>
-                        </a:rPr>
-                        <a:t>TBD</a:t>
-                      </a:r>
-                      <a:endParaRPr lang="en-US" sz="950" dirty="0"/>
-                    </a:p>
-                  </a:txBody>
-                  <a:tcPr anchor="ctr">
-                    <a:lnL w="9525" cap="flat" cmpd="sng" algn="ctr">
-                      <a:solidFill>
-                        <a:srgbClr val="D9DEE4"/>
-                      </a:solidFill>
-                      <a:prstDash val="solid"/>
-                      <a:round/>
-                      <a:headEnd type="none" w="med" len="med"/>
-                      <a:tailEnd type="none" w="med" len="med"/>
-                    </a:lnL>
-                    <a:lnR w="9525" cap="flat" cmpd="sng" algn="ctr">
-                      <a:solidFill>
-                        <a:srgbClr val="D9DEE4"/>
-                      </a:solidFill>
-                      <a:prstDash val="solid"/>
-                      <a:round/>
-                      <a:headEnd type="none" w="med" len="med"/>
-                      <a:tailEnd type="none" w="med" len="med"/>
-                    </a:lnR>
-                    <a:lnT w="9525" cap="flat" cmpd="sng" algn="ctr">
-                      <a:solidFill>
-                        <a:srgbClr val="D9DEE4"/>
-                      </a:solidFill>
-                      <a:prstDash val="solid"/>
-                      <a:round/>
-                      <a:headEnd type="none" w="med" len="med"/>
-                      <a:tailEnd type="none" w="med" len="med"/>
-                    </a:lnT>
-                    <a:lnB w="9525" cap="flat" cmpd="sng" algn="ctr">
-                      <a:solidFill>
-                        <a:srgbClr val="D9DEE4"/>
-                      </a:solidFill>
-                      <a:prstDash val="solid"/>
-                      <a:round/>
-                      <a:headEnd type="none" w="med" len="med"/>
-                      <a:tailEnd type="none" w="med" len="med"/>
-                    </a:lnB>
-                    <a:solidFill>
-                      <a:srgbClr val="F4F6F8"/>
-                    </a:solidFill>
-                  </a:tcPr>
-                </a:tc>
-                <a:tc>
-                  <a:txBody>
-                    <a:bodyPr/>
-                    <a:lstStyle/>
-                    <a:p>
-                      <a:pPr marL="0" indent="0" algn="l">
-                        <a:buNone/>
-                      </a:pPr>
-                      <a:r>
-                        <a:rPr lang="en-US" sz="900" i="1" dirty="0">
-                          <a:solidFill>
-                            <a:srgbClr val="1F2933"/>
-                          </a:solidFill>
-                        </a:rPr>
-                        <a:t>To be determined in the meeting</a:t>
-                      </a:r>
-                      <a:endParaRPr lang="en-US" sz="950" dirty="0"/>
-                    </a:p>
-                  </a:txBody>
-                  <a:tcPr anchor="ctr">
-                    <a:lnL w="9525" cap="flat" cmpd="sng" algn="ctr">
-                      <a:solidFill>
-                        <a:srgbClr val="D9DEE4"/>
-                      </a:solidFill>
-                      <a:prstDash val="solid"/>
-                      <a:round/>
-                      <a:headEnd type="none" w="med" len="med"/>
-                      <a:tailEnd type="none" w="med" len="med"/>
-                    </a:lnL>
-                    <a:lnR w="9525" cap="flat" cmpd="sng" algn="ctr">
-                      <a:solidFill>
-                        <a:srgbClr val="D9DEE4"/>
-                      </a:solidFill>
-                      <a:prstDash val="solid"/>
-                      <a:round/>
-                      <a:headEnd type="none" w="med" len="med"/>
-                      <a:tailEnd type="none" w="med" len="med"/>
-                    </a:lnR>
-                    <a:lnT w="9525" cap="flat" cmpd="sng" algn="ctr">
-                      <a:solidFill>
-                        <a:srgbClr val="D9DEE4"/>
-                      </a:solidFill>
-                      <a:prstDash val="solid"/>
-                      <a:round/>
-                      <a:headEnd type="none" w="med" len="med"/>
-                      <a:tailEnd type="none" w="med" len="med"/>
-                    </a:lnT>
-                    <a:lnB w="9525" cap="flat" cmpd="sng" algn="ctr">
-                      <a:solidFill>
-                        <a:srgbClr val="D9DEE4"/>
-                      </a:solidFill>
-                      <a:prstDash val="solid"/>
-                      <a:round/>
-                      <a:headEnd type="none" w="med" len="med"/>
-                      <a:tailEnd type="none" w="med" len="med"/>
-                    </a:lnB>
-                    <a:solidFill>
-                      <a:srgbClr val="F4F6F8"/>
-                    </a:solidFill>
-                  </a:tcPr>
-                </a:tc>
-                <a:tc>
-                  <a:txBody>
-                    <a:bodyPr/>
-                    <a:lstStyle/>
-                    <a:p>
-                      <a:pPr marL="0" indent="0" algn="ctr">
-                        <a:buNone/>
-                      </a:pPr>
-                      <a:r>
-                        <a:rPr lang="en-US" sz="900" dirty="0">
-                          <a:solidFill>
-                            <a:srgbClr val="1F2933"/>
-                          </a:solidFill>
-                        </a:rPr>
-                        <a:t>TBD</a:t>
-                      </a:r>
-                      <a:endParaRPr lang="en-US" sz="950" dirty="0"/>
-                    </a:p>
-                  </a:txBody>
-                  <a:tcPr anchor="ctr">
-                    <a:lnL w="9525" cap="flat" cmpd="sng" algn="ctr">
-                      <a:solidFill>
-                        <a:srgbClr val="D9DEE4"/>
-                      </a:solidFill>
-                      <a:prstDash val="solid"/>
-                      <a:round/>
-                      <a:headEnd type="none" w="med" len="med"/>
-                      <a:tailEnd type="none" w="med" len="med"/>
-                    </a:lnL>
-                    <a:lnR w="9525" cap="flat" cmpd="sng" algn="ctr">
-                      <a:solidFill>
-                        <a:srgbClr val="D9DEE4"/>
-                      </a:solidFill>
-                      <a:prstDash val="solid"/>
-                      <a:round/>
-                      <a:headEnd type="none" w="med" len="med"/>
-                      <a:tailEnd type="none" w="med" len="med"/>
-                    </a:lnR>
-                    <a:lnT w="9525" cap="flat" cmpd="sng" algn="ctr">
-                      <a:solidFill>
-                        <a:srgbClr val="D9DEE4"/>
-                      </a:solidFill>
-                      <a:prstDash val="solid"/>
-                      <a:round/>
-                      <a:headEnd type="none" w="med" len="med"/>
-                      <a:tailEnd type="none" w="med" len="med"/>
-                    </a:lnT>
-                    <a:lnB w="9525" cap="flat" cmpd="sng" algn="ctr">
-                      <a:solidFill>
-                        <a:srgbClr val="D9DEE4"/>
-                      </a:solidFill>
-                      <a:prstDash val="solid"/>
-                      <a:round/>
-                      <a:headEnd type="none" w="med" len="med"/>
-                      <a:tailEnd type="none" w="med" len="med"/>
-                    </a:lnB>
-                    <a:solidFill>
-                      <a:srgbClr val="F4F6F8"/>
-                    </a:solidFill>
-                  </a:tcPr>
-                </a:tc>
-                <a:extLst>
-                  <a:ext uri="{0D108BD9-81ED-4DB2-BD59-A6C34878D82A}">
-                    <a16:rowId xmlns:a16="http://schemas.microsoft.com/office/drawing/2014/main" val="10002"/>
                   </a:ext>
                 </a:extLst>
               </a:tr>
@@ -8912,7 +7612,7 @@
         </p:nvSpPr>
         <p:spPr>
           <a:xfrm>
-            <a:off x="457200" y="3620200"/>
+            <a:off x="457200" y="2810200"/>
             <a:ext cx="11274552" cy="320040"/>
           </a:xfrm>
           <a:prstGeom prst="rect">
@@ -8962,7 +7662,7 @@
         </p:nvSpPr>
         <p:spPr>
           <a:xfrm>
-            <a:off x="457200" y="4031680"/>
+            <a:off x="457200" y="3221680"/>
             <a:ext cx="5522976" cy="960120"/>
           </a:xfrm>
           <a:prstGeom prst="rect">
@@ -8994,7 +7694,7 @@
         </p:nvSpPr>
         <p:spPr>
           <a:xfrm>
-            <a:off x="594360" y="4104832"/>
+            <a:off x="594360" y="3294832"/>
             <a:ext cx="5248656" cy="256032"/>
           </a:xfrm>
           <a:prstGeom prst="rect">
@@ -9033,7 +7733,7 @@
         </p:nvSpPr>
         <p:spPr>
           <a:xfrm>
-            <a:off x="621792" y="4415728"/>
+            <a:off x="621792" y="3605728"/>
             <a:ext cx="128016" cy="128016"/>
           </a:xfrm>
           <a:prstGeom prst="ellipse">
@@ -9060,7 +7760,7 @@
         </p:nvSpPr>
         <p:spPr>
           <a:xfrm>
-            <a:off x="841248" y="4370008"/>
+            <a:off x="841248" y="3560008"/>
             <a:ext cx="4974336" cy="201168"/>
           </a:xfrm>
           <a:prstGeom prst="rect">
@@ -9099,7 +7799,7 @@
         </p:nvSpPr>
         <p:spPr>
           <a:xfrm>
-            <a:off x="621792" y="4612324"/>
+            <a:off x="621792" y="3802324"/>
             <a:ext cx="128016" cy="128016"/>
           </a:xfrm>
           <a:prstGeom prst="ellipse">
@@ -9126,7 +7826,7 @@
         </p:nvSpPr>
         <p:spPr>
           <a:xfrm>
-            <a:off x="841248" y="4566604"/>
+            <a:off x="841248" y="3756604"/>
             <a:ext cx="4974336" cy="201168"/>
           </a:xfrm>
           <a:prstGeom prst="rect">
@@ -9165,7 +7865,7 @@
         </p:nvSpPr>
         <p:spPr>
           <a:xfrm>
-            <a:off x="621792" y="4808920"/>
+            <a:off x="621792" y="3998920"/>
             <a:ext cx="128016" cy="128016"/>
           </a:xfrm>
           <a:prstGeom prst="ellipse">
@@ -9192,7 +7892,7 @@
         </p:nvSpPr>
         <p:spPr>
           <a:xfrm>
-            <a:off x="841248" y="4763200"/>
+            <a:off x="841248" y="3953200"/>
             <a:ext cx="4974336" cy="201168"/>
           </a:xfrm>
           <a:prstGeom prst="rect">
@@ -9231,7 +7931,7 @@
         </p:nvSpPr>
         <p:spPr>
           <a:xfrm>
-            <a:off x="6208776" y="4031680"/>
+            <a:off x="6208776" y="3221680"/>
             <a:ext cx="5522976" cy="960120"/>
           </a:xfrm>
           <a:prstGeom prst="rect">
@@ -9263,7 +7963,7 @@
         </p:nvSpPr>
         <p:spPr>
           <a:xfrm>
-            <a:off x="6345936" y="4104832"/>
+            <a:off x="6345936" y="3294832"/>
             <a:ext cx="5248656" cy="256032"/>
           </a:xfrm>
           <a:prstGeom prst="rect">
@@ -9302,7 +8002,7 @@
         </p:nvSpPr>
         <p:spPr>
           <a:xfrm>
-            <a:off x="6373368" y="4415728"/>
+            <a:off x="6373368" y="3605728"/>
             <a:ext cx="128016" cy="128016"/>
           </a:xfrm>
           <a:prstGeom prst="ellipse">
@@ -9329,7 +8029,7 @@
         </p:nvSpPr>
         <p:spPr>
           <a:xfrm>
-            <a:off x="6592824" y="4370008"/>
+            <a:off x="6592824" y="3560008"/>
             <a:ext cx="4974336" cy="201168"/>
           </a:xfrm>
           <a:prstGeom prst="rect">
@@ -9365,7 +8065,7 @@
         </p:nvSpPr>
         <p:spPr>
           <a:xfrm>
-            <a:off x="6373368" y="4612324"/>
+            <a:off x="6373368" y="3802324"/>
             <a:ext cx="128016" cy="128016"/>
           </a:xfrm>
           <a:prstGeom prst="ellipse">
@@ -9392,7 +8092,7 @@
         </p:nvSpPr>
         <p:spPr>
           <a:xfrm>
-            <a:off x="6592824" y="4566604"/>
+            <a:off x="6592824" y="3756604"/>
             <a:ext cx="4974336" cy="201168"/>
           </a:xfrm>
           <a:prstGeom prst="rect">
@@ -9428,7 +8128,7 @@
         </p:nvSpPr>
         <p:spPr>
           <a:xfrm>
-            <a:off x="6373368" y="4808920"/>
+            <a:off x="6373368" y="3998920"/>
             <a:ext cx="128016" cy="128016"/>
           </a:xfrm>
           <a:prstGeom prst="ellipse">
@@ -9455,7 +8155,7 @@
         </p:nvSpPr>
         <p:spPr>
           <a:xfrm>
-            <a:off x="6592824" y="4763200"/>
+            <a:off x="6592824" y="3953200"/>
             <a:ext cx="4974336" cy="201168"/>
           </a:xfrm>
           <a:prstGeom prst="rect">
@@ -9494,14 +8194,14 @@
         </p:nvSpPr>
         <p:spPr>
           <a:xfrm>
-            <a:off x="457200" y="5174680"/>
+            <a:off x="457200" y="4364680"/>
             <a:ext cx="3605784" cy="1234440"/>
           </a:xfrm>
           <a:prstGeom prst="rect">
             <a:avLst/>
           </a:prstGeom>
           <a:solidFill>
-            <a:srgbClr val="FBF1DE"/>
+            <a:srgbClr val="FAE7E4"/>
           </a:solidFill>
           <a:ln w="9525">
             <a:solidFill>
@@ -9526,7 +8226,7 @@
         </p:nvSpPr>
         <p:spPr>
           <a:xfrm>
-            <a:off x="594360" y="5266120"/>
+            <a:off x="594360" y="4456120"/>
             <a:ext cx="3331464" cy="274320"/>
           </a:xfrm>
           <a:prstGeom prst="rect">
@@ -9565,14 +8265,14 @@
         </p:nvSpPr>
         <p:spPr>
           <a:xfrm>
-            <a:off x="3697224" y="5293552"/>
+            <a:off x="3697224" y="4483552"/>
             <a:ext cx="201168" cy="201168"/>
           </a:xfrm>
           <a:prstGeom prst="ellipse">
             <a:avLst/>
           </a:prstGeom>
           <a:solidFill>
-            <a:srgbClr val="D98E1E"/>
+            <a:srgbClr val="C0392B"/>
           </a:solidFill>
           <a:ln/>
         </p:spPr>
@@ -9592,7 +8292,7 @@
         </p:nvSpPr>
         <p:spPr>
           <a:xfrm>
-            <a:off x="594360" y="5613592"/>
+            <a:off x="594360" y="4803592"/>
             <a:ext cx="3331464" cy="320040"/>
           </a:xfrm>
           <a:prstGeom prst="rect">
@@ -9608,13 +8308,13 @@
             <a:r>
               <a:rPr lang="en-US" sz="1400" b="1" dirty="0">
                 <a:solidFill>
-                  <a:srgbClr val="D98E1E"/>
+                  <a:srgbClr val="C0392B"/>
                 </a:solidFill>
                 <a:latin typeface="Calibri" pitchFamily="34" charset="0"/>
                 <a:ea typeface="Calibri" pitchFamily="34" charset="-122"/>
                 <a:cs typeface="Calibri" pitchFamily="34" charset="-120"/>
               </a:rPr>
-              <a:t>14.8%  –  Amber</a:t>
+              <a:t>20.2%  –  Red</a:t>
             </a:r>
             <a:endParaRPr lang="en-US" sz="1400" dirty="0"/>
           </a:p>
@@ -9628,7 +8328,7 @@
         </p:nvSpPr>
         <p:spPr>
           <a:xfrm>
-            <a:off x="594360" y="5979352"/>
+            <a:off x="594360" y="5169352"/>
             <a:ext cx="3331464" cy="365760"/>
           </a:xfrm>
           <a:prstGeom prst="rect">
@@ -9653,7 +8353,7 @@
                 <a:ea typeface="Calibri" pitchFamily="34" charset="-122"/>
                 <a:cs typeface="Calibri" pitchFamily="34" charset="-120"/>
               </a:rPr>
-              <a:t>Over 60d: 0.69m  |  31–60d: 0.04m  |  &lt;31d: 3.91m  |  Total: 4.64m</a:t>
+              <a:t>Over 60d: 0.19m  |  31–60d: –  |  &lt;31d: 0.74m  |  Total: 0.93m</a:t>
             </a:r>
             <a:endParaRPr lang="en-US" sz="880" dirty="0"/>
           </a:p>
@@ -9667,14 +8367,14 @@
         </p:nvSpPr>
         <p:spPr>
           <a:xfrm>
-            <a:off x="4291584" y="5174680"/>
+            <a:off x="4291584" y="4364680"/>
             <a:ext cx="3605784" cy="1234440"/>
           </a:xfrm>
           <a:prstGeom prst="rect">
             <a:avLst/>
           </a:prstGeom>
           <a:solidFill>
-            <a:srgbClr val="FAE7E4"/>
+            <a:srgbClr val="E7F3EC"/>
           </a:solidFill>
           <a:ln w="9525">
             <a:solidFill>
@@ -9699,7 +8399,7 @@
         </p:nvSpPr>
         <p:spPr>
           <a:xfrm>
-            <a:off x="4428744" y="5266120"/>
+            <a:off x="4428744" y="4456120"/>
             <a:ext cx="3331464" cy="274320"/>
           </a:xfrm>
           <a:prstGeom prst="rect">
@@ -9738,7 +8438,7548 @@
         </p:nvSpPr>
         <p:spPr>
           <a:xfrm>
-            <a:off x="7531608" y="5293552"/>
+            <a:off x="7531608" y="4483552"/>
+            <a:ext cx="201168" cy="201168"/>
+          </a:xfrm>
+          <a:prstGeom prst="ellipse">
+            <a:avLst/>
+          </a:prstGeom>
+          <a:solidFill>
+            <a:srgbClr val="2E8B57"/>
+          </a:solidFill>
+          <a:ln/>
+        </p:spPr>
+        <p:txBody>
+          <a:bodyPr/>
+          <a:lstStyle/>
+          <a:p>
+            <a:endParaRPr lang="en-AE"/>
+          </a:p>
+        </p:txBody>
+      </p:sp>
+      <p:sp>
+        <p:nvSpPr>
+          <p:cNvPr id="32" name="Text 29"/>
+          <p:cNvSpPr/>
+          <p:nvPr/>
+        </p:nvSpPr>
+        <p:spPr>
+          <a:xfrm>
+            <a:off x="4428744" y="4803592"/>
+            <a:ext cx="3331464" cy="320040"/>
+          </a:xfrm>
+          <a:prstGeom prst="rect">
+            <a:avLst/>
+          </a:prstGeom>
+          <a:noFill/>
+          <a:ln/>
+        </p:spPr>
+        <p:txBody>
+          <a:bodyPr wrap="square" rtlCol="0" anchor="ctr"/>
+          <a:lstStyle/>
+          <a:p>
+            <a:pPr marL="0" indent="0">
+              <a:buNone/>
+            </a:pPr>
+            <a:r>
+              <a:rPr lang="en-US" sz="1400" b="1" dirty="0">
+                <a:solidFill>
+                  <a:srgbClr val="2E8B57"/>
+                </a:solidFill>
+                <a:latin typeface="Calibri" pitchFamily="34" charset="0"/>
+                <a:ea typeface="Calibri" pitchFamily="34" charset="-122"/>
+                <a:cs typeface="Calibri" pitchFamily="34" charset="-120"/>
+              </a:rPr>
+              <a:t>0.0%  –  Green</a:t>
+            </a:r>
+            <a:endParaRPr lang="en-US" sz="1400" dirty="0"/>
+          </a:p>
+        </p:txBody>
+      </p:sp>
+      <p:sp>
+        <p:nvSpPr>
+          <p:cNvPr id="33" name="Text 30"/>
+          <p:cNvSpPr/>
+          <p:nvPr/>
+        </p:nvSpPr>
+        <p:spPr>
+          <a:xfrm>
+            <a:off x="4428744" y="5169352"/>
+            <a:ext cx="3331464" cy="365760"/>
+          </a:xfrm>
+          <a:prstGeom prst="rect">
+            <a:avLst/>
+          </a:prstGeom>
+          <a:noFill/>
+          <a:ln/>
+        </p:spPr>
+        <p:txBody>
+          <a:bodyPr wrap="square" rtlCol="0" anchor="ctr"/>
+          <a:lstStyle/>
+          <a:p>
+            <a:pPr marL="0" indent="0">
+              <a:buNone/>
+            </a:pPr>
+            <a:r>
+              <a:rPr lang="en-US" sz="880" dirty="0">
+                <a:solidFill>
+                  <a:srgbClr val="5A6472"/>
+                </a:solidFill>
+                <a:latin typeface="Calibri" pitchFamily="34" charset="0"/>
+                <a:ea typeface="Calibri" pitchFamily="34" charset="-122"/>
+                <a:cs typeface="Calibri" pitchFamily="34" charset="-120"/>
+              </a:rPr>
+              <a:t>Over 60d: –  |  31–60d: –  |  &lt;31d: –  |  Total: –</a:t>
+            </a:r>
+            <a:endParaRPr lang="en-US" sz="880" dirty="0"/>
+          </a:p>
+        </p:txBody>
+      </p:sp>
+      <p:sp>
+        <p:nvSpPr>
+          <p:cNvPr id="34" name="Shape 31"/>
+          <p:cNvSpPr/>
+          <p:nvPr/>
+        </p:nvSpPr>
+        <p:spPr>
+          <a:xfrm>
+            <a:off x="8125968" y="4364680"/>
+            <a:ext cx="3605784" cy="1234440"/>
+          </a:xfrm>
+          <a:prstGeom prst="rect">
+            <a:avLst/>
+          </a:prstGeom>
+          <a:solidFill>
+            <a:srgbClr val="FAE7E4"/>
+          </a:solidFill>
+          <a:ln w="9525">
+            <a:solidFill>
+              <a:srgbClr val="D9DEE4"/>
+            </a:solidFill>
+            <a:prstDash val="solid"/>
+          </a:ln>
+        </p:spPr>
+        <p:txBody>
+          <a:bodyPr/>
+          <a:lstStyle/>
+          <a:p>
+            <a:endParaRPr lang="en-AE"/>
+          </a:p>
+        </p:txBody>
+      </p:sp>
+      <p:sp>
+        <p:nvSpPr>
+          <p:cNvPr id="35" name="Text 32"/>
+          <p:cNvSpPr/>
+          <p:nvPr/>
+        </p:nvSpPr>
+        <p:spPr>
+          <a:xfrm>
+            <a:off x="8263128" y="4456120"/>
+            <a:ext cx="3331464" cy="274320"/>
+          </a:xfrm>
+          <a:prstGeom prst="rect">
+            <a:avLst/>
+          </a:prstGeom>
+          <a:noFill/>
+          <a:ln/>
+        </p:spPr>
+        <p:txBody>
+          <a:bodyPr wrap="square" rtlCol="0" anchor="ctr"/>
+          <a:lstStyle/>
+          <a:p>
+            <a:pPr marL="0" indent="0">
+              <a:buNone/>
+            </a:pPr>
+            <a:r>
+              <a:rPr lang="en-US" sz="1250" b="1" dirty="0">
+                <a:solidFill>
+                  <a:srgbClr val="1B2A4A"/>
+                </a:solidFill>
+                <a:latin typeface="Calibri" pitchFamily="34" charset="0"/>
+                <a:ea typeface="Calibri" pitchFamily="34" charset="-122"/>
+                <a:cs typeface="Calibri" pitchFamily="34" charset="-120"/>
+              </a:rPr>
+              <a:t>Group Total</a:t>
+            </a:r>
+            <a:endParaRPr lang="en-US" sz="1250" dirty="0"/>
+          </a:p>
+        </p:txBody>
+      </p:sp>
+      <p:sp>
+        <p:nvSpPr>
+          <p:cNvPr id="36" name="Shape 33"/>
+          <p:cNvSpPr/>
+          <p:nvPr/>
+        </p:nvSpPr>
+        <p:spPr>
+          <a:xfrm>
+            <a:off x="11365992" y="4483552"/>
+            <a:ext cx="201168" cy="201168"/>
+          </a:xfrm>
+          <a:prstGeom prst="ellipse">
+            <a:avLst/>
+          </a:prstGeom>
+          <a:solidFill>
+            <a:srgbClr val="C0392B"/>
+          </a:solidFill>
+          <a:ln/>
+        </p:spPr>
+        <p:txBody>
+          <a:bodyPr/>
+          <a:lstStyle/>
+          <a:p>
+            <a:endParaRPr lang="en-AE"/>
+          </a:p>
+        </p:txBody>
+      </p:sp>
+      <p:sp>
+        <p:nvSpPr>
+          <p:cNvPr id="37" name="Text 34"/>
+          <p:cNvSpPr/>
+          <p:nvPr/>
+        </p:nvSpPr>
+        <p:spPr>
+          <a:xfrm>
+            <a:off x="8263128" y="4803592"/>
+            <a:ext cx="3331464" cy="320040"/>
+          </a:xfrm>
+          <a:prstGeom prst="rect">
+            <a:avLst/>
+          </a:prstGeom>
+          <a:noFill/>
+          <a:ln/>
+        </p:spPr>
+        <p:txBody>
+          <a:bodyPr wrap="square" rtlCol="0" anchor="ctr"/>
+          <a:lstStyle/>
+          <a:p>
+            <a:r>
+              <a:rPr lang="en-US" sz="1400" b="1" dirty="0">
+                <a:solidFill>
+                  <a:srgbClr val="C0392B"/>
+                </a:solidFill>
+                <a:latin typeface="Calibri" pitchFamily="34" charset="0"/>
+                <a:ea typeface="Calibri" pitchFamily="34" charset="-122"/>
+                <a:cs typeface="Calibri" pitchFamily="34" charset="-120"/>
+              </a:rPr>
+              <a:t>20.2%  –  Red</a:t>
+            </a:r>
+            <a:endParaRPr lang="en-US" sz="1400" dirty="0"/>
+          </a:p>
+        </p:txBody>
+      </p:sp>
+      <p:sp>
+        <p:nvSpPr>
+          <p:cNvPr id="38" name="Text 35"/>
+          <p:cNvSpPr/>
+          <p:nvPr/>
+        </p:nvSpPr>
+        <p:spPr>
+          <a:xfrm>
+            <a:off x="8263128" y="5169352"/>
+            <a:ext cx="3331464" cy="365760"/>
+          </a:xfrm>
+          <a:prstGeom prst="rect">
+            <a:avLst/>
+          </a:prstGeom>
+          <a:noFill/>
+          <a:ln/>
+        </p:spPr>
+        <p:txBody>
+          <a:bodyPr wrap="square" rtlCol="0" anchor="ctr"/>
+          <a:lstStyle/>
+          <a:p>
+            <a:pPr marL="0" indent="0">
+              <a:buNone/>
+            </a:pPr>
+            <a:r>
+              <a:rPr lang="en-US" sz="880" dirty="0">
+                <a:solidFill>
+                  <a:srgbClr val="5A6472"/>
+                </a:solidFill>
+                <a:latin typeface="Calibri" pitchFamily="34" charset="0"/>
+                <a:ea typeface="Calibri" pitchFamily="34" charset="-122"/>
+                <a:cs typeface="Calibri" pitchFamily="34" charset="-120"/>
+              </a:rPr>
+              <a:t>Over 60d: 0.19m  |  31–60d: –  |  &lt;31d: 0.74m  |  Total: 0.93m</a:t>
+            </a:r>
+            <a:endParaRPr lang="en-US" sz="880" dirty="0"/>
+          </a:p>
+        </p:txBody>
+      </p:sp>
+      <p:sp>
+        <p:nvSpPr>
+          <p:cNvPr id="39" name="Text 36"/>
+          <p:cNvSpPr/>
+          <p:nvPr/>
+        </p:nvSpPr>
+        <p:spPr>
+          <a:xfrm>
+            <a:off x="457200" y="5653984"/>
+            <a:ext cx="11274552" cy="380000"/>
+          </a:xfrm>
+          <a:prstGeom prst="rect">
+            <a:avLst/>
+          </a:prstGeom>
+          <a:noFill/>
+          <a:ln/>
+        </p:spPr>
+        <p:txBody>
+          <a:bodyPr wrap="square" rtlCol="0" anchor="ctr"/>
+          <a:lstStyle/>
+          <a:p>
+            <a:pPr marL="0" indent="0">
+              <a:buNone/>
+            </a:pPr>
+            <a:r>
+              <a:rPr lang="en-US" sz="850" i="1" dirty="0">
+                <a:solidFill>
+                  <a:srgbClr val="5A6472"/>
+                </a:solidFill>
+                <a:latin typeface="Calibri" pitchFamily="34" charset="0"/>
+                <a:ea typeface="Calibri" pitchFamily="34" charset="-122"/>
+                <a:cs typeface="Calibri" pitchFamily="34" charset="-120"/>
+              </a:rPr>
+              <a:t>Overdue ratio and aging cover external client receivables only, net of collections to 16 Oct 2026. Reason, Responsible, Action and Expected Date to be completed in the meeting.</a:t>
+            </a:r>
+            <a:endParaRPr lang="en-US" sz="850" dirty="0"/>
+          </a:p>
+        </p:txBody>
+      </p:sp>
+    </p:spTree>
+  </p:cSld>
+  <p:clrMapOvr>
+    <a:masterClrMapping/>
+  </p:clrMapOvr>
+</p:sld>
+</file>
+
+<file path=ppt/slides/slide4.xml><?xml version="1.0" encoding="utf-8"?>
+<p:sld xmlns:a="http://schemas.openxmlformats.org/drawingml/2006/main" xmlns:r="http://schemas.openxmlformats.org/officeDocument/2006/relationships" xmlns:p="http://schemas.openxmlformats.org/presentationml/2006/main">
+  <p:cSld name="Slide 2">
+    <p:bg>
+      <p:bgPr>
+        <a:solidFill>
+          <a:srgbClr val="FFFFFF"/>
+        </a:solidFill>
+        <a:effectLst/>
+      </p:bgPr>
+    </p:bg>
+    <p:spTree>
+      <p:nvGrpSpPr>
+        <p:cNvPr id="1" name=""/>
+        <p:cNvGrpSpPr/>
+        <p:nvPr/>
+      </p:nvGrpSpPr>
+      <p:grpSpPr>
+        <a:xfrm>
+          <a:off x="0" y="0"/>
+          <a:ext cx="0" cy="0"/>
+          <a:chOff x="0" y="0"/>
+          <a:chExt cx="0" cy="0"/>
+        </a:xfrm>
+      </p:grpSpPr>
+      <p:sp>
+        <p:nvSpPr>
+          <p:cNvPr id="2" name="Shape 0"/>
+          <p:cNvSpPr/>
+          <p:nvPr/>
+        </p:nvSpPr>
+        <p:spPr>
+          <a:xfrm>
+            <a:off x="0" y="0"/>
+            <a:ext cx="12191695" cy="868680"/>
+          </a:xfrm>
+          <a:prstGeom prst="rect">
+            <a:avLst/>
+          </a:prstGeom>
+          <a:solidFill>
+            <a:schemeClr val="bg1">
+              <a:lumMod val="65000"/>
+            </a:schemeClr>
+          </a:solidFill>
+          <a:ln/>
+        </p:spPr>
+        <p:txBody>
+          <a:bodyPr/>
+          <a:lstStyle/>
+          <a:p>
+            <a:endParaRPr lang="en-AE"/>
+          </a:p>
+        </p:txBody>
+      </p:sp>
+      <p:sp>
+        <p:nvSpPr>
+          <p:cNvPr id="3" name="Text 1"/>
+          <p:cNvSpPr/>
+          <p:nvPr/>
+        </p:nvSpPr>
+        <p:spPr>
+          <a:xfrm>
+            <a:off x="457200" y="0"/>
+            <a:ext cx="10058400" cy="868680"/>
+          </a:xfrm>
+          <a:prstGeom prst="rect">
+            <a:avLst/>
+          </a:prstGeom>
+          <a:noFill/>
+          <a:ln/>
+        </p:spPr>
+        <p:txBody>
+          <a:bodyPr wrap="square" rtlCol="0" anchor="ctr"/>
+          <a:lstStyle/>
+          <a:p>
+            <a:pPr marL="0" indent="0">
+              <a:buNone/>
+            </a:pPr>
+            <a:r>
+              <a:rPr lang="en-US" sz="2000" b="1" dirty="0">
+                <a:solidFill>
+                  <a:srgbClr val="FFFFFF"/>
+                </a:solidFill>
+                <a:latin typeface="Calibri" pitchFamily="34" charset="0"/>
+                <a:ea typeface="Calibri" pitchFamily="34" charset="-122"/>
+                <a:cs typeface="Calibri" pitchFamily="34" charset="-120"/>
+              </a:rPr>
+              <a:t>Monthly Dashboard &amp; Performance Measurement – Intercompany</a:t>
+            </a:r>
+            <a:endParaRPr lang="en-US" sz="2000" dirty="0"/>
+          </a:p>
+        </p:txBody>
+      </p:sp>
+      <p:sp>
+        <p:nvSpPr>
+          <p:cNvPr id="4" name="Text 2"/>
+          <p:cNvSpPr/>
+          <p:nvPr/>
+        </p:nvSpPr>
+        <p:spPr>
+          <a:xfrm>
+            <a:off x="10424160" y="0"/>
+            <a:ext cx="1325880" cy="868680"/>
+          </a:xfrm>
+          <a:prstGeom prst="rect">
+            <a:avLst/>
+          </a:prstGeom>
+          <a:noFill/>
+          <a:ln/>
+        </p:spPr>
+        <p:txBody>
+          <a:bodyPr wrap="square" rtlCol="0" anchor="ctr"/>
+          <a:lstStyle/>
+          <a:p>
+            <a:pPr marL="0" indent="0" algn="r">
+              <a:buNone/>
+            </a:pPr>
+            <a:r>
+              <a:rPr lang="en-US" sz="1050" b="1" dirty="0">
+                <a:solidFill>
+                  <a:srgbClr val="E6F1F1"/>
+                </a:solidFill>
+                <a:latin typeface="Calibri" pitchFamily="34" charset="0"/>
+                <a:ea typeface="Calibri" pitchFamily="34" charset="-122"/>
+                <a:cs typeface="Calibri" pitchFamily="34" charset="-120"/>
+              </a:rPr>
+              <a:t>SECTION 1 – 3</a:t>
+            </a:r>
+            <a:endParaRPr lang="en-US" sz="1050" dirty="0"/>
+          </a:p>
+        </p:txBody>
+      </p:sp>
+      <p:sp>
+        <p:nvSpPr>
+          <p:cNvPr id="5" name="Text 3"/>
+          <p:cNvSpPr/>
+          <p:nvPr/>
+        </p:nvSpPr>
+        <p:spPr>
+          <a:xfrm>
+            <a:off x="457200" y="1024128"/>
+            <a:ext cx="11274552" cy="347472"/>
+          </a:xfrm>
+          <a:prstGeom prst="rect">
+            <a:avLst/>
+          </a:prstGeom>
+          <a:noFill/>
+          <a:ln/>
+        </p:spPr>
+        <p:txBody>
+          <a:bodyPr wrap="square" rtlCol="0" anchor="ctr"/>
+          <a:lstStyle/>
+          <a:p>
+            <a:pPr marL="0" indent="0">
+              <a:buNone/>
+            </a:pPr>
+            <a:r>
+              <a:rPr lang="en-US" sz="1250" b="1" dirty="0">
+                <a:solidFill>
+                  <a:srgbClr val="0F6E6E"/>
+                </a:solidFill>
+                <a:latin typeface="Calibri" pitchFamily="34" charset="0"/>
+                <a:ea typeface="Calibri" pitchFamily="34" charset="-122"/>
+                <a:cs typeface="Calibri" pitchFamily="34" charset="-120"/>
+              </a:rPr>
+              <a:t>First:  </a:t>
+            </a:r>
+            <a:r>
+              <a:rPr lang="en-US" sz="1250" dirty="0">
+                <a:solidFill>
+                  <a:srgbClr val="1F2933"/>
+                </a:solidFill>
+                <a:latin typeface="Calibri" pitchFamily="34" charset="0"/>
+                <a:ea typeface="Calibri" pitchFamily="34" charset="-122"/>
+                <a:cs typeface="Calibri" pitchFamily="34" charset="-120"/>
+              </a:rPr>
+              <a:t>A unified monthly Dashboard, consolidated from each subsidiary’s brief report, presented at the holding company’s periodic meeting</a:t>
+            </a:r>
+            <a:endParaRPr lang="en-US" sz="1250" dirty="0"/>
+          </a:p>
+        </p:txBody>
+      </p:sp>
+      <p:graphicFrame>
+        <p:nvGraphicFramePr>
+          <p:cNvPr id="6" name="Table 0"/>
+          <p:cNvGraphicFramePr>
+            <a:graphicFrameLocks noGrp="1"/>
+          </p:cNvGraphicFramePr>
+          <p:nvPr>
+            <p:extLst>
+              <p:ext uri="{D42A27DB-BD31-4B8C-83A1-F6EECF244321}">
+                <p14:modId xmlns:p14="http://schemas.microsoft.com/office/powerpoint/2010/main" val="1053594512"/>
+              </p:ext>
+            </p:extLst>
+          </p:nvPr>
+        </p:nvGraphicFramePr>
+        <p:xfrm>
+          <a:off x="457199" y="1417320"/>
+          <a:ext cx="11274552" cy="1949958"/>
+        </p:xfrm>
+        <a:graphic>
+          <a:graphicData uri="http://schemas.openxmlformats.org/drawingml/2006/table">
+            <a:tbl>
+              <a:tblPr/>
+              <a:tblGrid>
+                <a:gridCol w="1147604">
+                  <a:extLst>
+                    <a:ext uri="{9D8B030D-6E8A-4147-A177-3AD203B41FA5}">
+                      <a16:colId xmlns:a16="http://schemas.microsoft.com/office/drawing/2014/main" val="20000"/>
+                    </a:ext>
+                  </a:extLst>
+                </a:gridCol>
+                <a:gridCol w="1243968">
+                  <a:extLst>
+                    <a:ext uri="{9D8B030D-6E8A-4147-A177-3AD203B41FA5}">
+                      <a16:colId xmlns:a16="http://schemas.microsoft.com/office/drawing/2014/main" val="20001"/>
+                    </a:ext>
+                  </a:extLst>
+                </a:gridCol>
+                <a:gridCol w="1106430">
+                  <a:extLst>
+                    <a:ext uri="{9D8B030D-6E8A-4147-A177-3AD203B41FA5}">
+                      <a16:colId xmlns:a16="http://schemas.microsoft.com/office/drawing/2014/main" val="20002"/>
+                    </a:ext>
+                  </a:extLst>
+                </a:gridCol>
+                <a:gridCol w="1040728">
+                  <a:extLst>
+                    <a:ext uri="{9D8B030D-6E8A-4147-A177-3AD203B41FA5}">
+                      <a16:colId xmlns:a16="http://schemas.microsoft.com/office/drawing/2014/main" val="20003"/>
+                    </a:ext>
+                  </a:extLst>
+                </a:gridCol>
+                <a:gridCol w="963637">
+                  <a:extLst>
+                    <a:ext uri="{9D8B030D-6E8A-4147-A177-3AD203B41FA5}">
+                      <a16:colId xmlns:a16="http://schemas.microsoft.com/office/drawing/2014/main" val="20004"/>
+                    </a:ext>
+                  </a:extLst>
+                </a:gridCol>
+                <a:gridCol w="1011819">
+                  <a:extLst>
+                    <a:ext uri="{9D8B030D-6E8A-4147-A177-3AD203B41FA5}">
+                      <a16:colId xmlns:a16="http://schemas.microsoft.com/office/drawing/2014/main" val="20005"/>
+                    </a:ext>
+                  </a:extLst>
+                </a:gridCol>
+                <a:gridCol w="963637">
+                  <a:extLst>
+                    <a:ext uri="{9D8B030D-6E8A-4147-A177-3AD203B41FA5}">
+                      <a16:colId xmlns:a16="http://schemas.microsoft.com/office/drawing/2014/main" val="20006"/>
+                    </a:ext>
+                  </a:extLst>
+                </a:gridCol>
+                <a:gridCol w="963637">
+                  <a:extLst>
+                    <a:ext uri="{9D8B030D-6E8A-4147-A177-3AD203B41FA5}">
+                      <a16:colId xmlns:a16="http://schemas.microsoft.com/office/drawing/2014/main" val="20007"/>
+                    </a:ext>
+                  </a:extLst>
+                </a:gridCol>
+                <a:gridCol w="1040728">
+                  <a:extLst>
+                    <a:ext uri="{9D8B030D-6E8A-4147-A177-3AD203B41FA5}">
+                      <a16:colId xmlns:a16="http://schemas.microsoft.com/office/drawing/2014/main" val="20008"/>
+                    </a:ext>
+                  </a:extLst>
+                </a:gridCol>
+                <a:gridCol w="896182">
+                  <a:extLst>
+                    <a:ext uri="{9D8B030D-6E8A-4147-A177-3AD203B41FA5}">
+                      <a16:colId xmlns:a16="http://schemas.microsoft.com/office/drawing/2014/main" val="20009"/>
+                    </a:ext>
+                  </a:extLst>
+                </a:gridCol>
+                <a:gridCol w="896182">
+                  <a:extLst>
+                    <a:ext uri="{9D8B030D-6E8A-4147-A177-3AD203B41FA5}">
+                      <a16:colId xmlns:a16="http://schemas.microsoft.com/office/drawing/2014/main" val="20010"/>
+                    </a:ext>
+                  </a:extLst>
+                </a:gridCol>
+              </a:tblGrid>
+              <a:tr h="354330">
+                <a:tc>
+                  <a:txBody>
+                    <a:bodyPr/>
+                    <a:lstStyle/>
+                    <a:p>
+                      <a:pPr marL="0" indent="0" algn="ctr">
+                        <a:buNone/>
+                      </a:pPr>
+                      <a:r>
+                        <a:rPr lang="en-US" sz="860" b="1" dirty="0">
+                          <a:solidFill>
+                            <a:srgbClr val="FFFFFF"/>
+                          </a:solidFill>
+                        </a:rPr>
+                        <a:t>Subsidiary (Intercompany)</a:t>
+                      </a:r>
+                      <a:endParaRPr lang="en-US" sz="860" dirty="0"/>
+                    </a:p>
+                  </a:txBody>
+                  <a:tcPr anchor="ctr">
+                    <a:lnL w="9525" cap="flat" cmpd="sng" algn="ctr">
+                      <a:solidFill>
+                        <a:srgbClr val="D9DEE4"/>
+                      </a:solidFill>
+                      <a:prstDash val="solid"/>
+                      <a:round/>
+                      <a:headEnd type="none" w="med" len="med"/>
+                      <a:tailEnd type="none" w="med" len="med"/>
+                    </a:lnL>
+                    <a:lnR w="9525" cap="flat" cmpd="sng" algn="ctr">
+                      <a:solidFill>
+                        <a:srgbClr val="D9DEE4"/>
+                      </a:solidFill>
+                      <a:prstDash val="solid"/>
+                      <a:round/>
+                      <a:headEnd type="none" w="med" len="med"/>
+                      <a:tailEnd type="none" w="med" len="med"/>
+                    </a:lnR>
+                    <a:lnT w="9525" cap="flat" cmpd="sng" algn="ctr">
+                      <a:solidFill>
+                        <a:srgbClr val="D9DEE4"/>
+                      </a:solidFill>
+                      <a:prstDash val="solid"/>
+                      <a:round/>
+                      <a:headEnd type="none" w="med" len="med"/>
+                      <a:tailEnd type="none" w="med" len="med"/>
+                    </a:lnT>
+                    <a:lnB w="9525" cap="flat" cmpd="sng" algn="ctr">
+                      <a:solidFill>
+                        <a:srgbClr val="D9DEE4"/>
+                      </a:solidFill>
+                      <a:prstDash val="solid"/>
+                      <a:round/>
+                      <a:headEnd type="none" w="med" len="med"/>
+                      <a:tailEnd type="none" w="med" len="med"/>
+                    </a:lnB>
+                    <a:solidFill>
+                      <a:schemeClr val="bg1">
+                        <a:lumMod val="50000"/>
+                      </a:schemeClr>
+                    </a:solidFill>
+                  </a:tcPr>
+                </a:tc>
+                <a:tc>
+                  <a:txBody>
+                    <a:bodyPr/>
+                    <a:lstStyle/>
+                    <a:p>
+                      <a:pPr marL="0" indent="0" algn="ctr">
+                        <a:buNone/>
+                      </a:pPr>
+                      <a:r>
+                        <a:rPr lang="en-US" sz="860" b="1" dirty="0">
+                          <a:solidFill>
+                            <a:srgbClr val="FFFFFF"/>
+                          </a:solidFill>
+                        </a:rPr>
+                        <a:t>Due for</a:t>
+                      </a:r>
+                      <a:endParaRPr lang="en-US" sz="860" dirty="0"/>
+                    </a:p>
+                    <a:p>
+                      <a:pPr marL="0" marR="0" indent="0" algn="ctr" defTabSz="914400" rtl="0" eaLnBrk="1" latinLnBrk="0" hangingPunct="1">
+                        <a:lnSpc>
+                          <a:spcPct val="100000"/>
+                        </a:lnSpc>
+                        <a:spcBef>
+                          <a:spcPts val="0"/>
+                        </a:spcBef>
+                        <a:spcAft>
+                          <a:spcPts val="0"/>
+                        </a:spcAft>
+                        <a:buNone/>
+                      </a:pPr>
+                      <a:r>
+                        <a:rPr lang="en-US" sz="860" b="1" dirty="0">
+                          <a:solidFill>
+                            <a:srgbClr val="FFFFFF"/>
+                          </a:solidFill>
+                        </a:rPr>
+                        <a:t>Collection during Sep (A</a:t>
+                      </a:r>
+                      <a:r>
+                        <a:rPr lang="en-AE" sz="860" b="1" kern="1200" dirty="0">
+                          <a:solidFill>
+                            <a:srgbClr val="FFFFFF"/>
+                          </a:solidFill>
+                          <a:latin typeface="+mn-lt"/>
+                          <a:ea typeface="+mn-ea"/>
+                          <a:cs typeface="+mn-cs"/>
+                        </a:rPr>
+                        <a:t>mounts outstanding up to Aug 2026)</a:t>
+                      </a:r>
+                      <a:endParaRPr lang="en-US" sz="860" b="1" kern="1200" dirty="0">
+                        <a:solidFill>
+                          <a:srgbClr val="FFFFFF"/>
+                        </a:solidFill>
+                        <a:latin typeface="+mn-lt"/>
+                        <a:ea typeface="+mn-ea"/>
+                        <a:cs typeface="+mn-cs"/>
+                      </a:endParaRPr>
+                    </a:p>
+                    <a:p>
+                      <a:pPr marL="0" marR="0" indent="0" algn="ctr" defTabSz="914400" rtl="0" eaLnBrk="1" latinLnBrk="0" hangingPunct="1">
+                        <a:lnSpc>
+                          <a:spcPct val="107000"/>
+                        </a:lnSpc>
+                        <a:spcBef>
+                          <a:spcPts val="0"/>
+                        </a:spcBef>
+                        <a:spcAft>
+                          <a:spcPts val="0"/>
+                        </a:spcAft>
+                        <a:buNone/>
+                      </a:pPr>
+                      <a:r>
+                        <a:rPr lang="en-US" sz="860" b="1" kern="1200" dirty="0">
+                          <a:solidFill>
+                            <a:srgbClr val="FFFFFF"/>
+                          </a:solidFill>
+                          <a:latin typeface="+mn-lt"/>
+                          <a:ea typeface="+mn-ea"/>
+                          <a:cs typeface="+mn-cs"/>
+                        </a:rPr>
+                        <a:t>AED</a:t>
+                      </a:r>
+                    </a:p>
+                    <a:p>
+                      <a:pPr marL="0" indent="0" algn="ctr">
+                        <a:buNone/>
+                      </a:pPr>
+                      <a:endParaRPr lang="en-US" sz="860" dirty="0"/>
+                    </a:p>
+                  </a:txBody>
+                  <a:tcPr anchor="ctr">
+                    <a:lnL w="9525" cap="flat" cmpd="sng" algn="ctr">
+                      <a:solidFill>
+                        <a:srgbClr val="D9DEE4"/>
+                      </a:solidFill>
+                      <a:prstDash val="solid"/>
+                      <a:round/>
+                      <a:headEnd type="none" w="med" len="med"/>
+                      <a:tailEnd type="none" w="med" len="med"/>
+                    </a:lnL>
+                    <a:lnR w="9525" cap="flat" cmpd="sng" algn="ctr">
+                      <a:solidFill>
+                        <a:srgbClr val="D9DEE4"/>
+                      </a:solidFill>
+                      <a:prstDash val="solid"/>
+                      <a:round/>
+                      <a:headEnd type="none" w="med" len="med"/>
+                      <a:tailEnd type="none" w="med" len="med"/>
+                    </a:lnR>
+                    <a:lnT w="9525" cap="flat" cmpd="sng" algn="ctr">
+                      <a:solidFill>
+                        <a:srgbClr val="D9DEE4"/>
+                      </a:solidFill>
+                      <a:prstDash val="solid"/>
+                      <a:round/>
+                      <a:headEnd type="none" w="med" len="med"/>
+                      <a:tailEnd type="none" w="med" len="med"/>
+                    </a:lnT>
+                    <a:lnB w="9525" cap="flat" cmpd="sng" algn="ctr">
+                      <a:solidFill>
+                        <a:srgbClr val="D9DEE4"/>
+                      </a:solidFill>
+                      <a:prstDash val="solid"/>
+                      <a:round/>
+                      <a:headEnd type="none" w="med" len="med"/>
+                      <a:tailEnd type="none" w="med" len="med"/>
+                    </a:lnB>
+                    <a:solidFill>
+                      <a:schemeClr val="bg1">
+                        <a:lumMod val="50000"/>
+                      </a:schemeClr>
+                    </a:solidFill>
+                  </a:tcPr>
+                </a:tc>
+                <a:tc>
+                  <a:txBody>
+                    <a:bodyPr/>
+                    <a:lstStyle/>
+                    <a:p>
+                      <a:pPr marL="0" indent="0" algn="ctr">
+                        <a:buNone/>
+                      </a:pPr>
+                      <a:r>
+                        <a:rPr lang="en-US" sz="860" b="1" dirty="0">
+                          <a:solidFill>
+                            <a:srgbClr val="FFFFFF"/>
+                          </a:solidFill>
+                        </a:rPr>
+                        <a:t>Amount Collected</a:t>
+                      </a:r>
+                      <a:endParaRPr lang="en-US" sz="860" dirty="0"/>
+                    </a:p>
+                    <a:p>
+                      <a:pPr marL="0" indent="0" algn="ctr">
+                        <a:buNone/>
+                      </a:pPr>
+                      <a:r>
+                        <a:rPr lang="en-US" sz="860" b="1" dirty="0">
+                          <a:solidFill>
+                            <a:srgbClr val="FFFFFF"/>
+                          </a:solidFill>
+                        </a:rPr>
+                        <a:t>in Sep</a:t>
+                      </a:r>
+                    </a:p>
+                    <a:p>
+                      <a:pPr marL="0" indent="0" algn="ctr">
+                        <a:buNone/>
+                      </a:pPr>
+                      <a:r>
+                        <a:rPr lang="en-US" sz="860" b="1" dirty="0">
+                          <a:solidFill>
+                            <a:srgbClr val="FFFFFF"/>
+                          </a:solidFill>
+                        </a:rPr>
+                        <a:t>AED</a:t>
+                      </a:r>
+                      <a:endParaRPr lang="en-US" sz="860" dirty="0"/>
+                    </a:p>
+                  </a:txBody>
+                  <a:tcPr anchor="ctr">
+                    <a:lnL w="9525" cap="flat" cmpd="sng" algn="ctr">
+                      <a:solidFill>
+                        <a:srgbClr val="D9DEE4"/>
+                      </a:solidFill>
+                      <a:prstDash val="solid"/>
+                      <a:round/>
+                      <a:headEnd type="none" w="med" len="med"/>
+                      <a:tailEnd type="none" w="med" len="med"/>
+                    </a:lnL>
+                    <a:lnR w="9525" cap="flat" cmpd="sng" algn="ctr">
+                      <a:solidFill>
+                        <a:srgbClr val="D9DEE4"/>
+                      </a:solidFill>
+                      <a:prstDash val="solid"/>
+                      <a:round/>
+                      <a:headEnd type="none" w="med" len="med"/>
+                      <a:tailEnd type="none" w="med" len="med"/>
+                    </a:lnR>
+                    <a:lnT w="9525" cap="flat" cmpd="sng" algn="ctr">
+                      <a:solidFill>
+                        <a:srgbClr val="D9DEE4"/>
+                      </a:solidFill>
+                      <a:prstDash val="solid"/>
+                      <a:round/>
+                      <a:headEnd type="none" w="med" len="med"/>
+                      <a:tailEnd type="none" w="med" len="med"/>
+                    </a:lnT>
+                    <a:lnB w="9525" cap="flat" cmpd="sng" algn="ctr">
+                      <a:solidFill>
+                        <a:srgbClr val="D9DEE4"/>
+                      </a:solidFill>
+                      <a:prstDash val="solid"/>
+                      <a:round/>
+                      <a:headEnd type="none" w="med" len="med"/>
+                      <a:tailEnd type="none" w="med" len="med"/>
+                    </a:lnB>
+                    <a:solidFill>
+                      <a:schemeClr val="bg1">
+                        <a:lumMod val="50000"/>
+                      </a:schemeClr>
+                    </a:solidFill>
+                  </a:tcPr>
+                </a:tc>
+                <a:tc>
+                  <a:txBody>
+                    <a:bodyPr/>
+                    <a:lstStyle/>
+                    <a:p>
+                      <a:pPr marL="0" indent="0" algn="ctr">
+                        <a:buNone/>
+                      </a:pPr>
+                      <a:r>
+                        <a:rPr lang="en-US" sz="860" b="1" dirty="0">
+                          <a:solidFill>
+                            <a:srgbClr val="FFFFFF"/>
+                          </a:solidFill>
+                        </a:rPr>
+                        <a:t>Total</a:t>
+                      </a:r>
+                      <a:endParaRPr lang="en-US" sz="860" dirty="0"/>
+                    </a:p>
+                    <a:p>
+                      <a:pPr marL="0" indent="0" algn="ctr">
+                        <a:buNone/>
+                      </a:pPr>
+                      <a:r>
+                        <a:rPr lang="en-US" sz="860" b="1" dirty="0">
+                          <a:solidFill>
+                            <a:srgbClr val="FFFFFF"/>
+                          </a:solidFill>
+                        </a:rPr>
+                        <a:t>Outstanding as of 30 Sep 2026</a:t>
+                      </a:r>
+                      <a:endParaRPr lang="en-US" sz="860" dirty="0"/>
+                    </a:p>
+                  </a:txBody>
+                  <a:tcPr anchor="ctr">
+                    <a:lnL w="9525" cap="flat" cmpd="sng" algn="ctr">
+                      <a:solidFill>
+                        <a:srgbClr val="D9DEE4"/>
+                      </a:solidFill>
+                      <a:prstDash val="solid"/>
+                      <a:round/>
+                      <a:headEnd type="none" w="med" len="med"/>
+                      <a:tailEnd type="none" w="med" len="med"/>
+                    </a:lnL>
+                    <a:lnR w="9525" cap="flat" cmpd="sng" algn="ctr">
+                      <a:solidFill>
+                        <a:srgbClr val="D9DEE4"/>
+                      </a:solidFill>
+                      <a:prstDash val="solid"/>
+                      <a:round/>
+                      <a:headEnd type="none" w="med" len="med"/>
+                      <a:tailEnd type="none" w="med" len="med"/>
+                    </a:lnR>
+                    <a:lnT w="9525" cap="flat" cmpd="sng" algn="ctr">
+                      <a:solidFill>
+                        <a:srgbClr val="D9DEE4"/>
+                      </a:solidFill>
+                      <a:prstDash val="solid"/>
+                      <a:round/>
+                      <a:headEnd type="none" w="med" len="med"/>
+                      <a:tailEnd type="none" w="med" len="med"/>
+                    </a:lnT>
+                    <a:lnB w="9525" cap="flat" cmpd="sng" algn="ctr">
+                      <a:solidFill>
+                        <a:srgbClr val="D9DEE4"/>
+                      </a:solidFill>
+                      <a:prstDash val="solid"/>
+                      <a:round/>
+                      <a:headEnd type="none" w="med" len="med"/>
+                      <a:tailEnd type="none" w="med" len="med"/>
+                    </a:lnB>
+                    <a:solidFill>
+                      <a:schemeClr val="bg1">
+                        <a:lumMod val="50000"/>
+                      </a:schemeClr>
+                    </a:solidFill>
+                  </a:tcPr>
+                </a:tc>
+                <a:tc>
+                  <a:txBody>
+                    <a:bodyPr/>
+                    <a:lstStyle/>
+                    <a:p>
+                      <a:pPr marL="0" indent="0" algn="ctr">
+                        <a:buNone/>
+                      </a:pPr>
+                      <a:r>
+                        <a:rPr lang="en-US" sz="860" b="1" dirty="0">
+                          <a:solidFill>
+                            <a:srgbClr val="FFFFFF"/>
+                          </a:solidFill>
+                        </a:rPr>
+                        <a:t>0–30 days</a:t>
+                      </a:r>
+                      <a:endParaRPr lang="en-US" sz="860" dirty="0"/>
+                    </a:p>
+                    <a:p>
+                      <a:pPr marL="0" indent="0" algn="ctr">
+                        <a:buNone/>
+                      </a:pPr>
+                      <a:r>
+                        <a:rPr lang="en-US" sz="860" b="1" dirty="0">
+                          <a:solidFill>
+                            <a:srgbClr val="FFFFFF"/>
+                          </a:solidFill>
+                        </a:rPr>
+                        <a:t>No risk</a:t>
+                      </a:r>
+                    </a:p>
+                    <a:p>
+                      <a:pPr marL="0" indent="0" algn="ctr">
+                        <a:buNone/>
+                      </a:pPr>
+                      <a:r>
+                        <a:rPr lang="en-US" sz="860" b="1" dirty="0">
+                          <a:solidFill>
+                            <a:srgbClr val="FFFFFF"/>
+                          </a:solidFill>
+                        </a:rPr>
+                        <a:t>AED</a:t>
+                      </a:r>
+                      <a:endParaRPr lang="en-US" sz="860" dirty="0"/>
+                    </a:p>
+                  </a:txBody>
+                  <a:tcPr anchor="ctr">
+                    <a:lnL w="9525" cap="flat" cmpd="sng" algn="ctr">
+                      <a:solidFill>
+                        <a:srgbClr val="D9DEE4"/>
+                      </a:solidFill>
+                      <a:prstDash val="solid"/>
+                      <a:round/>
+                      <a:headEnd type="none" w="med" len="med"/>
+                      <a:tailEnd type="none" w="med" len="med"/>
+                    </a:lnL>
+                    <a:lnR w="9525" cap="flat" cmpd="sng" algn="ctr">
+                      <a:solidFill>
+                        <a:srgbClr val="D9DEE4"/>
+                      </a:solidFill>
+                      <a:prstDash val="solid"/>
+                      <a:round/>
+                      <a:headEnd type="none" w="med" len="med"/>
+                      <a:tailEnd type="none" w="med" len="med"/>
+                    </a:lnR>
+                    <a:lnT w="9525" cap="flat" cmpd="sng" algn="ctr">
+                      <a:solidFill>
+                        <a:srgbClr val="D9DEE4"/>
+                      </a:solidFill>
+                      <a:prstDash val="solid"/>
+                      <a:round/>
+                      <a:headEnd type="none" w="med" len="med"/>
+                      <a:tailEnd type="none" w="med" len="med"/>
+                    </a:lnT>
+                    <a:lnB w="9525" cap="flat" cmpd="sng" algn="ctr">
+                      <a:solidFill>
+                        <a:srgbClr val="D9DEE4"/>
+                      </a:solidFill>
+                      <a:prstDash val="solid"/>
+                      <a:round/>
+                      <a:headEnd type="none" w="med" len="med"/>
+                      <a:tailEnd type="none" w="med" len="med"/>
+                    </a:lnB>
+                    <a:solidFill>
+                      <a:schemeClr val="bg1">
+                        <a:lumMod val="50000"/>
+                      </a:schemeClr>
+                    </a:solidFill>
+                  </a:tcPr>
+                </a:tc>
+                <a:tc>
+                  <a:txBody>
+                    <a:bodyPr/>
+                    <a:lstStyle/>
+                    <a:p>
+                      <a:pPr marL="0" indent="0" algn="ctr">
+                        <a:buNone/>
+                      </a:pPr>
+                      <a:r>
+                        <a:rPr lang="en-US" sz="860" b="1" dirty="0">
+                          <a:solidFill>
+                            <a:srgbClr val="FFFFFF"/>
+                          </a:solidFill>
+                        </a:rPr>
+                        <a:t>31–60 days</a:t>
+                      </a:r>
+                      <a:endParaRPr lang="en-US" sz="860" dirty="0"/>
+                    </a:p>
+                    <a:p>
+                      <a:pPr marL="0" indent="0" algn="ctr">
+                        <a:buNone/>
+                      </a:pPr>
+                      <a:r>
+                        <a:rPr lang="en-US" sz="860" b="1" dirty="0">
+                          <a:solidFill>
+                            <a:srgbClr val="FFFFFF"/>
+                          </a:solidFill>
+                        </a:rPr>
+                        <a:t>Moderate</a:t>
+                      </a:r>
+                    </a:p>
+                    <a:p>
+                      <a:pPr marL="0" indent="0" algn="ctr">
+                        <a:buNone/>
+                      </a:pPr>
+                      <a:r>
+                        <a:rPr lang="en-US" sz="860" b="1" dirty="0">
+                          <a:solidFill>
+                            <a:srgbClr val="FFFFFF"/>
+                          </a:solidFill>
+                        </a:rPr>
+                        <a:t>AED</a:t>
+                      </a:r>
+                      <a:endParaRPr lang="en-US" sz="860" dirty="0"/>
+                    </a:p>
+                  </a:txBody>
+                  <a:tcPr anchor="ctr">
+                    <a:lnL w="9525" cap="flat" cmpd="sng" algn="ctr">
+                      <a:solidFill>
+                        <a:srgbClr val="D9DEE4"/>
+                      </a:solidFill>
+                      <a:prstDash val="solid"/>
+                      <a:round/>
+                      <a:headEnd type="none" w="med" len="med"/>
+                      <a:tailEnd type="none" w="med" len="med"/>
+                    </a:lnL>
+                    <a:lnR w="9525" cap="flat" cmpd="sng" algn="ctr">
+                      <a:solidFill>
+                        <a:srgbClr val="D9DEE4"/>
+                      </a:solidFill>
+                      <a:prstDash val="solid"/>
+                      <a:round/>
+                      <a:headEnd type="none" w="med" len="med"/>
+                      <a:tailEnd type="none" w="med" len="med"/>
+                    </a:lnR>
+                    <a:lnT w="9525" cap="flat" cmpd="sng" algn="ctr">
+                      <a:solidFill>
+                        <a:srgbClr val="D9DEE4"/>
+                      </a:solidFill>
+                      <a:prstDash val="solid"/>
+                      <a:round/>
+                      <a:headEnd type="none" w="med" len="med"/>
+                      <a:tailEnd type="none" w="med" len="med"/>
+                    </a:lnT>
+                    <a:lnB w="9525" cap="flat" cmpd="sng" algn="ctr">
+                      <a:solidFill>
+                        <a:srgbClr val="D9DEE4"/>
+                      </a:solidFill>
+                      <a:prstDash val="solid"/>
+                      <a:round/>
+                      <a:headEnd type="none" w="med" len="med"/>
+                      <a:tailEnd type="none" w="med" len="med"/>
+                    </a:lnB>
+                    <a:solidFill>
+                      <a:schemeClr val="bg1">
+                        <a:lumMod val="50000"/>
+                      </a:schemeClr>
+                    </a:solidFill>
+                  </a:tcPr>
+                </a:tc>
+                <a:tc>
+                  <a:txBody>
+                    <a:bodyPr/>
+                    <a:lstStyle/>
+                    <a:p>
+                      <a:pPr marL="0" indent="0" algn="ctr">
+                        <a:buNone/>
+                      </a:pPr>
+                      <a:r>
+                        <a:rPr lang="en-US" sz="860" b="1" dirty="0">
+                          <a:solidFill>
+                            <a:srgbClr val="FFFFFF"/>
+                          </a:solidFill>
+                        </a:rPr>
+                        <a:t>61–90 days</a:t>
+                      </a:r>
+                      <a:endParaRPr lang="en-US" sz="860" dirty="0"/>
+                    </a:p>
+                    <a:p>
+                      <a:pPr marL="0" indent="0" algn="ctr">
+                        <a:buNone/>
+                      </a:pPr>
+                      <a:r>
+                        <a:rPr lang="en-US" sz="860" b="1" dirty="0">
+                          <a:solidFill>
+                            <a:srgbClr val="FFFFFF"/>
+                          </a:solidFill>
+                        </a:rPr>
+                        <a:t>High risk</a:t>
+                      </a:r>
+                    </a:p>
+                    <a:p>
+                      <a:pPr marL="0" indent="0" algn="ctr">
+                        <a:buNone/>
+                      </a:pPr>
+                      <a:r>
+                        <a:rPr lang="en-US" sz="860" b="1" dirty="0">
+                          <a:solidFill>
+                            <a:srgbClr val="FFFFFF"/>
+                          </a:solidFill>
+                        </a:rPr>
+                        <a:t>AED</a:t>
+                      </a:r>
+                      <a:endParaRPr lang="en-US" sz="860" dirty="0"/>
+                    </a:p>
+                  </a:txBody>
+                  <a:tcPr anchor="ctr">
+                    <a:lnL w="9525" cap="flat" cmpd="sng" algn="ctr">
+                      <a:solidFill>
+                        <a:srgbClr val="D9DEE4"/>
+                      </a:solidFill>
+                      <a:prstDash val="solid"/>
+                      <a:round/>
+                      <a:headEnd type="none" w="med" len="med"/>
+                      <a:tailEnd type="none" w="med" len="med"/>
+                    </a:lnL>
+                    <a:lnR w="9525" cap="flat" cmpd="sng" algn="ctr">
+                      <a:solidFill>
+                        <a:srgbClr val="D9DEE4"/>
+                      </a:solidFill>
+                      <a:prstDash val="solid"/>
+                      <a:round/>
+                      <a:headEnd type="none" w="med" len="med"/>
+                      <a:tailEnd type="none" w="med" len="med"/>
+                    </a:lnR>
+                    <a:lnT w="9525" cap="flat" cmpd="sng" algn="ctr">
+                      <a:solidFill>
+                        <a:srgbClr val="D9DEE4"/>
+                      </a:solidFill>
+                      <a:prstDash val="solid"/>
+                      <a:round/>
+                      <a:headEnd type="none" w="med" len="med"/>
+                      <a:tailEnd type="none" w="med" len="med"/>
+                    </a:lnT>
+                    <a:lnB w="9525" cap="flat" cmpd="sng" algn="ctr">
+                      <a:solidFill>
+                        <a:srgbClr val="D9DEE4"/>
+                      </a:solidFill>
+                      <a:prstDash val="solid"/>
+                      <a:round/>
+                      <a:headEnd type="none" w="med" len="med"/>
+                      <a:tailEnd type="none" w="med" len="med"/>
+                    </a:lnB>
+                    <a:solidFill>
+                      <a:schemeClr val="bg1">
+                        <a:lumMod val="50000"/>
+                      </a:schemeClr>
+                    </a:solidFill>
+                  </a:tcPr>
+                </a:tc>
+                <a:tc>
+                  <a:txBody>
+                    <a:bodyPr/>
+                    <a:lstStyle/>
+                    <a:p>
+                      <a:pPr marL="0" indent="0" algn="ctr">
+                        <a:buNone/>
+                      </a:pPr>
+                      <a:r>
+                        <a:rPr lang="en-US" sz="860" b="1" dirty="0">
+                          <a:solidFill>
+                            <a:srgbClr val="FFFFFF"/>
+                          </a:solidFill>
+                        </a:rPr>
+                        <a:t>+91 days</a:t>
+                      </a:r>
+                      <a:endParaRPr lang="en-US" sz="860" dirty="0"/>
+                    </a:p>
+                    <a:p>
+                      <a:pPr marL="0" indent="0" algn="ctr">
+                        <a:buNone/>
+                      </a:pPr>
+                      <a:r>
+                        <a:rPr lang="en-US" sz="860" b="1" dirty="0">
+                          <a:solidFill>
+                            <a:srgbClr val="FFFFFF"/>
+                          </a:solidFill>
+                        </a:rPr>
+                        <a:t>Very high</a:t>
+                      </a:r>
+                    </a:p>
+                    <a:p>
+                      <a:pPr marL="0" indent="0" algn="ctr">
+                        <a:buNone/>
+                      </a:pPr>
+                      <a:r>
+                        <a:rPr lang="en-US" sz="860" b="1" dirty="0">
+                          <a:solidFill>
+                            <a:srgbClr val="FFFFFF"/>
+                          </a:solidFill>
+                        </a:rPr>
+                        <a:t>AED</a:t>
+                      </a:r>
+                      <a:endParaRPr lang="en-US" sz="860" dirty="0"/>
+                    </a:p>
+                  </a:txBody>
+                  <a:tcPr anchor="ctr">
+                    <a:lnL w="9525" cap="flat" cmpd="sng" algn="ctr">
+                      <a:solidFill>
+                        <a:srgbClr val="D9DEE4"/>
+                      </a:solidFill>
+                      <a:prstDash val="solid"/>
+                      <a:round/>
+                      <a:headEnd type="none" w="med" len="med"/>
+                      <a:tailEnd type="none" w="med" len="med"/>
+                    </a:lnL>
+                    <a:lnR w="9525" cap="flat" cmpd="sng" algn="ctr">
+                      <a:solidFill>
+                        <a:srgbClr val="D9DEE4"/>
+                      </a:solidFill>
+                      <a:prstDash val="solid"/>
+                      <a:round/>
+                      <a:headEnd type="none" w="med" len="med"/>
+                      <a:tailEnd type="none" w="med" len="med"/>
+                    </a:lnR>
+                    <a:lnT w="9525" cap="flat" cmpd="sng" algn="ctr">
+                      <a:solidFill>
+                        <a:srgbClr val="D9DEE4"/>
+                      </a:solidFill>
+                      <a:prstDash val="solid"/>
+                      <a:round/>
+                      <a:headEnd type="none" w="med" len="med"/>
+                      <a:tailEnd type="none" w="med" len="med"/>
+                    </a:lnT>
+                    <a:lnB w="9525" cap="flat" cmpd="sng" algn="ctr">
+                      <a:solidFill>
+                        <a:srgbClr val="D9DEE4"/>
+                      </a:solidFill>
+                      <a:prstDash val="solid"/>
+                      <a:round/>
+                      <a:headEnd type="none" w="med" len="med"/>
+                      <a:tailEnd type="none" w="med" len="med"/>
+                    </a:lnB>
+                    <a:solidFill>
+                      <a:schemeClr val="bg1">
+                        <a:lumMod val="50000"/>
+                      </a:schemeClr>
+                    </a:solidFill>
+                  </a:tcPr>
+                </a:tc>
+                <a:tc>
+                  <a:txBody>
+                    <a:bodyPr/>
+                    <a:lstStyle/>
+                    <a:p>
+                      <a:pPr marL="0" indent="0" algn="ctr">
+                        <a:buNone/>
+                      </a:pPr>
+                      <a:r>
+                        <a:rPr lang="en-US" sz="860" b="1" dirty="0">
+                          <a:solidFill>
+                            <a:srgbClr val="FFFFFF"/>
+                          </a:solidFill>
+                        </a:rPr>
+                        <a:t>Overdue amounts as of 30 Sep 2026</a:t>
+                      </a:r>
+                      <a:endParaRPr lang="en-US" sz="860" dirty="0"/>
+                    </a:p>
+                    <a:p>
+                      <a:pPr marL="0" indent="0" algn="ctr">
+                        <a:buNone/>
+                      </a:pPr>
+                      <a:r>
+                        <a:rPr lang="en-US" sz="860" b="1" dirty="0">
+                          <a:solidFill>
+                            <a:srgbClr val="FFFFFF"/>
+                          </a:solidFill>
+                        </a:rPr>
+                        <a:t>(61+ days) </a:t>
+                      </a:r>
+                    </a:p>
+                    <a:p>
+                      <a:pPr marL="0" indent="0" algn="ctr">
+                        <a:buNone/>
+                      </a:pPr>
+                      <a:r>
+                        <a:rPr lang="en-US" sz="860" b="1" dirty="0">
+                          <a:solidFill>
+                            <a:srgbClr val="FFFFFF"/>
+                          </a:solidFill>
+                        </a:rPr>
+                        <a:t>AED</a:t>
+                      </a:r>
+                      <a:endParaRPr lang="en-US" sz="860" dirty="0"/>
+                    </a:p>
+                  </a:txBody>
+                  <a:tcPr anchor="ctr">
+                    <a:lnL w="9525" cap="flat" cmpd="sng" algn="ctr">
+                      <a:solidFill>
+                        <a:srgbClr val="D9DEE4"/>
+                      </a:solidFill>
+                      <a:prstDash val="solid"/>
+                      <a:round/>
+                      <a:headEnd type="none" w="med" len="med"/>
+                      <a:tailEnd type="none" w="med" len="med"/>
+                    </a:lnL>
+                    <a:lnR w="9525" cap="flat" cmpd="sng" algn="ctr">
+                      <a:solidFill>
+                        <a:srgbClr val="D9DEE4"/>
+                      </a:solidFill>
+                      <a:prstDash val="solid"/>
+                      <a:round/>
+                      <a:headEnd type="none" w="med" len="med"/>
+                      <a:tailEnd type="none" w="med" len="med"/>
+                    </a:lnR>
+                    <a:lnT w="9525" cap="flat" cmpd="sng" algn="ctr">
+                      <a:solidFill>
+                        <a:srgbClr val="D9DEE4"/>
+                      </a:solidFill>
+                      <a:prstDash val="solid"/>
+                      <a:round/>
+                      <a:headEnd type="none" w="med" len="med"/>
+                      <a:tailEnd type="none" w="med" len="med"/>
+                    </a:lnT>
+                    <a:lnB w="9525" cap="flat" cmpd="sng" algn="ctr">
+                      <a:solidFill>
+                        <a:srgbClr val="D9DEE4"/>
+                      </a:solidFill>
+                      <a:prstDash val="solid"/>
+                      <a:round/>
+                      <a:headEnd type="none" w="med" len="med"/>
+                      <a:tailEnd type="none" w="med" len="med"/>
+                    </a:lnB>
+                    <a:solidFill>
+                      <a:schemeClr val="bg1">
+                        <a:lumMod val="50000"/>
+                      </a:schemeClr>
+                    </a:solidFill>
+                  </a:tcPr>
+                </a:tc>
+                <a:tc>
+                  <a:txBody>
+                    <a:bodyPr/>
+                    <a:lstStyle/>
+                    <a:p>
+                      <a:pPr marL="0" indent="0" algn="ctr">
+                        <a:buNone/>
+                      </a:pPr>
+                      <a:r>
+                        <a:rPr lang="en-US" sz="860" b="1" dirty="0">
+                          <a:solidFill>
+                            <a:srgbClr val="FFFFFF"/>
+                          </a:solidFill>
+                        </a:rPr>
+                        <a:t>Collection</a:t>
+                      </a:r>
+                      <a:endParaRPr lang="en-US" sz="860" dirty="0"/>
+                    </a:p>
+                    <a:p>
+                      <a:pPr marL="0" indent="0" algn="ctr">
+                        <a:buNone/>
+                      </a:pPr>
+                      <a:r>
+                        <a:rPr lang="en-US" sz="860" b="1" dirty="0">
+                          <a:solidFill>
+                            <a:srgbClr val="FFFFFF"/>
+                          </a:solidFill>
+                        </a:rPr>
+                        <a:t>Rate</a:t>
+                      </a:r>
+                      <a:endParaRPr lang="en-US" sz="860" dirty="0"/>
+                    </a:p>
+                  </a:txBody>
+                  <a:tcPr anchor="ctr">
+                    <a:lnL w="9525" cap="flat" cmpd="sng" algn="ctr">
+                      <a:solidFill>
+                        <a:srgbClr val="D9DEE4"/>
+                      </a:solidFill>
+                      <a:prstDash val="solid"/>
+                      <a:round/>
+                      <a:headEnd type="none" w="med" len="med"/>
+                      <a:tailEnd type="none" w="med" len="med"/>
+                    </a:lnL>
+                    <a:lnR w="9525" cap="flat" cmpd="sng" algn="ctr">
+                      <a:solidFill>
+                        <a:srgbClr val="D9DEE4"/>
+                      </a:solidFill>
+                      <a:prstDash val="solid"/>
+                      <a:round/>
+                      <a:headEnd type="none" w="med" len="med"/>
+                      <a:tailEnd type="none" w="med" len="med"/>
+                    </a:lnR>
+                    <a:lnT w="9525" cap="flat" cmpd="sng" algn="ctr">
+                      <a:solidFill>
+                        <a:srgbClr val="D9DEE4"/>
+                      </a:solidFill>
+                      <a:prstDash val="solid"/>
+                      <a:round/>
+                      <a:headEnd type="none" w="med" len="med"/>
+                      <a:tailEnd type="none" w="med" len="med"/>
+                    </a:lnT>
+                    <a:lnB w="9525" cap="flat" cmpd="sng" algn="ctr">
+                      <a:solidFill>
+                        <a:srgbClr val="D9DEE4"/>
+                      </a:solidFill>
+                      <a:prstDash val="solid"/>
+                      <a:round/>
+                      <a:headEnd type="none" w="med" len="med"/>
+                      <a:tailEnd type="none" w="med" len="med"/>
+                    </a:lnB>
+                    <a:solidFill>
+                      <a:schemeClr val="bg1">
+                        <a:lumMod val="50000"/>
+                      </a:schemeClr>
+                    </a:solidFill>
+                  </a:tcPr>
+                </a:tc>
+                <a:tc>
+                  <a:txBody>
+                    <a:bodyPr/>
+                    <a:lstStyle/>
+                    <a:p>
+                      <a:pPr marL="0" indent="0" algn="ctr">
+                        <a:buNone/>
+                      </a:pPr>
+                      <a:r>
+                        <a:rPr lang="en-US" sz="860" b="1" dirty="0">
+                          <a:solidFill>
+                            <a:srgbClr val="FFFFFF"/>
+                          </a:solidFill>
+                        </a:rPr>
+                        <a:t>Overdue</a:t>
+                      </a:r>
+                      <a:endParaRPr lang="en-US" sz="860" dirty="0"/>
+                    </a:p>
+                    <a:p>
+                      <a:pPr marL="0" indent="0" algn="ctr">
+                        <a:buNone/>
+                      </a:pPr>
+                      <a:r>
+                        <a:rPr lang="en-US" sz="860" b="1" dirty="0">
+                          <a:solidFill>
+                            <a:srgbClr val="FFFFFF"/>
+                          </a:solidFill>
+                        </a:rPr>
+                        <a:t>Rate</a:t>
+                      </a:r>
+                      <a:endParaRPr lang="en-US" sz="860" dirty="0"/>
+                    </a:p>
+                  </a:txBody>
+                  <a:tcPr anchor="ctr">
+                    <a:lnL w="9525" cap="flat" cmpd="sng" algn="ctr">
+                      <a:solidFill>
+                        <a:srgbClr val="D9DEE4"/>
+                      </a:solidFill>
+                      <a:prstDash val="solid"/>
+                      <a:round/>
+                      <a:headEnd type="none" w="med" len="med"/>
+                      <a:tailEnd type="none" w="med" len="med"/>
+                    </a:lnL>
+                    <a:lnR w="9525" cap="flat" cmpd="sng" algn="ctr">
+                      <a:solidFill>
+                        <a:srgbClr val="D9DEE4"/>
+                      </a:solidFill>
+                      <a:prstDash val="solid"/>
+                      <a:round/>
+                      <a:headEnd type="none" w="med" len="med"/>
+                      <a:tailEnd type="none" w="med" len="med"/>
+                    </a:lnR>
+                    <a:lnT w="9525" cap="flat" cmpd="sng" algn="ctr">
+                      <a:solidFill>
+                        <a:srgbClr val="D9DEE4"/>
+                      </a:solidFill>
+                      <a:prstDash val="solid"/>
+                      <a:round/>
+                      <a:headEnd type="none" w="med" len="med"/>
+                      <a:tailEnd type="none" w="med" len="med"/>
+                    </a:lnT>
+                    <a:lnB w="9525" cap="flat" cmpd="sng" algn="ctr">
+                      <a:solidFill>
+                        <a:srgbClr val="D9DEE4"/>
+                      </a:solidFill>
+                      <a:prstDash val="solid"/>
+                      <a:round/>
+                      <a:headEnd type="none" w="med" len="med"/>
+                      <a:tailEnd type="none" w="med" len="med"/>
+                    </a:lnB>
+                    <a:solidFill>
+                      <a:schemeClr val="bg1">
+                        <a:lumMod val="50000"/>
+                      </a:schemeClr>
+                    </a:solidFill>
+                  </a:tcPr>
+                </a:tc>
+                <a:extLst>
+                  <a:ext uri="{0D108BD9-81ED-4DB2-BD59-A6C34878D82A}">
+                    <a16:rowId xmlns:a16="http://schemas.microsoft.com/office/drawing/2014/main" val="10000"/>
+                  </a:ext>
+                </a:extLst>
+              </a:tr>
+              <a:tr h="354330">
+                <a:tc>
+                  <a:txBody>
+                    <a:bodyPr/>
+                    <a:lstStyle/>
+                    <a:p>
+                      <a:pPr marL="0" indent="0" algn="l">
+                        <a:buNone/>
+                      </a:pPr>
+                      <a:r>
+                        <a:rPr lang="en-US" sz="900" b="1" dirty="0">
+                          <a:solidFill>
+                            <a:srgbClr val="1F2933"/>
+                          </a:solidFill>
+                        </a:rPr>
+                        <a:t>NPS</a:t>
+                      </a:r>
+                      <a:endParaRPr lang="en-US" sz="900" dirty="0"/>
+                    </a:p>
+                  </a:txBody>
+                  <a:tcPr anchor="ctr">
+                    <a:lnL w="9525" cap="flat" cmpd="sng" algn="ctr">
+                      <a:solidFill>
+                        <a:srgbClr val="D9DEE4"/>
+                      </a:solidFill>
+                      <a:prstDash val="solid"/>
+                      <a:round/>
+                      <a:headEnd type="none" w="med" len="med"/>
+                      <a:tailEnd type="none" w="med" len="med"/>
+                    </a:lnL>
+                    <a:lnR w="9525" cap="flat" cmpd="sng" algn="ctr">
+                      <a:solidFill>
+                        <a:srgbClr val="D9DEE4"/>
+                      </a:solidFill>
+                      <a:prstDash val="solid"/>
+                      <a:round/>
+                      <a:headEnd type="none" w="med" len="med"/>
+                      <a:tailEnd type="none" w="med" len="med"/>
+                    </a:lnR>
+                    <a:lnT w="9525" cap="flat" cmpd="sng" algn="ctr">
+                      <a:solidFill>
+                        <a:srgbClr val="D9DEE4"/>
+                      </a:solidFill>
+                      <a:prstDash val="solid"/>
+                      <a:round/>
+                      <a:headEnd type="none" w="med" len="med"/>
+                      <a:tailEnd type="none" w="med" len="med"/>
+                    </a:lnT>
+                    <a:lnB w="9525" cap="flat" cmpd="sng" algn="ctr">
+                      <a:solidFill>
+                        <a:srgbClr val="D9DEE4"/>
+                      </a:solidFill>
+                      <a:prstDash val="solid"/>
+                      <a:round/>
+                      <a:headEnd type="none" w="med" len="med"/>
+                      <a:tailEnd type="none" w="med" len="med"/>
+                    </a:lnB>
+                    <a:solidFill>
+                      <a:srgbClr val="FFFFFF"/>
+                    </a:solidFill>
+                  </a:tcPr>
+                </a:tc>
+                <a:tc>
+                  <a:txBody>
+                    <a:bodyPr/>
+                    <a:lstStyle/>
+                    <a:p>
+                      <a:pPr marL="0" indent="0" algn="ctr">
+                        <a:buNone/>
+                      </a:pPr>
+                      <a:r>
+                        <a:rPr lang="en-US" sz="900" dirty="0">
+                          <a:solidFill>
+                            <a:srgbClr val="1F2933"/>
+                          </a:solidFill>
+                        </a:rPr>
+                        <a:t>3.06m</a:t>
+                      </a:r>
+                      <a:endParaRPr lang="en-US" sz="900" dirty="0"/>
+                    </a:p>
+                  </a:txBody>
+                  <a:tcPr anchor="ctr">
+                    <a:lnL w="9525" cap="flat" cmpd="sng" algn="ctr">
+                      <a:solidFill>
+                        <a:srgbClr val="D9DEE4"/>
+                      </a:solidFill>
+                      <a:prstDash val="solid"/>
+                      <a:round/>
+                      <a:headEnd type="none" w="med" len="med"/>
+                      <a:tailEnd type="none" w="med" len="med"/>
+                    </a:lnL>
+                    <a:lnR w="9525" cap="flat" cmpd="sng" algn="ctr">
+                      <a:solidFill>
+                        <a:srgbClr val="D9DEE4"/>
+                      </a:solidFill>
+                      <a:prstDash val="solid"/>
+                      <a:round/>
+                      <a:headEnd type="none" w="med" len="med"/>
+                      <a:tailEnd type="none" w="med" len="med"/>
+                    </a:lnR>
+                    <a:lnT w="9525" cap="flat" cmpd="sng" algn="ctr">
+                      <a:solidFill>
+                        <a:srgbClr val="D9DEE4"/>
+                      </a:solidFill>
+                      <a:prstDash val="solid"/>
+                      <a:round/>
+                      <a:headEnd type="none" w="med" len="med"/>
+                      <a:tailEnd type="none" w="med" len="med"/>
+                    </a:lnT>
+                    <a:lnB w="9525" cap="flat" cmpd="sng" algn="ctr">
+                      <a:solidFill>
+                        <a:srgbClr val="D9DEE4"/>
+                      </a:solidFill>
+                      <a:prstDash val="solid"/>
+                      <a:round/>
+                      <a:headEnd type="none" w="med" len="med"/>
+                      <a:tailEnd type="none" w="med" len="med"/>
+                    </a:lnB>
+                    <a:solidFill>
+                      <a:srgbClr val="FFFFFF"/>
+                    </a:solidFill>
+                  </a:tcPr>
+                </a:tc>
+                <a:tc>
+                  <a:txBody>
+                    <a:bodyPr/>
+                    <a:lstStyle/>
+                    <a:p>
+                      <a:pPr marL="0" indent="0" algn="ctr">
+                        <a:buNone/>
+                      </a:pPr>
+                      <a:r>
+                        <a:rPr lang="en-US" sz="900" dirty="0">
+                          <a:solidFill>
+                            <a:srgbClr val="1F2933"/>
+                          </a:solidFill>
+                        </a:rPr>
+                        <a:t>1.90m</a:t>
+                      </a:r>
+                      <a:endParaRPr lang="en-US" sz="900" dirty="0"/>
+                    </a:p>
+                  </a:txBody>
+                  <a:tcPr anchor="ctr">
+                    <a:lnL w="9525" cap="flat" cmpd="sng" algn="ctr">
+                      <a:solidFill>
+                        <a:srgbClr val="D9DEE4"/>
+                      </a:solidFill>
+                      <a:prstDash val="solid"/>
+                      <a:round/>
+                      <a:headEnd type="none" w="med" len="med"/>
+                      <a:tailEnd type="none" w="med" len="med"/>
+                    </a:lnL>
+                    <a:lnR w="9525" cap="flat" cmpd="sng" algn="ctr">
+                      <a:solidFill>
+                        <a:srgbClr val="D9DEE4"/>
+                      </a:solidFill>
+                      <a:prstDash val="solid"/>
+                      <a:round/>
+                      <a:headEnd type="none" w="med" len="med"/>
+                      <a:tailEnd type="none" w="med" len="med"/>
+                    </a:lnR>
+                    <a:lnT w="9525" cap="flat" cmpd="sng" algn="ctr">
+                      <a:solidFill>
+                        <a:srgbClr val="D9DEE4"/>
+                      </a:solidFill>
+                      <a:prstDash val="solid"/>
+                      <a:round/>
+                      <a:headEnd type="none" w="med" len="med"/>
+                      <a:tailEnd type="none" w="med" len="med"/>
+                    </a:lnT>
+                    <a:lnB w="9525" cap="flat" cmpd="sng" algn="ctr">
+                      <a:solidFill>
+                        <a:srgbClr val="D9DEE4"/>
+                      </a:solidFill>
+                      <a:prstDash val="solid"/>
+                      <a:round/>
+                      <a:headEnd type="none" w="med" len="med"/>
+                      <a:tailEnd type="none" w="med" len="med"/>
+                    </a:lnB>
+                    <a:solidFill>
+                      <a:srgbClr val="FFFFFF"/>
+                    </a:solidFill>
+                  </a:tcPr>
+                </a:tc>
+                <a:tc>
+                  <a:txBody>
+                    <a:bodyPr/>
+                    <a:lstStyle/>
+                    <a:p>
+                      <a:pPr marL="0" indent="0" algn="ctr">
+                        <a:buNone/>
+                      </a:pPr>
+                      <a:r>
+                        <a:rPr lang="en-US" sz="900" dirty="0">
+                          <a:solidFill>
+                            <a:srgbClr val="1F2933"/>
+                          </a:solidFill>
+                        </a:rPr>
+                        <a:t>3.71m</a:t>
+                      </a:r>
+                      <a:endParaRPr lang="en-US" sz="900" dirty="0"/>
+                    </a:p>
+                  </a:txBody>
+                  <a:tcPr anchor="ctr">
+                    <a:lnL w="9525" cap="flat" cmpd="sng" algn="ctr">
+                      <a:solidFill>
+                        <a:srgbClr val="D9DEE4"/>
+                      </a:solidFill>
+                      <a:prstDash val="solid"/>
+                      <a:round/>
+                      <a:headEnd type="none" w="med" len="med"/>
+                      <a:tailEnd type="none" w="med" len="med"/>
+                    </a:lnL>
+                    <a:lnR w="9525" cap="flat" cmpd="sng" algn="ctr">
+                      <a:solidFill>
+                        <a:srgbClr val="D9DEE4"/>
+                      </a:solidFill>
+                      <a:prstDash val="solid"/>
+                      <a:round/>
+                      <a:headEnd type="none" w="med" len="med"/>
+                      <a:tailEnd type="none" w="med" len="med"/>
+                    </a:lnR>
+                    <a:lnT w="9525" cap="flat" cmpd="sng" algn="ctr">
+                      <a:solidFill>
+                        <a:srgbClr val="D9DEE4"/>
+                      </a:solidFill>
+                      <a:prstDash val="solid"/>
+                      <a:round/>
+                      <a:headEnd type="none" w="med" len="med"/>
+                      <a:tailEnd type="none" w="med" len="med"/>
+                    </a:lnT>
+                    <a:lnB w="9525" cap="flat" cmpd="sng" algn="ctr">
+                      <a:solidFill>
+                        <a:srgbClr val="D9DEE4"/>
+                      </a:solidFill>
+                      <a:prstDash val="solid"/>
+                      <a:round/>
+                      <a:headEnd type="none" w="med" len="med"/>
+                      <a:tailEnd type="none" w="med" len="med"/>
+                    </a:lnB>
+                    <a:solidFill>
+                      <a:srgbClr val="FFFFFF"/>
+                    </a:solidFill>
+                  </a:tcPr>
+                </a:tc>
+                <a:tc>
+                  <a:txBody>
+                    <a:bodyPr/>
+                    <a:lstStyle/>
+                    <a:p>
+                      <a:pPr marL="0" indent="0" algn="ctr">
+                        <a:buNone/>
+                      </a:pPr>
+                      <a:r>
+                        <a:rPr lang="en-US" sz="900" dirty="0">
+                          <a:solidFill>
+                            <a:srgbClr val="1F2933"/>
+                          </a:solidFill>
+                        </a:rPr>
+                        <a:t>3.17m</a:t>
+                      </a:r>
+                      <a:endParaRPr lang="en-US" sz="900" dirty="0"/>
+                    </a:p>
+                  </a:txBody>
+                  <a:tcPr anchor="ctr">
+                    <a:lnL w="9525" cap="flat" cmpd="sng" algn="ctr">
+                      <a:solidFill>
+                        <a:srgbClr val="D9DEE4"/>
+                      </a:solidFill>
+                      <a:prstDash val="solid"/>
+                      <a:round/>
+                      <a:headEnd type="none" w="med" len="med"/>
+                      <a:tailEnd type="none" w="med" len="med"/>
+                    </a:lnL>
+                    <a:lnR w="9525" cap="flat" cmpd="sng" algn="ctr">
+                      <a:solidFill>
+                        <a:srgbClr val="D9DEE4"/>
+                      </a:solidFill>
+                      <a:prstDash val="solid"/>
+                      <a:round/>
+                      <a:headEnd type="none" w="med" len="med"/>
+                      <a:tailEnd type="none" w="med" len="med"/>
+                    </a:lnR>
+                    <a:lnT w="9525" cap="flat" cmpd="sng" algn="ctr">
+                      <a:solidFill>
+                        <a:srgbClr val="D9DEE4"/>
+                      </a:solidFill>
+                      <a:prstDash val="solid"/>
+                      <a:round/>
+                      <a:headEnd type="none" w="med" len="med"/>
+                      <a:tailEnd type="none" w="med" len="med"/>
+                    </a:lnT>
+                    <a:lnB w="9525" cap="flat" cmpd="sng" algn="ctr">
+                      <a:solidFill>
+                        <a:srgbClr val="D9DEE4"/>
+                      </a:solidFill>
+                      <a:prstDash val="solid"/>
+                      <a:round/>
+                      <a:headEnd type="none" w="med" len="med"/>
+                      <a:tailEnd type="none" w="med" len="med"/>
+                    </a:lnB>
+                    <a:solidFill>
+                      <a:srgbClr val="FFFFFF"/>
+                    </a:solidFill>
+                  </a:tcPr>
+                </a:tc>
+                <a:tc>
+                  <a:txBody>
+                    <a:bodyPr/>
+                    <a:lstStyle/>
+                    <a:p>
+                      <a:pPr marL="0" indent="0" algn="ctr">
+                        <a:buNone/>
+                      </a:pPr>
+                      <a:r>
+                        <a:rPr lang="en-US" sz="900" dirty="0">
+                          <a:solidFill>
+                            <a:srgbClr val="1F2933"/>
+                          </a:solidFill>
+                        </a:rPr>
+                        <a:t>0.04m</a:t>
+                      </a:r>
+                      <a:endParaRPr lang="en-US" sz="900" dirty="0"/>
+                    </a:p>
+                  </a:txBody>
+                  <a:tcPr anchor="ctr">
+                    <a:lnL w="9525" cap="flat" cmpd="sng" algn="ctr">
+                      <a:solidFill>
+                        <a:srgbClr val="D9DEE4"/>
+                      </a:solidFill>
+                      <a:prstDash val="solid"/>
+                      <a:round/>
+                      <a:headEnd type="none" w="med" len="med"/>
+                      <a:tailEnd type="none" w="med" len="med"/>
+                    </a:lnL>
+                    <a:lnR w="9525" cap="flat" cmpd="sng" algn="ctr">
+                      <a:solidFill>
+                        <a:srgbClr val="D9DEE4"/>
+                      </a:solidFill>
+                      <a:prstDash val="solid"/>
+                      <a:round/>
+                      <a:headEnd type="none" w="med" len="med"/>
+                      <a:tailEnd type="none" w="med" len="med"/>
+                    </a:lnR>
+                    <a:lnT w="9525" cap="flat" cmpd="sng" algn="ctr">
+                      <a:solidFill>
+                        <a:srgbClr val="D9DEE4"/>
+                      </a:solidFill>
+                      <a:prstDash val="solid"/>
+                      <a:round/>
+                      <a:headEnd type="none" w="med" len="med"/>
+                      <a:tailEnd type="none" w="med" len="med"/>
+                    </a:lnT>
+                    <a:lnB w="9525" cap="flat" cmpd="sng" algn="ctr">
+                      <a:solidFill>
+                        <a:srgbClr val="D9DEE4"/>
+                      </a:solidFill>
+                      <a:prstDash val="solid"/>
+                      <a:round/>
+                      <a:headEnd type="none" w="med" len="med"/>
+                      <a:tailEnd type="none" w="med" len="med"/>
+                    </a:lnB>
+                    <a:solidFill>
+                      <a:srgbClr val="FFFFFF"/>
+                    </a:solidFill>
+                  </a:tcPr>
+                </a:tc>
+                <a:tc>
+                  <a:txBody>
+                    <a:bodyPr/>
+                    <a:lstStyle/>
+                    <a:p>
+                      <a:pPr marL="0" indent="0" algn="ctr">
+                        <a:buNone/>
+                      </a:pPr>
+                      <a:r>
+                        <a:rPr lang="en-US" sz="900" dirty="0">
+                          <a:solidFill>
+                            <a:srgbClr val="1F2933"/>
+                          </a:solidFill>
+                        </a:rPr>
+                        <a:t>0.01m</a:t>
+                      </a:r>
+                      <a:endParaRPr lang="en-US" sz="900" dirty="0"/>
+                    </a:p>
+                  </a:txBody>
+                  <a:tcPr anchor="ctr">
+                    <a:lnL w="9525" cap="flat" cmpd="sng" algn="ctr">
+                      <a:solidFill>
+                        <a:srgbClr val="D9DEE4"/>
+                      </a:solidFill>
+                      <a:prstDash val="solid"/>
+                      <a:round/>
+                      <a:headEnd type="none" w="med" len="med"/>
+                      <a:tailEnd type="none" w="med" len="med"/>
+                    </a:lnL>
+                    <a:lnR w="9525" cap="flat" cmpd="sng" algn="ctr">
+                      <a:solidFill>
+                        <a:srgbClr val="D9DEE4"/>
+                      </a:solidFill>
+                      <a:prstDash val="solid"/>
+                      <a:round/>
+                      <a:headEnd type="none" w="med" len="med"/>
+                      <a:tailEnd type="none" w="med" len="med"/>
+                    </a:lnR>
+                    <a:lnT w="9525" cap="flat" cmpd="sng" algn="ctr">
+                      <a:solidFill>
+                        <a:srgbClr val="D9DEE4"/>
+                      </a:solidFill>
+                      <a:prstDash val="solid"/>
+                      <a:round/>
+                      <a:headEnd type="none" w="med" len="med"/>
+                      <a:tailEnd type="none" w="med" len="med"/>
+                    </a:lnT>
+                    <a:lnB w="9525" cap="flat" cmpd="sng" algn="ctr">
+                      <a:solidFill>
+                        <a:srgbClr val="D9DEE4"/>
+                      </a:solidFill>
+                      <a:prstDash val="solid"/>
+                      <a:round/>
+                      <a:headEnd type="none" w="med" len="med"/>
+                      <a:tailEnd type="none" w="med" len="med"/>
+                    </a:lnB>
+                    <a:solidFill>
+                      <a:srgbClr val="FFFFFF"/>
+                    </a:solidFill>
+                  </a:tcPr>
+                </a:tc>
+                <a:tc>
+                  <a:txBody>
+                    <a:bodyPr/>
+                    <a:lstStyle/>
+                    <a:p>
+                      <a:pPr marL="0" indent="0" algn="ctr">
+                        <a:buNone/>
+                      </a:pPr>
+                      <a:r>
+                        <a:rPr lang="en-US" sz="900" dirty="0">
+                          <a:solidFill>
+                            <a:srgbClr val="1F2933"/>
+                          </a:solidFill>
+                        </a:rPr>
+                        <a:t>0.49m</a:t>
+                      </a:r>
+                      <a:endParaRPr lang="en-US" sz="900" dirty="0"/>
+                    </a:p>
+                  </a:txBody>
+                  <a:tcPr anchor="ctr">
+                    <a:lnL w="9525" cap="flat" cmpd="sng" algn="ctr">
+                      <a:solidFill>
+                        <a:srgbClr val="D9DEE4"/>
+                      </a:solidFill>
+                      <a:prstDash val="solid"/>
+                      <a:round/>
+                      <a:headEnd type="none" w="med" len="med"/>
+                      <a:tailEnd type="none" w="med" len="med"/>
+                    </a:lnL>
+                    <a:lnR w="9525" cap="flat" cmpd="sng" algn="ctr">
+                      <a:solidFill>
+                        <a:srgbClr val="D9DEE4"/>
+                      </a:solidFill>
+                      <a:prstDash val="solid"/>
+                      <a:round/>
+                      <a:headEnd type="none" w="med" len="med"/>
+                      <a:tailEnd type="none" w="med" len="med"/>
+                    </a:lnR>
+                    <a:lnT w="9525" cap="flat" cmpd="sng" algn="ctr">
+                      <a:solidFill>
+                        <a:srgbClr val="D9DEE4"/>
+                      </a:solidFill>
+                      <a:prstDash val="solid"/>
+                      <a:round/>
+                      <a:headEnd type="none" w="med" len="med"/>
+                      <a:tailEnd type="none" w="med" len="med"/>
+                    </a:lnT>
+                    <a:lnB w="9525" cap="flat" cmpd="sng" algn="ctr">
+                      <a:solidFill>
+                        <a:srgbClr val="D9DEE4"/>
+                      </a:solidFill>
+                      <a:prstDash val="solid"/>
+                      <a:round/>
+                      <a:headEnd type="none" w="med" len="med"/>
+                      <a:tailEnd type="none" w="med" len="med"/>
+                    </a:lnB>
+                    <a:solidFill>
+                      <a:srgbClr val="FFFFFF"/>
+                    </a:solidFill>
+                  </a:tcPr>
+                </a:tc>
+                <a:tc>
+                  <a:txBody>
+                    <a:bodyPr/>
+                    <a:lstStyle/>
+                    <a:p>
+                      <a:pPr marL="0" indent="0" algn="ctr">
+                        <a:buNone/>
+                      </a:pPr>
+                      <a:r>
+                        <a:rPr lang="en-US" sz="900" dirty="0">
+                          <a:solidFill>
+                            <a:srgbClr val="1F2933"/>
+                          </a:solidFill>
+                        </a:rPr>
+                        <a:t>0.50m</a:t>
+                      </a:r>
+                      <a:endParaRPr lang="en-US" sz="900" dirty="0"/>
+                    </a:p>
+                  </a:txBody>
+                  <a:tcPr anchor="ctr">
+                    <a:lnL w="9525" cap="flat" cmpd="sng" algn="ctr">
+                      <a:solidFill>
+                        <a:srgbClr val="D9DEE4"/>
+                      </a:solidFill>
+                      <a:prstDash val="solid"/>
+                      <a:round/>
+                      <a:headEnd type="none" w="med" len="med"/>
+                      <a:tailEnd type="none" w="med" len="med"/>
+                    </a:lnL>
+                    <a:lnR w="9525" cap="flat" cmpd="sng" algn="ctr">
+                      <a:solidFill>
+                        <a:srgbClr val="D9DEE4"/>
+                      </a:solidFill>
+                      <a:prstDash val="solid"/>
+                      <a:round/>
+                      <a:headEnd type="none" w="med" len="med"/>
+                      <a:tailEnd type="none" w="med" len="med"/>
+                    </a:lnR>
+                    <a:lnT w="9525" cap="flat" cmpd="sng" algn="ctr">
+                      <a:solidFill>
+                        <a:srgbClr val="D9DEE4"/>
+                      </a:solidFill>
+                      <a:prstDash val="solid"/>
+                      <a:round/>
+                      <a:headEnd type="none" w="med" len="med"/>
+                      <a:tailEnd type="none" w="med" len="med"/>
+                    </a:lnT>
+                    <a:lnB w="9525" cap="flat" cmpd="sng" algn="ctr">
+                      <a:solidFill>
+                        <a:srgbClr val="D9DEE4"/>
+                      </a:solidFill>
+                      <a:prstDash val="solid"/>
+                      <a:round/>
+                      <a:headEnd type="none" w="med" len="med"/>
+                      <a:tailEnd type="none" w="med" len="med"/>
+                    </a:lnB>
+                    <a:solidFill>
+                      <a:srgbClr val="FFFFFF"/>
+                    </a:solidFill>
+                  </a:tcPr>
+                </a:tc>
+                <a:tc>
+                  <a:txBody>
+                    <a:bodyPr/>
+                    <a:lstStyle/>
+                    <a:p>
+                      <a:pPr marL="0" indent="0" algn="ctr">
+                        <a:buNone/>
+                      </a:pPr>
+                      <a:r>
+                        <a:rPr lang="en-US" sz="900" dirty="0">
+                          <a:solidFill>
+                            <a:srgbClr val="1F2933"/>
+                          </a:solidFill>
+                        </a:rPr>
+                        <a:t>62%</a:t>
+                      </a:r>
+                      <a:endParaRPr lang="en-US" sz="900" dirty="0"/>
+                    </a:p>
+                  </a:txBody>
+                  <a:tcPr anchor="ctr">
+                    <a:lnL w="9525" cap="flat" cmpd="sng" algn="ctr">
+                      <a:solidFill>
+                        <a:srgbClr val="D9DEE4"/>
+                      </a:solidFill>
+                      <a:prstDash val="solid"/>
+                      <a:round/>
+                      <a:headEnd type="none" w="med" len="med"/>
+                      <a:tailEnd type="none" w="med" len="med"/>
+                    </a:lnL>
+                    <a:lnR w="9525" cap="flat" cmpd="sng" algn="ctr">
+                      <a:solidFill>
+                        <a:srgbClr val="D9DEE4"/>
+                      </a:solidFill>
+                      <a:prstDash val="solid"/>
+                      <a:round/>
+                      <a:headEnd type="none" w="med" len="med"/>
+                      <a:tailEnd type="none" w="med" len="med"/>
+                    </a:lnR>
+                    <a:lnT w="9525" cap="flat" cmpd="sng" algn="ctr">
+                      <a:solidFill>
+                        <a:srgbClr val="D9DEE4"/>
+                      </a:solidFill>
+                      <a:prstDash val="solid"/>
+                      <a:round/>
+                      <a:headEnd type="none" w="med" len="med"/>
+                      <a:tailEnd type="none" w="med" len="med"/>
+                    </a:lnT>
+                    <a:lnB w="9525" cap="flat" cmpd="sng" algn="ctr">
+                      <a:solidFill>
+                        <a:srgbClr val="D9DEE4"/>
+                      </a:solidFill>
+                      <a:prstDash val="solid"/>
+                      <a:round/>
+                      <a:headEnd type="none" w="med" len="med"/>
+                      <a:tailEnd type="none" w="med" len="med"/>
+                    </a:lnB>
+                    <a:solidFill>
+                      <a:srgbClr val="FFFFFF"/>
+                    </a:solidFill>
+                  </a:tcPr>
+                </a:tc>
+                <a:tc>
+                  <a:txBody>
+                    <a:bodyPr/>
+                    <a:lstStyle/>
+                    <a:p>
+                      <a:pPr marL="0" indent="0" algn="ctr">
+                        <a:buNone/>
+                      </a:pPr>
+                      <a:r>
+                        <a:rPr lang="en-US" sz="900" dirty="0">
+                          <a:solidFill>
+                            <a:srgbClr val="1F2933"/>
+                          </a:solidFill>
+                        </a:rPr>
+                        <a:t>13%</a:t>
+                      </a:r>
+                      <a:endParaRPr lang="en-US" sz="900" dirty="0"/>
+                    </a:p>
+                  </a:txBody>
+                  <a:tcPr anchor="ctr">
+                    <a:lnL w="9525" cap="flat" cmpd="sng" algn="ctr">
+                      <a:solidFill>
+                        <a:srgbClr val="D9DEE4"/>
+                      </a:solidFill>
+                      <a:prstDash val="solid"/>
+                      <a:round/>
+                      <a:headEnd type="none" w="med" len="med"/>
+                      <a:tailEnd type="none" w="med" len="med"/>
+                    </a:lnL>
+                    <a:lnR w="9525" cap="flat" cmpd="sng" algn="ctr">
+                      <a:solidFill>
+                        <a:srgbClr val="D9DEE4"/>
+                      </a:solidFill>
+                      <a:prstDash val="solid"/>
+                      <a:round/>
+                      <a:headEnd type="none" w="med" len="med"/>
+                      <a:tailEnd type="none" w="med" len="med"/>
+                    </a:lnR>
+                    <a:lnT w="9525" cap="flat" cmpd="sng" algn="ctr">
+                      <a:solidFill>
+                        <a:srgbClr val="D9DEE4"/>
+                      </a:solidFill>
+                      <a:prstDash val="solid"/>
+                      <a:round/>
+                      <a:headEnd type="none" w="med" len="med"/>
+                      <a:tailEnd type="none" w="med" len="med"/>
+                    </a:lnT>
+                    <a:lnB w="9525" cap="flat" cmpd="sng" algn="ctr">
+                      <a:solidFill>
+                        <a:srgbClr val="D9DEE4"/>
+                      </a:solidFill>
+                      <a:prstDash val="solid"/>
+                      <a:round/>
+                      <a:headEnd type="none" w="med" len="med"/>
+                      <a:tailEnd type="none" w="med" len="med"/>
+                    </a:lnB>
+                    <a:solidFill>
+                      <a:srgbClr val="FFFFFF"/>
+                    </a:solidFill>
+                  </a:tcPr>
+                </a:tc>
+                <a:extLst>
+                  <a:ext uri="{0D108BD9-81ED-4DB2-BD59-A6C34878D82A}">
+                    <a16:rowId xmlns:a16="http://schemas.microsoft.com/office/drawing/2014/main" val="10001"/>
+                  </a:ext>
+                </a:extLst>
+              </a:tr>
+              <a:tr h="354330">
+                <a:tc>
+                  <a:txBody>
+                    <a:bodyPr/>
+                    <a:lstStyle/>
+                    <a:p>
+                      <a:pPr marL="0" indent="0" algn="l">
+                        <a:buNone/>
+                      </a:pPr>
+                      <a:r>
+                        <a:rPr lang="en-US" sz="900" b="1" dirty="0">
+                          <a:solidFill>
+                            <a:srgbClr val="1F2933"/>
+                          </a:solidFill>
+                        </a:rPr>
+                        <a:t>NPM</a:t>
+                      </a:r>
+                      <a:endParaRPr lang="en-US" sz="900" dirty="0"/>
+                    </a:p>
+                  </a:txBody>
+                  <a:tcPr anchor="ctr">
+                    <a:lnL w="9525" cap="flat" cmpd="sng" algn="ctr">
+                      <a:solidFill>
+                        <a:srgbClr val="D9DEE4"/>
+                      </a:solidFill>
+                      <a:prstDash val="solid"/>
+                      <a:round/>
+                      <a:headEnd type="none" w="med" len="med"/>
+                      <a:tailEnd type="none" w="med" len="med"/>
+                    </a:lnL>
+                    <a:lnR w="9525" cap="flat" cmpd="sng" algn="ctr">
+                      <a:solidFill>
+                        <a:srgbClr val="D9DEE4"/>
+                      </a:solidFill>
+                      <a:prstDash val="solid"/>
+                      <a:round/>
+                      <a:headEnd type="none" w="med" len="med"/>
+                      <a:tailEnd type="none" w="med" len="med"/>
+                    </a:lnR>
+                    <a:lnT w="9525" cap="flat" cmpd="sng" algn="ctr">
+                      <a:solidFill>
+                        <a:srgbClr val="D9DEE4"/>
+                      </a:solidFill>
+                      <a:prstDash val="solid"/>
+                      <a:round/>
+                      <a:headEnd type="none" w="med" len="med"/>
+                      <a:tailEnd type="none" w="med" len="med"/>
+                    </a:lnT>
+                    <a:lnB w="9525" cap="flat" cmpd="sng" algn="ctr">
+                      <a:solidFill>
+                        <a:srgbClr val="D9DEE4"/>
+                      </a:solidFill>
+                      <a:prstDash val="solid"/>
+                      <a:round/>
+                      <a:headEnd type="none" w="med" len="med"/>
+                      <a:tailEnd type="none" w="med" len="med"/>
+                    </a:lnB>
+                    <a:solidFill>
+                      <a:srgbClr val="F4F6F8"/>
+                    </a:solidFill>
+                  </a:tcPr>
+                </a:tc>
+                <a:tc>
+                  <a:txBody>
+                    <a:bodyPr/>
+                    <a:lstStyle/>
+                    <a:p>
+                      <a:pPr marL="0" indent="0" algn="ctr">
+                        <a:buNone/>
+                      </a:pPr>
+                      <a:r>
+                        <a:rPr lang="en-US" sz="900" dirty="0">
+                          <a:solidFill>
+                            <a:srgbClr val="1F2933"/>
+                          </a:solidFill>
+                        </a:rPr>
+                        <a:t>13.98m</a:t>
+                      </a:r>
+                      <a:endParaRPr lang="en-US" sz="900" dirty="0"/>
+                    </a:p>
+                  </a:txBody>
+                  <a:tcPr anchor="ctr">
+                    <a:lnL w="9525" cap="flat" cmpd="sng" algn="ctr">
+                      <a:solidFill>
+                        <a:srgbClr val="D9DEE4"/>
+                      </a:solidFill>
+                      <a:prstDash val="solid"/>
+                      <a:round/>
+                      <a:headEnd type="none" w="med" len="med"/>
+                      <a:tailEnd type="none" w="med" len="med"/>
+                    </a:lnL>
+                    <a:lnR w="9525" cap="flat" cmpd="sng" algn="ctr">
+                      <a:solidFill>
+                        <a:srgbClr val="D9DEE4"/>
+                      </a:solidFill>
+                      <a:prstDash val="solid"/>
+                      <a:round/>
+                      <a:headEnd type="none" w="med" len="med"/>
+                      <a:tailEnd type="none" w="med" len="med"/>
+                    </a:lnR>
+                    <a:lnT w="9525" cap="flat" cmpd="sng" algn="ctr">
+                      <a:solidFill>
+                        <a:srgbClr val="D9DEE4"/>
+                      </a:solidFill>
+                      <a:prstDash val="solid"/>
+                      <a:round/>
+                      <a:headEnd type="none" w="med" len="med"/>
+                      <a:tailEnd type="none" w="med" len="med"/>
+                    </a:lnT>
+                    <a:lnB w="9525" cap="flat" cmpd="sng" algn="ctr">
+                      <a:solidFill>
+                        <a:srgbClr val="D9DEE4"/>
+                      </a:solidFill>
+                      <a:prstDash val="solid"/>
+                      <a:round/>
+                      <a:headEnd type="none" w="med" len="med"/>
+                      <a:tailEnd type="none" w="med" len="med"/>
+                    </a:lnB>
+                    <a:solidFill>
+                      <a:srgbClr val="F4F6F8"/>
+                    </a:solidFill>
+                  </a:tcPr>
+                </a:tc>
+                <a:tc>
+                  <a:txBody>
+                    <a:bodyPr/>
+                    <a:lstStyle/>
+                    <a:p>
+                      <a:pPr marL="0" indent="0" algn="ctr">
+                        <a:buNone/>
+                      </a:pPr>
+                      <a:r>
+                        <a:rPr lang="en-US" sz="900" dirty="0">
+                          <a:solidFill>
+                            <a:srgbClr val="1F2933"/>
+                          </a:solidFill>
+                        </a:rPr>
+                        <a:t>7.65m</a:t>
+                      </a:r>
+                      <a:endParaRPr lang="en-US" sz="900" dirty="0"/>
+                    </a:p>
+                  </a:txBody>
+                  <a:tcPr anchor="ctr">
+                    <a:lnL w="9525" cap="flat" cmpd="sng" algn="ctr">
+                      <a:solidFill>
+                        <a:srgbClr val="D9DEE4"/>
+                      </a:solidFill>
+                      <a:prstDash val="solid"/>
+                      <a:round/>
+                      <a:headEnd type="none" w="med" len="med"/>
+                      <a:tailEnd type="none" w="med" len="med"/>
+                    </a:lnL>
+                    <a:lnR w="9525" cap="flat" cmpd="sng" algn="ctr">
+                      <a:solidFill>
+                        <a:srgbClr val="D9DEE4"/>
+                      </a:solidFill>
+                      <a:prstDash val="solid"/>
+                      <a:round/>
+                      <a:headEnd type="none" w="med" len="med"/>
+                      <a:tailEnd type="none" w="med" len="med"/>
+                    </a:lnR>
+                    <a:lnT w="9525" cap="flat" cmpd="sng" algn="ctr">
+                      <a:solidFill>
+                        <a:srgbClr val="D9DEE4"/>
+                      </a:solidFill>
+                      <a:prstDash val="solid"/>
+                      <a:round/>
+                      <a:headEnd type="none" w="med" len="med"/>
+                      <a:tailEnd type="none" w="med" len="med"/>
+                    </a:lnT>
+                    <a:lnB w="9525" cap="flat" cmpd="sng" algn="ctr">
+                      <a:solidFill>
+                        <a:srgbClr val="D9DEE4"/>
+                      </a:solidFill>
+                      <a:prstDash val="solid"/>
+                      <a:round/>
+                      <a:headEnd type="none" w="med" len="med"/>
+                      <a:tailEnd type="none" w="med" len="med"/>
+                    </a:lnB>
+                    <a:solidFill>
+                      <a:srgbClr val="F4F6F8"/>
+                    </a:solidFill>
+                  </a:tcPr>
+                </a:tc>
+                <a:tc>
+                  <a:txBody>
+                    <a:bodyPr/>
+                    <a:lstStyle/>
+                    <a:p>
+                      <a:pPr marL="0" indent="0" algn="ctr">
+                        <a:buNone/>
+                      </a:pPr>
+                      <a:r>
+                        <a:rPr lang="en-US" sz="900" dirty="0">
+                          <a:solidFill>
+                            <a:srgbClr val="1F2933"/>
+                          </a:solidFill>
+                        </a:rPr>
+                        <a:t>10.67m</a:t>
+                      </a:r>
+                      <a:endParaRPr lang="en-US" sz="900" dirty="0"/>
+                    </a:p>
+                  </a:txBody>
+                  <a:tcPr anchor="ctr">
+                    <a:lnL w="9525" cap="flat" cmpd="sng" algn="ctr">
+                      <a:solidFill>
+                        <a:srgbClr val="D9DEE4"/>
+                      </a:solidFill>
+                      <a:prstDash val="solid"/>
+                      <a:round/>
+                      <a:headEnd type="none" w="med" len="med"/>
+                      <a:tailEnd type="none" w="med" len="med"/>
+                    </a:lnL>
+                    <a:lnR w="9525" cap="flat" cmpd="sng" algn="ctr">
+                      <a:solidFill>
+                        <a:srgbClr val="D9DEE4"/>
+                      </a:solidFill>
+                      <a:prstDash val="solid"/>
+                      <a:round/>
+                      <a:headEnd type="none" w="med" len="med"/>
+                      <a:tailEnd type="none" w="med" len="med"/>
+                    </a:lnR>
+                    <a:lnT w="9525" cap="flat" cmpd="sng" algn="ctr">
+                      <a:solidFill>
+                        <a:srgbClr val="D9DEE4"/>
+                      </a:solidFill>
+                      <a:prstDash val="solid"/>
+                      <a:round/>
+                      <a:headEnd type="none" w="med" len="med"/>
+                      <a:tailEnd type="none" w="med" len="med"/>
+                    </a:lnT>
+                    <a:lnB w="9525" cap="flat" cmpd="sng" algn="ctr">
+                      <a:solidFill>
+                        <a:srgbClr val="D9DEE4"/>
+                      </a:solidFill>
+                      <a:prstDash val="solid"/>
+                      <a:round/>
+                      <a:headEnd type="none" w="med" len="med"/>
+                      <a:tailEnd type="none" w="med" len="med"/>
+                    </a:lnB>
+                    <a:solidFill>
+                      <a:srgbClr val="F4F6F8"/>
+                    </a:solidFill>
+                  </a:tcPr>
+                </a:tc>
+                <a:tc>
+                  <a:txBody>
+                    <a:bodyPr/>
+                    <a:lstStyle/>
+                    <a:p>
+                      <a:pPr marL="0" indent="0" algn="ctr">
+                        <a:buNone/>
+                      </a:pPr>
+                      <a:r>
+                        <a:rPr lang="en-US" sz="900" dirty="0">
+                          <a:solidFill>
+                            <a:srgbClr val="1F2933"/>
+                          </a:solidFill>
+                        </a:rPr>
+                        <a:t>7.25m</a:t>
+                      </a:r>
+                      <a:endParaRPr lang="en-US" sz="900" dirty="0"/>
+                    </a:p>
+                  </a:txBody>
+                  <a:tcPr anchor="ctr">
+                    <a:lnL w="9525" cap="flat" cmpd="sng" algn="ctr">
+                      <a:solidFill>
+                        <a:srgbClr val="D9DEE4"/>
+                      </a:solidFill>
+                      <a:prstDash val="solid"/>
+                      <a:round/>
+                      <a:headEnd type="none" w="med" len="med"/>
+                      <a:tailEnd type="none" w="med" len="med"/>
+                    </a:lnL>
+                    <a:lnR w="9525" cap="flat" cmpd="sng" algn="ctr">
+                      <a:solidFill>
+                        <a:srgbClr val="D9DEE4"/>
+                      </a:solidFill>
+                      <a:prstDash val="solid"/>
+                      <a:round/>
+                      <a:headEnd type="none" w="med" len="med"/>
+                      <a:tailEnd type="none" w="med" len="med"/>
+                    </a:lnR>
+                    <a:lnT w="9525" cap="flat" cmpd="sng" algn="ctr">
+                      <a:solidFill>
+                        <a:srgbClr val="D9DEE4"/>
+                      </a:solidFill>
+                      <a:prstDash val="solid"/>
+                      <a:round/>
+                      <a:headEnd type="none" w="med" len="med"/>
+                      <a:tailEnd type="none" w="med" len="med"/>
+                    </a:lnT>
+                    <a:lnB w="9525" cap="flat" cmpd="sng" algn="ctr">
+                      <a:solidFill>
+                        <a:srgbClr val="D9DEE4"/>
+                      </a:solidFill>
+                      <a:prstDash val="solid"/>
+                      <a:round/>
+                      <a:headEnd type="none" w="med" len="med"/>
+                      <a:tailEnd type="none" w="med" len="med"/>
+                    </a:lnB>
+                    <a:solidFill>
+                      <a:srgbClr val="F4F6F8"/>
+                    </a:solidFill>
+                  </a:tcPr>
+                </a:tc>
+                <a:tc>
+                  <a:txBody>
+                    <a:bodyPr/>
+                    <a:lstStyle/>
+                    <a:p>
+                      <a:pPr marL="0" indent="0" algn="ctr">
+                        <a:buNone/>
+                      </a:pPr>
+                      <a:r>
+                        <a:rPr lang="en-US" sz="900" dirty="0">
+                          <a:solidFill>
+                            <a:srgbClr val="1F2933"/>
+                          </a:solidFill>
+                        </a:rPr>
+                        <a:t>0.19m</a:t>
+                      </a:r>
+                      <a:endParaRPr lang="en-US" sz="900" dirty="0"/>
+                    </a:p>
+                  </a:txBody>
+                  <a:tcPr anchor="ctr">
+                    <a:lnL w="9525" cap="flat" cmpd="sng" algn="ctr">
+                      <a:solidFill>
+                        <a:srgbClr val="D9DEE4"/>
+                      </a:solidFill>
+                      <a:prstDash val="solid"/>
+                      <a:round/>
+                      <a:headEnd type="none" w="med" len="med"/>
+                      <a:tailEnd type="none" w="med" len="med"/>
+                    </a:lnL>
+                    <a:lnR w="9525" cap="flat" cmpd="sng" algn="ctr">
+                      <a:solidFill>
+                        <a:srgbClr val="D9DEE4"/>
+                      </a:solidFill>
+                      <a:prstDash val="solid"/>
+                      <a:round/>
+                      <a:headEnd type="none" w="med" len="med"/>
+                      <a:tailEnd type="none" w="med" len="med"/>
+                    </a:lnR>
+                    <a:lnT w="9525" cap="flat" cmpd="sng" algn="ctr">
+                      <a:solidFill>
+                        <a:srgbClr val="D9DEE4"/>
+                      </a:solidFill>
+                      <a:prstDash val="solid"/>
+                      <a:round/>
+                      <a:headEnd type="none" w="med" len="med"/>
+                      <a:tailEnd type="none" w="med" len="med"/>
+                    </a:lnT>
+                    <a:lnB w="9525" cap="flat" cmpd="sng" algn="ctr">
+                      <a:solidFill>
+                        <a:srgbClr val="D9DEE4"/>
+                      </a:solidFill>
+                      <a:prstDash val="solid"/>
+                      <a:round/>
+                      <a:headEnd type="none" w="med" len="med"/>
+                      <a:tailEnd type="none" w="med" len="med"/>
+                    </a:lnB>
+                    <a:solidFill>
+                      <a:srgbClr val="F4F6F8"/>
+                    </a:solidFill>
+                  </a:tcPr>
+                </a:tc>
+                <a:tc>
+                  <a:txBody>
+                    <a:bodyPr/>
+                    <a:lstStyle/>
+                    <a:p>
+                      <a:pPr marL="0" indent="0" algn="ctr">
+                        <a:buNone/>
+                      </a:pPr>
+                      <a:r>
+                        <a:rPr lang="en-US" sz="900" dirty="0">
+                          <a:solidFill>
+                            <a:srgbClr val="1F2933"/>
+                          </a:solidFill>
+                        </a:rPr>
+                        <a:t>0.26m</a:t>
+                      </a:r>
+                      <a:endParaRPr lang="en-US" sz="900" dirty="0"/>
+                    </a:p>
+                  </a:txBody>
+                  <a:tcPr anchor="ctr">
+                    <a:lnL w="9525" cap="flat" cmpd="sng" algn="ctr">
+                      <a:solidFill>
+                        <a:srgbClr val="D9DEE4"/>
+                      </a:solidFill>
+                      <a:prstDash val="solid"/>
+                      <a:round/>
+                      <a:headEnd type="none" w="med" len="med"/>
+                      <a:tailEnd type="none" w="med" len="med"/>
+                    </a:lnL>
+                    <a:lnR w="9525" cap="flat" cmpd="sng" algn="ctr">
+                      <a:solidFill>
+                        <a:srgbClr val="D9DEE4"/>
+                      </a:solidFill>
+                      <a:prstDash val="solid"/>
+                      <a:round/>
+                      <a:headEnd type="none" w="med" len="med"/>
+                      <a:tailEnd type="none" w="med" len="med"/>
+                    </a:lnR>
+                    <a:lnT w="9525" cap="flat" cmpd="sng" algn="ctr">
+                      <a:solidFill>
+                        <a:srgbClr val="D9DEE4"/>
+                      </a:solidFill>
+                      <a:prstDash val="solid"/>
+                      <a:round/>
+                      <a:headEnd type="none" w="med" len="med"/>
+                      <a:tailEnd type="none" w="med" len="med"/>
+                    </a:lnT>
+                    <a:lnB w="9525" cap="flat" cmpd="sng" algn="ctr">
+                      <a:solidFill>
+                        <a:srgbClr val="D9DEE4"/>
+                      </a:solidFill>
+                      <a:prstDash val="solid"/>
+                      <a:round/>
+                      <a:headEnd type="none" w="med" len="med"/>
+                      <a:tailEnd type="none" w="med" len="med"/>
+                    </a:lnB>
+                    <a:solidFill>
+                      <a:srgbClr val="F4F6F8"/>
+                    </a:solidFill>
+                  </a:tcPr>
+                </a:tc>
+                <a:tc>
+                  <a:txBody>
+                    <a:bodyPr/>
+                    <a:lstStyle/>
+                    <a:p>
+                      <a:pPr marL="0" indent="0" algn="ctr">
+                        <a:buNone/>
+                      </a:pPr>
+                      <a:r>
+                        <a:rPr lang="en-US" sz="900" dirty="0">
+                          <a:solidFill>
+                            <a:srgbClr val="1F2933"/>
+                          </a:solidFill>
+                        </a:rPr>
+                        <a:t>2.96m</a:t>
+                      </a:r>
+                      <a:endParaRPr lang="en-US" sz="900" dirty="0"/>
+                    </a:p>
+                  </a:txBody>
+                  <a:tcPr anchor="ctr">
+                    <a:lnL w="9525" cap="flat" cmpd="sng" algn="ctr">
+                      <a:solidFill>
+                        <a:srgbClr val="D9DEE4"/>
+                      </a:solidFill>
+                      <a:prstDash val="solid"/>
+                      <a:round/>
+                      <a:headEnd type="none" w="med" len="med"/>
+                      <a:tailEnd type="none" w="med" len="med"/>
+                    </a:lnL>
+                    <a:lnR w="9525" cap="flat" cmpd="sng" algn="ctr">
+                      <a:solidFill>
+                        <a:srgbClr val="D9DEE4"/>
+                      </a:solidFill>
+                      <a:prstDash val="solid"/>
+                      <a:round/>
+                      <a:headEnd type="none" w="med" len="med"/>
+                      <a:tailEnd type="none" w="med" len="med"/>
+                    </a:lnR>
+                    <a:lnT w="9525" cap="flat" cmpd="sng" algn="ctr">
+                      <a:solidFill>
+                        <a:srgbClr val="D9DEE4"/>
+                      </a:solidFill>
+                      <a:prstDash val="solid"/>
+                      <a:round/>
+                      <a:headEnd type="none" w="med" len="med"/>
+                      <a:tailEnd type="none" w="med" len="med"/>
+                    </a:lnT>
+                    <a:lnB w="9525" cap="flat" cmpd="sng" algn="ctr">
+                      <a:solidFill>
+                        <a:srgbClr val="D9DEE4"/>
+                      </a:solidFill>
+                      <a:prstDash val="solid"/>
+                      <a:round/>
+                      <a:headEnd type="none" w="med" len="med"/>
+                      <a:tailEnd type="none" w="med" len="med"/>
+                    </a:lnB>
+                    <a:solidFill>
+                      <a:srgbClr val="F4F6F8"/>
+                    </a:solidFill>
+                  </a:tcPr>
+                </a:tc>
+                <a:tc>
+                  <a:txBody>
+                    <a:bodyPr/>
+                    <a:lstStyle/>
+                    <a:p>
+                      <a:pPr marL="0" indent="0" algn="ctr">
+                        <a:buNone/>
+                      </a:pPr>
+                      <a:r>
+                        <a:rPr lang="en-US" sz="900" dirty="0">
+                          <a:solidFill>
+                            <a:srgbClr val="1F2933"/>
+                          </a:solidFill>
+                        </a:rPr>
+                        <a:t>3.23m</a:t>
+                      </a:r>
+                      <a:endParaRPr lang="en-US" sz="900" dirty="0"/>
+                    </a:p>
+                  </a:txBody>
+                  <a:tcPr anchor="ctr">
+                    <a:lnL w="9525" cap="flat" cmpd="sng" algn="ctr">
+                      <a:solidFill>
+                        <a:srgbClr val="D9DEE4"/>
+                      </a:solidFill>
+                      <a:prstDash val="solid"/>
+                      <a:round/>
+                      <a:headEnd type="none" w="med" len="med"/>
+                      <a:tailEnd type="none" w="med" len="med"/>
+                    </a:lnL>
+                    <a:lnR w="9525" cap="flat" cmpd="sng" algn="ctr">
+                      <a:solidFill>
+                        <a:srgbClr val="D9DEE4"/>
+                      </a:solidFill>
+                      <a:prstDash val="solid"/>
+                      <a:round/>
+                      <a:headEnd type="none" w="med" len="med"/>
+                      <a:tailEnd type="none" w="med" len="med"/>
+                    </a:lnR>
+                    <a:lnT w="9525" cap="flat" cmpd="sng" algn="ctr">
+                      <a:solidFill>
+                        <a:srgbClr val="D9DEE4"/>
+                      </a:solidFill>
+                      <a:prstDash val="solid"/>
+                      <a:round/>
+                      <a:headEnd type="none" w="med" len="med"/>
+                      <a:tailEnd type="none" w="med" len="med"/>
+                    </a:lnT>
+                    <a:lnB w="9525" cap="flat" cmpd="sng" algn="ctr">
+                      <a:solidFill>
+                        <a:srgbClr val="D9DEE4"/>
+                      </a:solidFill>
+                      <a:prstDash val="solid"/>
+                      <a:round/>
+                      <a:headEnd type="none" w="med" len="med"/>
+                      <a:tailEnd type="none" w="med" len="med"/>
+                    </a:lnB>
+                    <a:solidFill>
+                      <a:srgbClr val="F4F6F8"/>
+                    </a:solidFill>
+                  </a:tcPr>
+                </a:tc>
+                <a:tc>
+                  <a:txBody>
+                    <a:bodyPr/>
+                    <a:lstStyle/>
+                    <a:p>
+                      <a:pPr marL="0" indent="0" algn="ctr">
+                        <a:buNone/>
+                      </a:pPr>
+                      <a:r>
+                        <a:rPr lang="en-US" sz="900" dirty="0">
+                          <a:solidFill>
+                            <a:srgbClr val="1F2933"/>
+                          </a:solidFill>
+                        </a:rPr>
+                        <a:t>55%</a:t>
+                      </a:r>
+                      <a:endParaRPr lang="en-US" sz="900" dirty="0"/>
+                    </a:p>
+                  </a:txBody>
+                  <a:tcPr anchor="ctr">
+                    <a:lnL w="9525" cap="flat" cmpd="sng" algn="ctr">
+                      <a:solidFill>
+                        <a:srgbClr val="D9DEE4"/>
+                      </a:solidFill>
+                      <a:prstDash val="solid"/>
+                      <a:round/>
+                      <a:headEnd type="none" w="med" len="med"/>
+                      <a:tailEnd type="none" w="med" len="med"/>
+                    </a:lnL>
+                    <a:lnR w="9525" cap="flat" cmpd="sng" algn="ctr">
+                      <a:solidFill>
+                        <a:srgbClr val="D9DEE4"/>
+                      </a:solidFill>
+                      <a:prstDash val="solid"/>
+                      <a:round/>
+                      <a:headEnd type="none" w="med" len="med"/>
+                      <a:tailEnd type="none" w="med" len="med"/>
+                    </a:lnR>
+                    <a:lnT w="9525" cap="flat" cmpd="sng" algn="ctr">
+                      <a:solidFill>
+                        <a:srgbClr val="D9DEE4"/>
+                      </a:solidFill>
+                      <a:prstDash val="solid"/>
+                      <a:round/>
+                      <a:headEnd type="none" w="med" len="med"/>
+                      <a:tailEnd type="none" w="med" len="med"/>
+                    </a:lnT>
+                    <a:lnB w="9525" cap="flat" cmpd="sng" algn="ctr">
+                      <a:solidFill>
+                        <a:srgbClr val="D9DEE4"/>
+                      </a:solidFill>
+                      <a:prstDash val="solid"/>
+                      <a:round/>
+                      <a:headEnd type="none" w="med" len="med"/>
+                      <a:tailEnd type="none" w="med" len="med"/>
+                    </a:lnB>
+                    <a:solidFill>
+                      <a:srgbClr val="F4F6F8"/>
+                    </a:solidFill>
+                  </a:tcPr>
+                </a:tc>
+                <a:tc>
+                  <a:txBody>
+                    <a:bodyPr/>
+                    <a:lstStyle/>
+                    <a:p>
+                      <a:pPr marL="0" indent="0" algn="ctr">
+                        <a:buNone/>
+                      </a:pPr>
+                      <a:r>
+                        <a:rPr lang="en-US" sz="900" dirty="0">
+                          <a:solidFill>
+                            <a:srgbClr val="1F2933"/>
+                          </a:solidFill>
+                        </a:rPr>
+                        <a:t>30%</a:t>
+                      </a:r>
+                      <a:endParaRPr lang="en-US" sz="900" dirty="0"/>
+                    </a:p>
+                  </a:txBody>
+                  <a:tcPr anchor="ctr">
+                    <a:lnL w="9525" cap="flat" cmpd="sng" algn="ctr">
+                      <a:solidFill>
+                        <a:srgbClr val="D9DEE4"/>
+                      </a:solidFill>
+                      <a:prstDash val="solid"/>
+                      <a:round/>
+                      <a:headEnd type="none" w="med" len="med"/>
+                      <a:tailEnd type="none" w="med" len="med"/>
+                    </a:lnL>
+                    <a:lnR w="9525" cap="flat" cmpd="sng" algn="ctr">
+                      <a:solidFill>
+                        <a:srgbClr val="D9DEE4"/>
+                      </a:solidFill>
+                      <a:prstDash val="solid"/>
+                      <a:round/>
+                      <a:headEnd type="none" w="med" len="med"/>
+                      <a:tailEnd type="none" w="med" len="med"/>
+                    </a:lnR>
+                    <a:lnT w="9525" cap="flat" cmpd="sng" algn="ctr">
+                      <a:solidFill>
+                        <a:srgbClr val="D9DEE4"/>
+                      </a:solidFill>
+                      <a:prstDash val="solid"/>
+                      <a:round/>
+                      <a:headEnd type="none" w="med" len="med"/>
+                      <a:tailEnd type="none" w="med" len="med"/>
+                    </a:lnT>
+                    <a:lnB w="9525" cap="flat" cmpd="sng" algn="ctr">
+                      <a:solidFill>
+                        <a:srgbClr val="D9DEE4"/>
+                      </a:solidFill>
+                      <a:prstDash val="solid"/>
+                      <a:round/>
+                      <a:headEnd type="none" w="med" len="med"/>
+                      <a:tailEnd type="none" w="med" len="med"/>
+                    </a:lnB>
+                    <a:solidFill>
+                      <a:srgbClr val="F4F6F8"/>
+                    </a:solidFill>
+                  </a:tcPr>
+                </a:tc>
+                <a:extLst>
+                  <a:ext uri="{0D108BD9-81ED-4DB2-BD59-A6C34878D82A}">
+                    <a16:rowId xmlns:a16="http://schemas.microsoft.com/office/drawing/2014/main" val="10002"/>
+                  </a:ext>
+                </a:extLst>
+              </a:tr>
+              <a:tr h="354330">
+                <a:tc>
+                  <a:txBody>
+                    <a:bodyPr/>
+                    <a:lstStyle/>
+                    <a:p>
+                      <a:pPr marL="0" indent="0" algn="l">
+                        <a:buNone/>
+                      </a:pPr>
+                      <a:r>
+                        <a:rPr lang="en-US" sz="900" b="1" dirty="0">
+                          <a:solidFill>
+                            <a:srgbClr val="1B2A4A"/>
+                          </a:solidFill>
+                        </a:rPr>
+                        <a:t>Total</a:t>
+                      </a:r>
+                      <a:endParaRPr lang="en-US" sz="900" dirty="0"/>
+                    </a:p>
+                  </a:txBody>
+                  <a:tcPr anchor="ctr">
+                    <a:lnL w="9525" cap="flat" cmpd="sng" algn="ctr">
+                      <a:solidFill>
+                        <a:srgbClr val="D9DEE4"/>
+                      </a:solidFill>
+                      <a:prstDash val="solid"/>
+                      <a:round/>
+                      <a:headEnd type="none" w="med" len="med"/>
+                      <a:tailEnd type="none" w="med" len="med"/>
+                    </a:lnL>
+                    <a:lnR w="9525" cap="flat" cmpd="sng" algn="ctr">
+                      <a:solidFill>
+                        <a:srgbClr val="D9DEE4"/>
+                      </a:solidFill>
+                      <a:prstDash val="solid"/>
+                      <a:round/>
+                      <a:headEnd type="none" w="med" len="med"/>
+                      <a:tailEnd type="none" w="med" len="med"/>
+                    </a:lnR>
+                    <a:lnT w="9525" cap="flat" cmpd="sng" algn="ctr">
+                      <a:solidFill>
+                        <a:srgbClr val="D9DEE4"/>
+                      </a:solidFill>
+                      <a:prstDash val="solid"/>
+                      <a:round/>
+                      <a:headEnd type="none" w="med" len="med"/>
+                      <a:tailEnd type="none" w="med" len="med"/>
+                    </a:lnT>
+                    <a:lnB w="9525" cap="flat" cmpd="sng" algn="ctr">
+                      <a:solidFill>
+                        <a:srgbClr val="D9DEE4"/>
+                      </a:solidFill>
+                      <a:prstDash val="solid"/>
+                      <a:round/>
+                      <a:headEnd type="none" w="med" len="med"/>
+                      <a:tailEnd type="none" w="med" len="med"/>
+                    </a:lnB>
+                    <a:solidFill>
+                      <a:srgbClr val="E6F1F1"/>
+                    </a:solidFill>
+                  </a:tcPr>
+                </a:tc>
+                <a:tc>
+                  <a:txBody>
+                    <a:bodyPr/>
+                    <a:lstStyle/>
+                    <a:p>
+                      <a:pPr marL="0" indent="0" algn="ctr">
+                        <a:buNone/>
+                      </a:pPr>
+                      <a:r>
+                        <a:rPr lang="en-US" sz="900" b="1" dirty="0">
+                          <a:solidFill>
+                            <a:srgbClr val="1B2A4A"/>
+                          </a:solidFill>
+                        </a:rPr>
+                        <a:t>17.04m</a:t>
+                      </a:r>
+                      <a:endParaRPr lang="en-US" sz="900" dirty="0"/>
+                    </a:p>
+                  </a:txBody>
+                  <a:tcPr anchor="ctr">
+                    <a:lnL w="9525" cap="flat" cmpd="sng" algn="ctr">
+                      <a:solidFill>
+                        <a:srgbClr val="D9DEE4"/>
+                      </a:solidFill>
+                      <a:prstDash val="solid"/>
+                      <a:round/>
+                      <a:headEnd type="none" w="med" len="med"/>
+                      <a:tailEnd type="none" w="med" len="med"/>
+                    </a:lnL>
+                    <a:lnR w="9525" cap="flat" cmpd="sng" algn="ctr">
+                      <a:solidFill>
+                        <a:srgbClr val="D9DEE4"/>
+                      </a:solidFill>
+                      <a:prstDash val="solid"/>
+                      <a:round/>
+                      <a:headEnd type="none" w="med" len="med"/>
+                      <a:tailEnd type="none" w="med" len="med"/>
+                    </a:lnR>
+                    <a:lnT w="9525" cap="flat" cmpd="sng" algn="ctr">
+                      <a:solidFill>
+                        <a:srgbClr val="D9DEE4"/>
+                      </a:solidFill>
+                      <a:prstDash val="solid"/>
+                      <a:round/>
+                      <a:headEnd type="none" w="med" len="med"/>
+                      <a:tailEnd type="none" w="med" len="med"/>
+                    </a:lnT>
+                    <a:lnB w="9525" cap="flat" cmpd="sng" algn="ctr">
+                      <a:solidFill>
+                        <a:srgbClr val="D9DEE4"/>
+                      </a:solidFill>
+                      <a:prstDash val="solid"/>
+                      <a:round/>
+                      <a:headEnd type="none" w="med" len="med"/>
+                      <a:tailEnd type="none" w="med" len="med"/>
+                    </a:lnB>
+                    <a:solidFill>
+                      <a:srgbClr val="E6F1F1"/>
+                    </a:solidFill>
+                  </a:tcPr>
+                </a:tc>
+                <a:tc>
+                  <a:txBody>
+                    <a:bodyPr/>
+                    <a:lstStyle/>
+                    <a:p>
+                      <a:pPr marL="0" indent="0" algn="ctr">
+                        <a:buNone/>
+                      </a:pPr>
+                      <a:r>
+                        <a:rPr lang="en-US" sz="900" b="1" dirty="0">
+                          <a:solidFill>
+                            <a:srgbClr val="1B2A4A"/>
+                          </a:solidFill>
+                        </a:rPr>
+                        <a:t>9.55m</a:t>
+                      </a:r>
+                      <a:endParaRPr lang="en-US" sz="900" dirty="0"/>
+                    </a:p>
+                  </a:txBody>
+                  <a:tcPr anchor="ctr">
+                    <a:lnL w="9525" cap="flat" cmpd="sng" algn="ctr">
+                      <a:solidFill>
+                        <a:srgbClr val="D9DEE4"/>
+                      </a:solidFill>
+                      <a:prstDash val="solid"/>
+                      <a:round/>
+                      <a:headEnd type="none" w="med" len="med"/>
+                      <a:tailEnd type="none" w="med" len="med"/>
+                    </a:lnL>
+                    <a:lnR w="9525" cap="flat" cmpd="sng" algn="ctr">
+                      <a:solidFill>
+                        <a:srgbClr val="D9DEE4"/>
+                      </a:solidFill>
+                      <a:prstDash val="solid"/>
+                      <a:round/>
+                      <a:headEnd type="none" w="med" len="med"/>
+                      <a:tailEnd type="none" w="med" len="med"/>
+                    </a:lnR>
+                    <a:lnT w="9525" cap="flat" cmpd="sng" algn="ctr">
+                      <a:solidFill>
+                        <a:srgbClr val="D9DEE4"/>
+                      </a:solidFill>
+                      <a:prstDash val="solid"/>
+                      <a:round/>
+                      <a:headEnd type="none" w="med" len="med"/>
+                      <a:tailEnd type="none" w="med" len="med"/>
+                    </a:lnT>
+                    <a:lnB w="9525" cap="flat" cmpd="sng" algn="ctr">
+                      <a:solidFill>
+                        <a:srgbClr val="D9DEE4"/>
+                      </a:solidFill>
+                      <a:prstDash val="solid"/>
+                      <a:round/>
+                      <a:headEnd type="none" w="med" len="med"/>
+                      <a:tailEnd type="none" w="med" len="med"/>
+                    </a:lnB>
+                    <a:solidFill>
+                      <a:srgbClr val="E6F1F1"/>
+                    </a:solidFill>
+                  </a:tcPr>
+                </a:tc>
+                <a:tc>
+                  <a:txBody>
+                    <a:bodyPr/>
+                    <a:lstStyle/>
+                    <a:p>
+                      <a:pPr marL="0" indent="0" algn="ctr">
+                        <a:buNone/>
+                      </a:pPr>
+                      <a:r>
+                        <a:rPr lang="en-US" sz="900" b="1" dirty="0">
+                          <a:solidFill>
+                            <a:srgbClr val="1B2A4A"/>
+                          </a:solidFill>
+                        </a:rPr>
+                        <a:t>14.38m</a:t>
+                      </a:r>
+                      <a:endParaRPr lang="en-US" sz="900" dirty="0"/>
+                    </a:p>
+                  </a:txBody>
+                  <a:tcPr anchor="ctr">
+                    <a:lnL w="9525" cap="flat" cmpd="sng" algn="ctr">
+                      <a:solidFill>
+                        <a:srgbClr val="D9DEE4"/>
+                      </a:solidFill>
+                      <a:prstDash val="solid"/>
+                      <a:round/>
+                      <a:headEnd type="none" w="med" len="med"/>
+                      <a:tailEnd type="none" w="med" len="med"/>
+                    </a:lnL>
+                    <a:lnR w="9525" cap="flat" cmpd="sng" algn="ctr">
+                      <a:solidFill>
+                        <a:srgbClr val="D9DEE4"/>
+                      </a:solidFill>
+                      <a:prstDash val="solid"/>
+                      <a:round/>
+                      <a:headEnd type="none" w="med" len="med"/>
+                      <a:tailEnd type="none" w="med" len="med"/>
+                    </a:lnR>
+                    <a:lnT w="9525" cap="flat" cmpd="sng" algn="ctr">
+                      <a:solidFill>
+                        <a:srgbClr val="D9DEE4"/>
+                      </a:solidFill>
+                      <a:prstDash val="solid"/>
+                      <a:round/>
+                      <a:headEnd type="none" w="med" len="med"/>
+                      <a:tailEnd type="none" w="med" len="med"/>
+                    </a:lnT>
+                    <a:lnB w="9525" cap="flat" cmpd="sng" algn="ctr">
+                      <a:solidFill>
+                        <a:srgbClr val="D9DEE4"/>
+                      </a:solidFill>
+                      <a:prstDash val="solid"/>
+                      <a:round/>
+                      <a:headEnd type="none" w="med" len="med"/>
+                      <a:tailEnd type="none" w="med" len="med"/>
+                    </a:lnB>
+                    <a:solidFill>
+                      <a:srgbClr val="E6F1F1"/>
+                    </a:solidFill>
+                  </a:tcPr>
+                </a:tc>
+                <a:tc>
+                  <a:txBody>
+                    <a:bodyPr/>
+                    <a:lstStyle/>
+                    <a:p>
+                      <a:pPr marL="0" indent="0" algn="ctr">
+                        <a:buNone/>
+                      </a:pPr>
+                      <a:r>
+                        <a:rPr lang="en-US" sz="900" b="1" dirty="0">
+                          <a:solidFill>
+                            <a:srgbClr val="1B2A4A"/>
+                          </a:solidFill>
+                        </a:rPr>
+                        <a:t>10.41m</a:t>
+                      </a:r>
+                      <a:endParaRPr lang="en-US" sz="900" dirty="0"/>
+                    </a:p>
+                  </a:txBody>
+                  <a:tcPr anchor="ctr">
+                    <a:lnL w="9525" cap="flat" cmpd="sng" algn="ctr">
+                      <a:solidFill>
+                        <a:srgbClr val="D9DEE4"/>
+                      </a:solidFill>
+                      <a:prstDash val="solid"/>
+                      <a:round/>
+                      <a:headEnd type="none" w="med" len="med"/>
+                      <a:tailEnd type="none" w="med" len="med"/>
+                    </a:lnL>
+                    <a:lnR w="9525" cap="flat" cmpd="sng" algn="ctr">
+                      <a:solidFill>
+                        <a:srgbClr val="D9DEE4"/>
+                      </a:solidFill>
+                      <a:prstDash val="solid"/>
+                      <a:round/>
+                      <a:headEnd type="none" w="med" len="med"/>
+                      <a:tailEnd type="none" w="med" len="med"/>
+                    </a:lnR>
+                    <a:lnT w="9525" cap="flat" cmpd="sng" algn="ctr">
+                      <a:solidFill>
+                        <a:srgbClr val="D9DEE4"/>
+                      </a:solidFill>
+                      <a:prstDash val="solid"/>
+                      <a:round/>
+                      <a:headEnd type="none" w="med" len="med"/>
+                      <a:tailEnd type="none" w="med" len="med"/>
+                    </a:lnT>
+                    <a:lnB w="9525" cap="flat" cmpd="sng" algn="ctr">
+                      <a:solidFill>
+                        <a:srgbClr val="D9DEE4"/>
+                      </a:solidFill>
+                      <a:prstDash val="solid"/>
+                      <a:round/>
+                      <a:headEnd type="none" w="med" len="med"/>
+                      <a:tailEnd type="none" w="med" len="med"/>
+                    </a:lnB>
+                    <a:solidFill>
+                      <a:srgbClr val="E6F1F1"/>
+                    </a:solidFill>
+                  </a:tcPr>
+                </a:tc>
+                <a:tc>
+                  <a:txBody>
+                    <a:bodyPr/>
+                    <a:lstStyle/>
+                    <a:p>
+                      <a:pPr marL="0" indent="0" algn="ctr">
+                        <a:buNone/>
+                      </a:pPr>
+                      <a:r>
+                        <a:rPr lang="en-US" sz="900" b="1" dirty="0">
+                          <a:solidFill>
+                            <a:srgbClr val="1B2A4A"/>
+                          </a:solidFill>
+                        </a:rPr>
+                        <a:t>0.23m</a:t>
+                      </a:r>
+                      <a:endParaRPr lang="en-US" sz="900" dirty="0"/>
+                    </a:p>
+                  </a:txBody>
+                  <a:tcPr anchor="ctr">
+                    <a:lnL w="9525" cap="flat" cmpd="sng" algn="ctr">
+                      <a:solidFill>
+                        <a:srgbClr val="D9DEE4"/>
+                      </a:solidFill>
+                      <a:prstDash val="solid"/>
+                      <a:round/>
+                      <a:headEnd type="none" w="med" len="med"/>
+                      <a:tailEnd type="none" w="med" len="med"/>
+                    </a:lnL>
+                    <a:lnR w="9525" cap="flat" cmpd="sng" algn="ctr">
+                      <a:solidFill>
+                        <a:srgbClr val="D9DEE4"/>
+                      </a:solidFill>
+                      <a:prstDash val="solid"/>
+                      <a:round/>
+                      <a:headEnd type="none" w="med" len="med"/>
+                      <a:tailEnd type="none" w="med" len="med"/>
+                    </a:lnR>
+                    <a:lnT w="9525" cap="flat" cmpd="sng" algn="ctr">
+                      <a:solidFill>
+                        <a:srgbClr val="D9DEE4"/>
+                      </a:solidFill>
+                      <a:prstDash val="solid"/>
+                      <a:round/>
+                      <a:headEnd type="none" w="med" len="med"/>
+                      <a:tailEnd type="none" w="med" len="med"/>
+                    </a:lnT>
+                    <a:lnB w="9525" cap="flat" cmpd="sng" algn="ctr">
+                      <a:solidFill>
+                        <a:srgbClr val="D9DEE4"/>
+                      </a:solidFill>
+                      <a:prstDash val="solid"/>
+                      <a:round/>
+                      <a:headEnd type="none" w="med" len="med"/>
+                      <a:tailEnd type="none" w="med" len="med"/>
+                    </a:lnB>
+                    <a:solidFill>
+                      <a:srgbClr val="E6F1F1"/>
+                    </a:solidFill>
+                  </a:tcPr>
+                </a:tc>
+                <a:tc>
+                  <a:txBody>
+                    <a:bodyPr/>
+                    <a:lstStyle/>
+                    <a:p>
+                      <a:pPr marL="0" indent="0" algn="ctr">
+                        <a:buNone/>
+                      </a:pPr>
+                      <a:r>
+                        <a:rPr lang="en-US" sz="900" b="1" dirty="0">
+                          <a:solidFill>
+                            <a:srgbClr val="1B2A4A"/>
+                          </a:solidFill>
+                        </a:rPr>
+                        <a:t>0.28m</a:t>
+                      </a:r>
+                      <a:endParaRPr lang="en-US" sz="900" dirty="0"/>
+                    </a:p>
+                  </a:txBody>
+                  <a:tcPr anchor="ctr">
+                    <a:lnL w="9525" cap="flat" cmpd="sng" algn="ctr">
+                      <a:solidFill>
+                        <a:srgbClr val="D9DEE4"/>
+                      </a:solidFill>
+                      <a:prstDash val="solid"/>
+                      <a:round/>
+                      <a:headEnd type="none" w="med" len="med"/>
+                      <a:tailEnd type="none" w="med" len="med"/>
+                    </a:lnL>
+                    <a:lnR w="9525" cap="flat" cmpd="sng" algn="ctr">
+                      <a:solidFill>
+                        <a:srgbClr val="D9DEE4"/>
+                      </a:solidFill>
+                      <a:prstDash val="solid"/>
+                      <a:round/>
+                      <a:headEnd type="none" w="med" len="med"/>
+                      <a:tailEnd type="none" w="med" len="med"/>
+                    </a:lnR>
+                    <a:lnT w="9525" cap="flat" cmpd="sng" algn="ctr">
+                      <a:solidFill>
+                        <a:srgbClr val="D9DEE4"/>
+                      </a:solidFill>
+                      <a:prstDash val="solid"/>
+                      <a:round/>
+                      <a:headEnd type="none" w="med" len="med"/>
+                      <a:tailEnd type="none" w="med" len="med"/>
+                    </a:lnT>
+                    <a:lnB w="9525" cap="flat" cmpd="sng" algn="ctr">
+                      <a:solidFill>
+                        <a:srgbClr val="D9DEE4"/>
+                      </a:solidFill>
+                      <a:prstDash val="solid"/>
+                      <a:round/>
+                      <a:headEnd type="none" w="med" len="med"/>
+                      <a:tailEnd type="none" w="med" len="med"/>
+                    </a:lnB>
+                    <a:solidFill>
+                      <a:srgbClr val="E6F1F1"/>
+                    </a:solidFill>
+                  </a:tcPr>
+                </a:tc>
+                <a:tc>
+                  <a:txBody>
+                    <a:bodyPr/>
+                    <a:lstStyle/>
+                    <a:p>
+                      <a:pPr marL="0" indent="0" algn="ctr">
+                        <a:buNone/>
+                      </a:pPr>
+                      <a:r>
+                        <a:rPr lang="en-US" sz="900" b="1" dirty="0">
+                          <a:solidFill>
+                            <a:srgbClr val="1B2A4A"/>
+                          </a:solidFill>
+                        </a:rPr>
+                        <a:t>3.45m</a:t>
+                      </a:r>
+                      <a:endParaRPr lang="en-US" sz="900" dirty="0"/>
+                    </a:p>
+                  </a:txBody>
+                  <a:tcPr anchor="ctr">
+                    <a:lnL w="9525" cap="flat" cmpd="sng" algn="ctr">
+                      <a:solidFill>
+                        <a:srgbClr val="D9DEE4"/>
+                      </a:solidFill>
+                      <a:prstDash val="solid"/>
+                      <a:round/>
+                      <a:headEnd type="none" w="med" len="med"/>
+                      <a:tailEnd type="none" w="med" len="med"/>
+                    </a:lnL>
+                    <a:lnR w="9525" cap="flat" cmpd="sng" algn="ctr">
+                      <a:solidFill>
+                        <a:srgbClr val="D9DEE4"/>
+                      </a:solidFill>
+                      <a:prstDash val="solid"/>
+                      <a:round/>
+                      <a:headEnd type="none" w="med" len="med"/>
+                      <a:tailEnd type="none" w="med" len="med"/>
+                    </a:lnR>
+                    <a:lnT w="9525" cap="flat" cmpd="sng" algn="ctr">
+                      <a:solidFill>
+                        <a:srgbClr val="D9DEE4"/>
+                      </a:solidFill>
+                      <a:prstDash val="solid"/>
+                      <a:round/>
+                      <a:headEnd type="none" w="med" len="med"/>
+                      <a:tailEnd type="none" w="med" len="med"/>
+                    </a:lnT>
+                    <a:lnB w="9525" cap="flat" cmpd="sng" algn="ctr">
+                      <a:solidFill>
+                        <a:srgbClr val="D9DEE4"/>
+                      </a:solidFill>
+                      <a:prstDash val="solid"/>
+                      <a:round/>
+                      <a:headEnd type="none" w="med" len="med"/>
+                      <a:tailEnd type="none" w="med" len="med"/>
+                    </a:lnB>
+                    <a:solidFill>
+                      <a:srgbClr val="E6F1F1"/>
+                    </a:solidFill>
+                  </a:tcPr>
+                </a:tc>
+                <a:tc>
+                  <a:txBody>
+                    <a:bodyPr/>
+                    <a:lstStyle/>
+                    <a:p>
+                      <a:pPr marL="0" indent="0" algn="ctr">
+                        <a:buNone/>
+                      </a:pPr>
+                      <a:r>
+                        <a:rPr lang="en-US" sz="900" b="1" dirty="0">
+                          <a:solidFill>
+                            <a:srgbClr val="1B2A4A"/>
+                          </a:solidFill>
+                        </a:rPr>
+                        <a:t>3.73m</a:t>
+                      </a:r>
+                      <a:endParaRPr lang="en-US" sz="900" dirty="0"/>
+                    </a:p>
+                  </a:txBody>
+                  <a:tcPr anchor="ctr">
+                    <a:lnL w="9525" cap="flat" cmpd="sng" algn="ctr">
+                      <a:solidFill>
+                        <a:srgbClr val="D9DEE4"/>
+                      </a:solidFill>
+                      <a:prstDash val="solid"/>
+                      <a:round/>
+                      <a:headEnd type="none" w="med" len="med"/>
+                      <a:tailEnd type="none" w="med" len="med"/>
+                    </a:lnL>
+                    <a:lnR w="9525" cap="flat" cmpd="sng" algn="ctr">
+                      <a:solidFill>
+                        <a:srgbClr val="D9DEE4"/>
+                      </a:solidFill>
+                      <a:prstDash val="solid"/>
+                      <a:round/>
+                      <a:headEnd type="none" w="med" len="med"/>
+                      <a:tailEnd type="none" w="med" len="med"/>
+                    </a:lnR>
+                    <a:lnT w="9525" cap="flat" cmpd="sng" algn="ctr">
+                      <a:solidFill>
+                        <a:srgbClr val="D9DEE4"/>
+                      </a:solidFill>
+                      <a:prstDash val="solid"/>
+                      <a:round/>
+                      <a:headEnd type="none" w="med" len="med"/>
+                      <a:tailEnd type="none" w="med" len="med"/>
+                    </a:lnT>
+                    <a:lnB w="9525" cap="flat" cmpd="sng" algn="ctr">
+                      <a:solidFill>
+                        <a:srgbClr val="D9DEE4"/>
+                      </a:solidFill>
+                      <a:prstDash val="solid"/>
+                      <a:round/>
+                      <a:headEnd type="none" w="med" len="med"/>
+                      <a:tailEnd type="none" w="med" len="med"/>
+                    </a:lnB>
+                    <a:solidFill>
+                      <a:srgbClr val="E6F1F1"/>
+                    </a:solidFill>
+                  </a:tcPr>
+                </a:tc>
+                <a:tc>
+                  <a:txBody>
+                    <a:bodyPr/>
+                    <a:lstStyle/>
+                    <a:p>
+                      <a:pPr marL="0" indent="0" algn="ctr">
+                        <a:buNone/>
+                      </a:pPr>
+                      <a:r>
+                        <a:rPr lang="en-US" sz="900" b="1" dirty="0">
+                          <a:solidFill>
+                            <a:srgbClr val="1B2A4A"/>
+                          </a:solidFill>
+                        </a:rPr>
+                        <a:t>56%</a:t>
+                      </a:r>
+                      <a:endParaRPr lang="en-US" sz="900" dirty="0"/>
+                    </a:p>
+                  </a:txBody>
+                  <a:tcPr anchor="ctr">
+                    <a:lnL w="9525" cap="flat" cmpd="sng" algn="ctr">
+                      <a:solidFill>
+                        <a:srgbClr val="D9DEE4"/>
+                      </a:solidFill>
+                      <a:prstDash val="solid"/>
+                      <a:round/>
+                      <a:headEnd type="none" w="med" len="med"/>
+                      <a:tailEnd type="none" w="med" len="med"/>
+                    </a:lnL>
+                    <a:lnR w="9525" cap="flat" cmpd="sng" algn="ctr">
+                      <a:solidFill>
+                        <a:srgbClr val="D9DEE4"/>
+                      </a:solidFill>
+                      <a:prstDash val="solid"/>
+                      <a:round/>
+                      <a:headEnd type="none" w="med" len="med"/>
+                      <a:tailEnd type="none" w="med" len="med"/>
+                    </a:lnR>
+                    <a:lnT w="9525" cap="flat" cmpd="sng" algn="ctr">
+                      <a:solidFill>
+                        <a:srgbClr val="D9DEE4"/>
+                      </a:solidFill>
+                      <a:prstDash val="solid"/>
+                      <a:round/>
+                      <a:headEnd type="none" w="med" len="med"/>
+                      <a:tailEnd type="none" w="med" len="med"/>
+                    </a:lnT>
+                    <a:lnB w="9525" cap="flat" cmpd="sng" algn="ctr">
+                      <a:solidFill>
+                        <a:srgbClr val="D9DEE4"/>
+                      </a:solidFill>
+                      <a:prstDash val="solid"/>
+                      <a:round/>
+                      <a:headEnd type="none" w="med" len="med"/>
+                      <a:tailEnd type="none" w="med" len="med"/>
+                    </a:lnB>
+                    <a:solidFill>
+                      <a:srgbClr val="E6F1F1"/>
+                    </a:solidFill>
+                  </a:tcPr>
+                </a:tc>
+                <a:tc>
+                  <a:txBody>
+                    <a:bodyPr/>
+                    <a:lstStyle/>
+                    <a:p>
+                      <a:pPr marL="0" indent="0" algn="ctr">
+                        <a:buNone/>
+                      </a:pPr>
+                      <a:r>
+                        <a:rPr lang="en-US" sz="900" b="1" dirty="0">
+                          <a:solidFill>
+                            <a:srgbClr val="1B2A4A"/>
+                          </a:solidFill>
+                        </a:rPr>
+                        <a:t>26%</a:t>
+                      </a:r>
+                      <a:endParaRPr lang="en-US" sz="900" dirty="0"/>
+                    </a:p>
+                  </a:txBody>
+                  <a:tcPr anchor="ctr">
+                    <a:lnL w="9525" cap="flat" cmpd="sng" algn="ctr">
+                      <a:solidFill>
+                        <a:srgbClr val="D9DEE4"/>
+                      </a:solidFill>
+                      <a:prstDash val="solid"/>
+                      <a:round/>
+                      <a:headEnd type="none" w="med" len="med"/>
+                      <a:tailEnd type="none" w="med" len="med"/>
+                    </a:lnL>
+                    <a:lnR w="9525" cap="flat" cmpd="sng" algn="ctr">
+                      <a:solidFill>
+                        <a:srgbClr val="D9DEE4"/>
+                      </a:solidFill>
+                      <a:prstDash val="solid"/>
+                      <a:round/>
+                      <a:headEnd type="none" w="med" len="med"/>
+                      <a:tailEnd type="none" w="med" len="med"/>
+                    </a:lnR>
+                    <a:lnT w="9525" cap="flat" cmpd="sng" algn="ctr">
+                      <a:solidFill>
+                        <a:srgbClr val="D9DEE4"/>
+                      </a:solidFill>
+                      <a:prstDash val="solid"/>
+                      <a:round/>
+                      <a:headEnd type="none" w="med" len="med"/>
+                      <a:tailEnd type="none" w="med" len="med"/>
+                    </a:lnT>
+                    <a:lnB w="9525" cap="flat" cmpd="sng" algn="ctr">
+                      <a:solidFill>
+                        <a:srgbClr val="D9DEE4"/>
+                      </a:solidFill>
+                      <a:prstDash val="solid"/>
+                      <a:round/>
+                      <a:headEnd type="none" w="med" len="med"/>
+                      <a:tailEnd type="none" w="med" len="med"/>
+                    </a:lnB>
+                    <a:solidFill>
+                      <a:srgbClr val="E6F1F1"/>
+                    </a:solidFill>
+                  </a:tcPr>
+                </a:tc>
+                <a:extLst>
+                  <a:ext uri="{0D108BD9-81ED-4DB2-BD59-A6C34878D82A}">
+                    <a16:rowId xmlns:a16="http://schemas.microsoft.com/office/drawing/2014/main" val="10003"/>
+                  </a:ext>
+                </a:extLst>
+              </a:tr>
+            </a:tbl>
+          </a:graphicData>
+        </a:graphic>
+      </p:graphicFrame>
+      <p:sp>
+        <p:nvSpPr>
+          <p:cNvPr id="7" name="Shape 4"/>
+          <p:cNvSpPr/>
+          <p:nvPr/>
+        </p:nvSpPr>
+        <p:spPr>
+          <a:xfrm>
+            <a:off x="457200" y="3672564"/>
+            <a:ext cx="11274552" cy="457200"/>
+          </a:xfrm>
+          <a:prstGeom prst="rect">
+            <a:avLst/>
+          </a:prstGeom>
+          <a:solidFill>
+            <a:srgbClr val="F4F6F8"/>
+          </a:solidFill>
+          <a:ln/>
+        </p:spPr>
+        <p:txBody>
+          <a:bodyPr/>
+          <a:lstStyle/>
+          <a:p>
+            <a:endParaRPr lang="en-AE"/>
+          </a:p>
+        </p:txBody>
+      </p:sp>
+      <p:sp>
+        <p:nvSpPr>
+          <p:cNvPr id="8" name="Text 5"/>
+          <p:cNvSpPr/>
+          <p:nvPr/>
+        </p:nvSpPr>
+        <p:spPr>
+          <a:xfrm>
+            <a:off x="640080" y="3672564"/>
+            <a:ext cx="10908792" cy="457200"/>
+          </a:xfrm>
+          <a:prstGeom prst="rect">
+            <a:avLst/>
+          </a:prstGeom>
+          <a:noFill/>
+          <a:ln/>
+        </p:spPr>
+        <p:txBody>
+          <a:bodyPr wrap="square" rtlCol="0" anchor="ctr"/>
+          <a:lstStyle/>
+          <a:p>
+            <a:pPr marL="0" indent="0">
+              <a:buNone/>
+            </a:pPr>
+            <a:r>
+              <a:rPr lang="en-US" sz="1150" b="1" dirty="0">
+                <a:solidFill>
+                  <a:srgbClr val="0F6E6E"/>
+                </a:solidFill>
+                <a:latin typeface="Calibri" pitchFamily="34" charset="0"/>
+                <a:ea typeface="Calibri" pitchFamily="34" charset="-122"/>
+                <a:cs typeface="Calibri" pitchFamily="34" charset="-120"/>
+              </a:rPr>
+              <a:t>Second:  </a:t>
+            </a:r>
+            <a:r>
+              <a:rPr lang="en-US" sz="1150" dirty="0">
+                <a:solidFill>
+                  <a:srgbClr val="1F2933"/>
+                </a:solidFill>
+                <a:latin typeface="Calibri" pitchFamily="34" charset="0"/>
+                <a:ea typeface="Calibri" pitchFamily="34" charset="-122"/>
+                <a:cs typeface="Calibri" pitchFamily="34" charset="-120"/>
+              </a:rPr>
+              <a:t>Receivables due from external parties are reported separately from amounts due from subsidiaries, the holding company, and the Engineering Office</a:t>
+            </a:r>
+            <a:endParaRPr lang="en-US" sz="1150" dirty="0"/>
+          </a:p>
+        </p:txBody>
+      </p:sp>
+      <p:sp>
+        <p:nvSpPr>
+          <p:cNvPr id="9" name="Text 6"/>
+          <p:cNvSpPr/>
+          <p:nvPr/>
+        </p:nvSpPr>
+        <p:spPr>
+          <a:xfrm>
+            <a:off x="457200" y="4152208"/>
+            <a:ext cx="11274552" cy="320040"/>
+          </a:xfrm>
+          <a:prstGeom prst="rect">
+            <a:avLst/>
+          </a:prstGeom>
+          <a:noFill/>
+          <a:ln/>
+        </p:spPr>
+        <p:txBody>
+          <a:bodyPr wrap="square" rtlCol="0" anchor="ctr"/>
+          <a:lstStyle/>
+          <a:p>
+            <a:pPr marL="0" indent="0">
+              <a:buNone/>
+            </a:pPr>
+            <a:r>
+              <a:rPr lang="en-US" sz="1250" b="1" dirty="0">
+                <a:solidFill>
+                  <a:srgbClr val="0F6E6E"/>
+                </a:solidFill>
+                <a:latin typeface="Calibri" pitchFamily="34" charset="0"/>
+                <a:ea typeface="Calibri" pitchFamily="34" charset="-122"/>
+                <a:cs typeface="Calibri" pitchFamily="34" charset="-120"/>
+              </a:rPr>
+              <a:t>Third:  </a:t>
+            </a:r>
+            <a:r>
+              <a:rPr lang="en-US" sz="1250" dirty="0">
+                <a:solidFill>
+                  <a:srgbClr val="1F2933"/>
+                </a:solidFill>
+                <a:latin typeface="Calibri" pitchFamily="34" charset="0"/>
+                <a:ea typeface="Calibri" pitchFamily="34" charset="-122"/>
+                <a:cs typeface="Calibri" pitchFamily="34" charset="-120"/>
+              </a:rPr>
+              <a:t>Measuring Company Performance — Three KPIs are set for each company</a:t>
+            </a:r>
+            <a:endParaRPr lang="en-US" sz="1250" dirty="0"/>
+          </a:p>
+        </p:txBody>
+      </p:sp>
+      <p:sp>
+        <p:nvSpPr>
+          <p:cNvPr id="10" name="Shape 7"/>
+          <p:cNvSpPr/>
+          <p:nvPr/>
+        </p:nvSpPr>
+        <p:spPr>
+          <a:xfrm>
+            <a:off x="457200" y="4517968"/>
+            <a:ext cx="3605784" cy="1417320"/>
+          </a:xfrm>
+          <a:prstGeom prst="rect">
+            <a:avLst/>
+          </a:prstGeom>
+          <a:solidFill>
+            <a:srgbClr val="E6F1F1"/>
+          </a:solidFill>
+          <a:ln w="9525">
+            <a:solidFill>
+              <a:srgbClr val="D9DEE4"/>
+            </a:solidFill>
+            <a:prstDash val="solid"/>
+          </a:ln>
+        </p:spPr>
+        <p:txBody>
+          <a:bodyPr/>
+          <a:lstStyle/>
+          <a:p>
+            <a:endParaRPr lang="en-AE"/>
+          </a:p>
+        </p:txBody>
+      </p:sp>
+      <p:sp>
+        <p:nvSpPr>
+          <p:cNvPr id="11" name="Text 8"/>
+          <p:cNvSpPr/>
+          <p:nvPr/>
+        </p:nvSpPr>
+        <p:spPr>
+          <a:xfrm>
+            <a:off x="594360" y="4645984"/>
+            <a:ext cx="3331464" cy="292608"/>
+          </a:xfrm>
+          <a:prstGeom prst="rect">
+            <a:avLst/>
+          </a:prstGeom>
+          <a:noFill/>
+          <a:ln/>
+        </p:spPr>
+        <p:txBody>
+          <a:bodyPr wrap="square" rtlCol="0" anchor="ctr"/>
+          <a:lstStyle/>
+          <a:p>
+            <a:pPr marL="0" indent="0">
+              <a:buNone/>
+            </a:pPr>
+            <a:r>
+              <a:rPr lang="en-US" sz="1250" b="1" dirty="0">
+                <a:solidFill>
+                  <a:srgbClr val="1B2A4A"/>
+                </a:solidFill>
+                <a:latin typeface="Calibri" pitchFamily="34" charset="0"/>
+                <a:ea typeface="Calibri" pitchFamily="34" charset="-122"/>
+                <a:cs typeface="Calibri" pitchFamily="34" charset="-120"/>
+              </a:rPr>
+              <a:t>Collection Rate</a:t>
+            </a:r>
+            <a:endParaRPr lang="en-US" sz="1250" dirty="0"/>
+          </a:p>
+        </p:txBody>
+      </p:sp>
+      <p:sp>
+        <p:nvSpPr>
+          <p:cNvPr id="12" name="Text 9"/>
+          <p:cNvSpPr/>
+          <p:nvPr/>
+        </p:nvSpPr>
+        <p:spPr>
+          <a:xfrm>
+            <a:off x="594360" y="4975168"/>
+            <a:ext cx="3331464" cy="594360"/>
+          </a:xfrm>
+          <a:prstGeom prst="rect">
+            <a:avLst/>
+          </a:prstGeom>
+          <a:noFill/>
+          <a:ln/>
+        </p:spPr>
+        <p:txBody>
+          <a:bodyPr wrap="square" rtlCol="0" anchor="ctr"/>
+          <a:lstStyle/>
+          <a:p>
+            <a:pPr marL="0" indent="0">
+              <a:lnSpc>
+                <a:spcPct val="120000"/>
+              </a:lnSpc>
+              <a:buNone/>
+            </a:pPr>
+            <a:r>
+              <a:rPr lang="en-US" sz="950" dirty="0">
+                <a:solidFill>
+                  <a:srgbClr val="1F2933"/>
+                </a:solidFill>
+                <a:latin typeface="Calibri" pitchFamily="34" charset="0"/>
+                <a:ea typeface="Calibri" pitchFamily="34" charset="-122"/>
+                <a:cs typeface="Calibri" pitchFamily="34" charset="-120"/>
+              </a:rPr>
+              <a:t>Amounts collected this month ÷ amounts due for collection till end of previous month</a:t>
+            </a:r>
+            <a:endParaRPr lang="en-US" sz="950" dirty="0"/>
+          </a:p>
+        </p:txBody>
+      </p:sp>
+      <p:sp>
+        <p:nvSpPr>
+          <p:cNvPr id="13" name="Text 10"/>
+          <p:cNvSpPr/>
+          <p:nvPr/>
+        </p:nvSpPr>
+        <p:spPr>
+          <a:xfrm>
+            <a:off x="594360" y="5587816"/>
+            <a:ext cx="3331464" cy="274320"/>
+          </a:xfrm>
+          <a:prstGeom prst="rect">
+            <a:avLst/>
+          </a:prstGeom>
+          <a:noFill/>
+          <a:ln/>
+        </p:spPr>
+        <p:txBody>
+          <a:bodyPr wrap="square" rtlCol="0" anchor="ctr"/>
+          <a:lstStyle/>
+          <a:p>
+            <a:pPr marL="0" indent="0">
+              <a:buNone/>
+            </a:pPr>
+            <a:r>
+              <a:rPr lang="en-US" sz="950" b="1" i="1" dirty="0">
+                <a:solidFill>
+                  <a:srgbClr val="0F6E6E"/>
+                </a:solidFill>
+                <a:latin typeface="Calibri" pitchFamily="34" charset="0"/>
+                <a:ea typeface="Calibri" pitchFamily="34" charset="-122"/>
+                <a:cs typeface="Calibri" pitchFamily="34" charset="-120"/>
+              </a:rPr>
+              <a:t>NPS 62%  |  NPM 55%  |  Group 56%</a:t>
+            </a:r>
+            <a:endParaRPr lang="en-US" sz="950" dirty="0"/>
+          </a:p>
+        </p:txBody>
+      </p:sp>
+      <p:sp>
+        <p:nvSpPr>
+          <p:cNvPr id="14" name="Shape 11"/>
+          <p:cNvSpPr/>
+          <p:nvPr/>
+        </p:nvSpPr>
+        <p:spPr>
+          <a:xfrm>
+            <a:off x="4291584" y="4517968"/>
+            <a:ext cx="3605784" cy="1417320"/>
+          </a:xfrm>
+          <a:prstGeom prst="rect">
+            <a:avLst/>
+          </a:prstGeom>
+          <a:solidFill>
+            <a:srgbClr val="E6F1F1"/>
+          </a:solidFill>
+          <a:ln w="9525">
+            <a:solidFill>
+              <a:srgbClr val="D9DEE4"/>
+            </a:solidFill>
+            <a:prstDash val="solid"/>
+          </a:ln>
+        </p:spPr>
+        <p:txBody>
+          <a:bodyPr/>
+          <a:lstStyle/>
+          <a:p>
+            <a:endParaRPr lang="en-AE"/>
+          </a:p>
+        </p:txBody>
+      </p:sp>
+      <p:sp>
+        <p:nvSpPr>
+          <p:cNvPr id="15" name="Text 12"/>
+          <p:cNvSpPr/>
+          <p:nvPr/>
+        </p:nvSpPr>
+        <p:spPr>
+          <a:xfrm>
+            <a:off x="4428744" y="4645984"/>
+            <a:ext cx="3331464" cy="292608"/>
+          </a:xfrm>
+          <a:prstGeom prst="rect">
+            <a:avLst/>
+          </a:prstGeom>
+          <a:noFill/>
+          <a:ln/>
+        </p:spPr>
+        <p:txBody>
+          <a:bodyPr wrap="square" rtlCol="0" anchor="ctr"/>
+          <a:lstStyle/>
+          <a:p>
+            <a:pPr marL="0" indent="0">
+              <a:buNone/>
+            </a:pPr>
+            <a:r>
+              <a:rPr lang="en-US" sz="1250" b="1" dirty="0">
+                <a:solidFill>
+                  <a:srgbClr val="1B2A4A"/>
+                </a:solidFill>
+                <a:latin typeface="Calibri" pitchFamily="34" charset="0"/>
+                <a:ea typeface="Calibri" pitchFamily="34" charset="-122"/>
+                <a:cs typeface="Calibri" pitchFamily="34" charset="-120"/>
+              </a:rPr>
+              <a:t>Overdue Ratio</a:t>
+            </a:r>
+            <a:endParaRPr lang="en-US" sz="1250" dirty="0"/>
+          </a:p>
+        </p:txBody>
+      </p:sp>
+      <p:sp>
+        <p:nvSpPr>
+          <p:cNvPr id="16" name="Text 13"/>
+          <p:cNvSpPr/>
+          <p:nvPr/>
+        </p:nvSpPr>
+        <p:spPr>
+          <a:xfrm>
+            <a:off x="4428744" y="4975168"/>
+            <a:ext cx="3331464" cy="594360"/>
+          </a:xfrm>
+          <a:prstGeom prst="rect">
+            <a:avLst/>
+          </a:prstGeom>
+          <a:noFill/>
+          <a:ln/>
+        </p:spPr>
+        <p:txBody>
+          <a:bodyPr wrap="square" rtlCol="0" anchor="ctr"/>
+          <a:lstStyle/>
+          <a:p>
+            <a:pPr marL="0" indent="0">
+              <a:lnSpc>
+                <a:spcPct val="120000"/>
+              </a:lnSpc>
+              <a:buNone/>
+            </a:pPr>
+            <a:r>
+              <a:rPr lang="en-US" sz="950" dirty="0">
+                <a:solidFill>
+                  <a:srgbClr val="1F2933"/>
+                </a:solidFill>
+                <a:latin typeface="Calibri" pitchFamily="34" charset="0"/>
+                <a:ea typeface="Calibri" pitchFamily="34" charset="-122"/>
+                <a:cs typeface="Calibri" pitchFamily="34" charset="-120"/>
+              </a:rPr>
+              <a:t>Overdue receivables (over 60 days) ÷ total receivables of the company</a:t>
+            </a:r>
+            <a:endParaRPr lang="en-US" sz="950" dirty="0"/>
+          </a:p>
+        </p:txBody>
+      </p:sp>
+      <p:sp>
+        <p:nvSpPr>
+          <p:cNvPr id="17" name="Text 14"/>
+          <p:cNvSpPr/>
+          <p:nvPr/>
+        </p:nvSpPr>
+        <p:spPr>
+          <a:xfrm>
+            <a:off x="4428744" y="5587816"/>
+            <a:ext cx="3331464" cy="274320"/>
+          </a:xfrm>
+          <a:prstGeom prst="rect">
+            <a:avLst/>
+          </a:prstGeom>
+          <a:noFill/>
+          <a:ln/>
+        </p:spPr>
+        <p:txBody>
+          <a:bodyPr wrap="square" rtlCol="0" anchor="ctr"/>
+          <a:lstStyle/>
+          <a:p>
+            <a:pPr marL="0" indent="0">
+              <a:buNone/>
+            </a:pPr>
+            <a:r>
+              <a:rPr lang="en-US" sz="950" b="1" i="1" dirty="0">
+                <a:solidFill>
+                  <a:srgbClr val="0F6E6E"/>
+                </a:solidFill>
+                <a:latin typeface="Calibri" pitchFamily="34" charset="0"/>
+                <a:ea typeface="Calibri" pitchFamily="34" charset="-122"/>
+                <a:cs typeface="Calibri" pitchFamily="34" charset="-120"/>
+              </a:rPr>
+              <a:t>NPS 13%  |  NPM 30%  |  Group 26%</a:t>
+            </a:r>
+            <a:endParaRPr lang="en-US" sz="950" dirty="0"/>
+          </a:p>
+        </p:txBody>
+      </p:sp>
+      <p:sp>
+        <p:nvSpPr>
+          <p:cNvPr id="18" name="Shape 15"/>
+          <p:cNvSpPr/>
+          <p:nvPr/>
+        </p:nvSpPr>
+        <p:spPr>
+          <a:xfrm>
+            <a:off x="8125968" y="4517968"/>
+            <a:ext cx="3605784" cy="1417320"/>
+          </a:xfrm>
+          <a:prstGeom prst="rect">
+            <a:avLst/>
+          </a:prstGeom>
+          <a:solidFill>
+            <a:srgbClr val="FAE7E4"/>
+          </a:solidFill>
+          <a:ln w="9525">
+            <a:solidFill>
+              <a:srgbClr val="D9DEE4"/>
+            </a:solidFill>
+            <a:prstDash val="solid"/>
+          </a:ln>
+        </p:spPr>
+        <p:txBody>
+          <a:bodyPr/>
+          <a:lstStyle/>
+          <a:p>
+            <a:endParaRPr lang="en-AE"/>
+          </a:p>
+        </p:txBody>
+      </p:sp>
+      <p:sp>
+        <p:nvSpPr>
+          <p:cNvPr id="19" name="Shape 16"/>
+          <p:cNvSpPr/>
+          <p:nvPr/>
+        </p:nvSpPr>
+        <p:spPr>
+          <a:xfrm>
+            <a:off x="8263128" y="4682560"/>
+            <a:ext cx="201168" cy="201168"/>
+          </a:xfrm>
+          <a:prstGeom prst="ellipse">
+            <a:avLst/>
+          </a:prstGeom>
+          <a:solidFill>
+            <a:srgbClr val="C0392B"/>
+          </a:solidFill>
+          <a:ln/>
+        </p:spPr>
+        <p:txBody>
+          <a:bodyPr/>
+          <a:lstStyle/>
+          <a:p>
+            <a:endParaRPr lang="en-AE"/>
+          </a:p>
+        </p:txBody>
+      </p:sp>
+      <p:sp>
+        <p:nvSpPr>
+          <p:cNvPr id="20" name="Text 17"/>
+          <p:cNvSpPr/>
+          <p:nvPr/>
+        </p:nvSpPr>
+        <p:spPr>
+          <a:xfrm>
+            <a:off x="8564880" y="4645984"/>
+            <a:ext cx="3029712" cy="292608"/>
+          </a:xfrm>
+          <a:prstGeom prst="rect">
+            <a:avLst/>
+          </a:prstGeom>
+          <a:noFill/>
+          <a:ln/>
+        </p:spPr>
+        <p:txBody>
+          <a:bodyPr wrap="square" rtlCol="0" anchor="ctr"/>
+          <a:lstStyle/>
+          <a:p>
+            <a:pPr marL="0" indent="0">
+              <a:buNone/>
+            </a:pPr>
+            <a:r>
+              <a:rPr lang="en-US" sz="1250" b="1" dirty="0">
+                <a:solidFill>
+                  <a:srgbClr val="C0392B"/>
+                </a:solidFill>
+                <a:latin typeface="Calibri" pitchFamily="34" charset="0"/>
+                <a:ea typeface="Calibri" pitchFamily="34" charset="-122"/>
+                <a:cs typeface="Calibri" pitchFamily="34" charset="-120"/>
+              </a:rPr>
+              <a:t>Very High Risk</a:t>
+            </a:r>
+            <a:endParaRPr lang="en-US" sz="1250" dirty="0"/>
+          </a:p>
+        </p:txBody>
+      </p:sp>
+      <p:sp>
+        <p:nvSpPr>
+          <p:cNvPr id="21" name="Text 18"/>
+          <p:cNvSpPr/>
+          <p:nvPr/>
+        </p:nvSpPr>
+        <p:spPr>
+          <a:xfrm>
+            <a:off x="8263128" y="4975168"/>
+            <a:ext cx="3331464" cy="822960"/>
+          </a:xfrm>
+          <a:prstGeom prst="rect">
+            <a:avLst/>
+          </a:prstGeom>
+          <a:noFill/>
+          <a:ln/>
+        </p:spPr>
+        <p:txBody>
+          <a:bodyPr wrap="square" rtlCol="0" anchor="ctr"/>
+          <a:lstStyle/>
+          <a:p>
+            <a:pPr marL="0" indent="0">
+              <a:lnSpc>
+                <a:spcPct val="120000"/>
+              </a:lnSpc>
+              <a:buNone/>
+            </a:pPr>
+            <a:r>
+              <a:rPr lang="en-US" sz="950" dirty="0">
+                <a:solidFill>
+                  <a:srgbClr val="1F2933"/>
+                </a:solidFill>
+                <a:latin typeface="Calibri" pitchFamily="34" charset="0"/>
+                <a:ea typeface="Calibri" pitchFamily="34" charset="-122"/>
+                <a:cs typeface="Calibri" pitchFamily="34" charset="-120"/>
+              </a:rPr>
+              <a:t>Debts outstanding over 91 days indicate a very high risk of non-collection and require immediate escalation.</a:t>
+            </a:r>
+            <a:endParaRPr lang="en-US" sz="950" dirty="0"/>
+          </a:p>
+          <a:p>
+            <a:pPr marL="0" indent="0">
+              <a:spcBef>
+                <a:spcPts val="600"/>
+              </a:spcBef>
+              <a:lnSpc>
+                <a:spcPct val="120000"/>
+              </a:lnSpc>
+              <a:buNone/>
+            </a:pPr>
+            <a:r>
+              <a:rPr lang="en-US" sz="950" dirty="0" b="1">
+                <a:solidFill>
+                  <a:srgbClr val="1F2933"/>
+                </a:solidFill>
+                <a:latin typeface="Calibri" pitchFamily="34" charset="0"/>
+                <a:ea typeface="Calibri" pitchFamily="34" charset="-122"/>
+                <a:cs typeface="Calibri" pitchFamily="34" charset="-120"/>
+              </a:rPr>
+              <a:t>+91 days:  NPS 0.49m  |  NPM 2.96m  |  Group 3.45m</a:t>
+            </a:r>
+            <a:endParaRPr lang="en-US" sz="950" dirty="0"/>
+          </a:p>
+        </p:txBody>
+      </p:sp>
+      <p:sp>
+        <p:nvSpPr>
+          <p:cNvPr id="22" name="Table note"/>
+          <p:cNvSpPr txBox="1"/>
+          <p:nvPr/>
+        </p:nvSpPr>
+        <p:spPr>
+          <a:xfrm>
+            <a:off x="457200" y="3395000"/>
+            <a:ext cx="11274552" cy="250000"/>
+          </a:xfrm>
+          <a:prstGeom prst="rect">
+            <a:avLst/>
+          </a:prstGeom>
+          <a:noFill/>
+        </p:spPr>
+        <p:txBody>
+          <a:bodyPr wrap="square" tIns="0" bIns="0">
+            <a:spAutoFit/>
+          </a:bodyPr>
+          <a:lstStyle/>
+          <a:p>
+            <a:r>
+              <a:rPr sz="900" i="1">
+                <a:solidFill>
+                  <a:srgbClr val="5A6472"/>
+                </a:solidFill>
+                <a:latin typeface="Calibri"/>
+              </a:rPr>
+              <a:t>Intercompany: amounts due from subsidiaries, the holding company (UNH) and the Engineering Office. Net of AED 1.10m collected 1–16 Oct; collection rate uses September collections only. Amounts in AED.</a:t>
+            </a:r>
+          </a:p>
+        </p:txBody>
+      </p:sp>
+    </p:spTree>
+  </p:cSld>
+  <p:clrMapOvr>
+    <a:masterClrMapping/>
+  </p:clrMapOvr>
+</p:sld>
+</file>
+
+<file path=ppt/slides/slide5.xml><?xml version="1.0" encoding="utf-8"?>
+<p:sld xmlns:a="http://schemas.openxmlformats.org/drawingml/2006/main" xmlns:r="http://schemas.openxmlformats.org/officeDocument/2006/relationships" xmlns:p="http://schemas.openxmlformats.org/presentationml/2006/main">
+  <p:cSld name="Slide 3">
+    <p:bg>
+      <p:bgPr>
+        <a:solidFill>
+          <a:srgbClr val="FFFFFF"/>
+        </a:solidFill>
+        <a:effectLst/>
+      </p:bgPr>
+    </p:bg>
+    <p:spTree>
+      <p:nvGrpSpPr>
+        <p:cNvPr id="1" name=""/>
+        <p:cNvGrpSpPr/>
+        <p:nvPr/>
+      </p:nvGrpSpPr>
+      <p:grpSpPr>
+        <a:xfrm>
+          <a:off x="0" y="0"/>
+          <a:ext cx="0" cy="0"/>
+          <a:chOff x="0" y="0"/>
+          <a:chExt cx="0" cy="0"/>
+        </a:xfrm>
+      </p:grpSpPr>
+      <p:sp>
+        <p:nvSpPr>
+          <p:cNvPr id="2" name="Shape 0"/>
+          <p:cNvSpPr/>
+          <p:nvPr/>
+        </p:nvSpPr>
+        <p:spPr>
+          <a:xfrm>
+            <a:off x="0" y="0"/>
+            <a:ext cx="12191695" cy="868680"/>
+          </a:xfrm>
+          <a:prstGeom prst="rect">
+            <a:avLst/>
+          </a:prstGeom>
+          <a:solidFill>
+            <a:schemeClr val="bg1">
+              <a:lumMod val="75000"/>
+            </a:schemeClr>
+          </a:solidFill>
+          <a:ln/>
+        </p:spPr>
+        <p:txBody>
+          <a:bodyPr/>
+          <a:lstStyle/>
+          <a:p>
+            <a:endParaRPr lang="en-AE"/>
+          </a:p>
+        </p:txBody>
+      </p:sp>
+      <p:sp>
+        <p:nvSpPr>
+          <p:cNvPr id="3" name="Text 1"/>
+          <p:cNvSpPr/>
+          <p:nvPr/>
+        </p:nvSpPr>
+        <p:spPr>
+          <a:xfrm>
+            <a:off x="457200" y="0"/>
+            <a:ext cx="10058400" cy="868680"/>
+          </a:xfrm>
+          <a:prstGeom prst="rect">
+            <a:avLst/>
+          </a:prstGeom>
+          <a:noFill/>
+          <a:ln/>
+        </p:spPr>
+        <p:txBody>
+          <a:bodyPr wrap="square" rtlCol="0" anchor="ctr"/>
+          <a:lstStyle/>
+          <a:p>
+            <a:pPr marL="0" indent="0">
+              <a:buNone/>
+            </a:pPr>
+            <a:r>
+              <a:rPr lang="en-US" sz="2000" b="1" dirty="0">
+                <a:solidFill>
+                  <a:srgbClr val="FFFFFF"/>
+                </a:solidFill>
+                <a:latin typeface="Calibri" pitchFamily="34" charset="0"/>
+                <a:ea typeface="Calibri" pitchFamily="34" charset="-122"/>
+                <a:cs typeface="Calibri" pitchFamily="34" charset="-120"/>
+              </a:rPr>
+              <a:t>Top Overdue Customers &amp; Risk Monitoring – Intercompany</a:t>
+            </a:r>
+            <a:endParaRPr lang="en-US" sz="2000" dirty="0"/>
+          </a:p>
+        </p:txBody>
+      </p:sp>
+      <p:sp>
+        <p:nvSpPr>
+          <p:cNvPr id="4" name="Text 2"/>
+          <p:cNvSpPr/>
+          <p:nvPr/>
+        </p:nvSpPr>
+        <p:spPr>
+          <a:xfrm>
+            <a:off x="10424160" y="0"/>
+            <a:ext cx="1325880" cy="868680"/>
+          </a:xfrm>
+          <a:prstGeom prst="rect">
+            <a:avLst/>
+          </a:prstGeom>
+          <a:noFill/>
+          <a:ln/>
+        </p:spPr>
+        <p:txBody>
+          <a:bodyPr wrap="square" rtlCol="0" anchor="ctr"/>
+          <a:lstStyle/>
+          <a:p>
+            <a:pPr marL="0" indent="0" algn="r">
+              <a:buNone/>
+            </a:pPr>
+            <a:r>
+              <a:rPr lang="en-US" sz="1050" b="1" dirty="0">
+                <a:solidFill>
+                  <a:srgbClr val="E6F1F1"/>
+                </a:solidFill>
+                <a:latin typeface="Calibri" pitchFamily="34" charset="0"/>
+                <a:ea typeface="Calibri" pitchFamily="34" charset="-122"/>
+                <a:cs typeface="Calibri" pitchFamily="34" charset="-120"/>
+              </a:rPr>
+              <a:t>SECTION 4 – 5</a:t>
+            </a:r>
+            <a:endParaRPr lang="en-US" sz="1050" dirty="0"/>
+          </a:p>
+        </p:txBody>
+      </p:sp>
+      <p:sp>
+        <p:nvSpPr>
+          <p:cNvPr id="5" name="Text 3"/>
+          <p:cNvSpPr/>
+          <p:nvPr/>
+        </p:nvSpPr>
+        <p:spPr>
+          <a:xfrm>
+            <a:off x="457200" y="1024128"/>
+            <a:ext cx="11274552" cy="320040"/>
+          </a:xfrm>
+          <a:prstGeom prst="rect">
+            <a:avLst/>
+          </a:prstGeom>
+          <a:noFill/>
+          <a:ln/>
+        </p:spPr>
+        <p:txBody>
+          <a:bodyPr wrap="square" rtlCol="0" anchor="ctr"/>
+          <a:lstStyle/>
+          <a:p>
+            <a:pPr marL="0" indent="0">
+              <a:buNone/>
+            </a:pPr>
+            <a:r>
+              <a:rPr lang="en-US" sz="1250" b="1" dirty="0">
+                <a:solidFill>
+                  <a:srgbClr val="0F6E6E"/>
+                </a:solidFill>
+                <a:latin typeface="Calibri" pitchFamily="34" charset="0"/>
+                <a:ea typeface="Calibri" pitchFamily="34" charset="-122"/>
+                <a:cs typeface="Calibri" pitchFamily="34" charset="-120"/>
+              </a:rPr>
+              <a:t>Fourth:  </a:t>
+            </a:r>
+            <a:r>
+              <a:rPr lang="en-US" sz="1250" dirty="0">
+                <a:solidFill>
+                  <a:srgbClr val="1F2933"/>
+                </a:solidFill>
+                <a:latin typeface="Calibri" pitchFamily="34" charset="0"/>
+                <a:ea typeface="Calibri" pitchFamily="34" charset="-122"/>
+                <a:cs typeface="Calibri" pitchFamily="34" charset="-120"/>
+              </a:rPr>
+              <a:t>Top Overdue Customers for each company — covering at least 80% of total outstanding receivables</a:t>
+            </a:r>
+            <a:endParaRPr lang="en-US" sz="1250" dirty="0"/>
+          </a:p>
+        </p:txBody>
+      </p:sp>
+      <p:graphicFrame>
+        <p:nvGraphicFramePr>
+          <p:cNvPr id="6" name="Table 0"/>
+          <p:cNvGraphicFramePr>
+            <a:graphicFrameLocks noGrp="1"/>
+          </p:cNvGraphicFramePr>
+          <p:nvPr>
+            <p:extLst>
+              <p:ext uri="{D42A27DB-BD31-4B8C-83A1-F6EECF244321}">
+                <p14:modId xmlns:p14="http://schemas.microsoft.com/office/powerpoint/2010/main" val="3104897496"/>
+              </p:ext>
+            </p:extLst>
+          </p:nvPr>
+        </p:nvGraphicFramePr>
+        <p:xfrm>
+          <a:off x="457200" y="1371600"/>
+          <a:ext cx="11274552" cy="1420000"/>
+        </p:xfrm>
+        <a:graphic>
+          <a:graphicData uri="http://schemas.openxmlformats.org/drawingml/2006/table">
+            <a:tbl>
+              <a:tblPr/>
+              <a:tblGrid>
+                <a:gridCol w="3900000">
+                  <a:extLst>
+                    <a:ext uri="{9D8B030D-6E8A-4147-A177-3AD203B41FA5}">
+                      <a16:colId xmlns:a16="http://schemas.microsoft.com/office/drawing/2014/main" val="20000"/>
+                    </a:ext>
+                  </a:extLst>
+                </a:gridCol>
+                <a:gridCol w="750000">
+                  <a:extLst>
+                    <a:ext uri="{9D8B030D-6E8A-4147-A177-3AD203B41FA5}">
+                      <a16:colId xmlns:a16="http://schemas.microsoft.com/office/drawing/2014/main" val="20001"/>
+                    </a:ext>
+                  </a:extLst>
+                </a:gridCol>
+                <a:gridCol w="750000">
+                  <a:extLst>
+                    <a:ext uri="{9D8B030D-6E8A-4147-A177-3AD203B41FA5}">
+                      <a16:colId xmlns:a16="http://schemas.microsoft.com/office/drawing/2014/main" val="20002"/>
+                    </a:ext>
+                  </a:extLst>
+                </a:gridCol>
+                <a:gridCol w="1300000">
+                  <a:extLst>
+                    <a:ext uri="{9D8B030D-6E8A-4147-A177-3AD203B41FA5}">
+                      <a16:colId xmlns:a16="http://schemas.microsoft.com/office/drawing/2014/main" val="20003"/>
+                    </a:ext>
+                  </a:extLst>
+                </a:gridCol>
+                <a:gridCol w="1100000">
+                  <a:extLst>
+                    <a:ext uri="{9D8B030D-6E8A-4147-A177-3AD203B41FA5}">
+                      <a16:colId xmlns:a16="http://schemas.microsoft.com/office/drawing/2014/main" val="20004"/>
+                    </a:ext>
+                  </a:extLst>
+                </a:gridCol>
+                <a:gridCol w="2000000">
+                  <a:extLst>
+                    <a:ext uri="{9D8B030D-6E8A-4147-A177-3AD203B41FA5}">
+                      <a16:colId xmlns:a16="http://schemas.microsoft.com/office/drawing/2014/main" val="20005"/>
+                    </a:ext>
+                  </a:extLst>
+                </a:gridCol>
+                <a:gridCol w="1474552">
+                  <a:extLst>
+                    <a:ext uri="{9D8B030D-6E8A-4147-A177-3AD203B41FA5}">
+                      <a16:colId xmlns:a16="http://schemas.microsoft.com/office/drawing/2014/main" val="20006"/>
+                    </a:ext>
+                  </a:extLst>
+                </a:gridCol>
+              </a:tblGrid>
+              <a:tr h="340000">
+                <a:tc>
+                  <a:txBody>
+                    <a:bodyPr/>
+                    <a:lstStyle/>
+                    <a:p>
+                      <a:pPr marL="0" indent="0" algn="ctr">
+                        <a:buNone/>
+                      </a:pPr>
+                      <a:r>
+                        <a:rPr lang="en-US" sz="950" b="1" dirty="0">
+                          <a:solidFill>
+                            <a:srgbClr val="FFFFFF"/>
+                          </a:solidFill>
+                        </a:rPr>
+                        <a:t>Client</a:t>
+                      </a:r>
+                      <a:endParaRPr lang="en-US" sz="950" dirty="0"/>
+                    </a:p>
+                  </a:txBody>
+                  <a:tcPr anchor="ctr">
+                    <a:lnL w="9525" cap="flat" cmpd="sng" algn="ctr">
+                      <a:solidFill>
+                        <a:srgbClr val="D9DEE4"/>
+                      </a:solidFill>
+                      <a:prstDash val="solid"/>
+                      <a:round/>
+                      <a:headEnd type="none" w="med" len="med"/>
+                      <a:tailEnd type="none" w="med" len="med"/>
+                    </a:lnL>
+                    <a:lnR w="9525" cap="flat" cmpd="sng" algn="ctr">
+                      <a:solidFill>
+                        <a:srgbClr val="D9DEE4"/>
+                      </a:solidFill>
+                      <a:prstDash val="solid"/>
+                      <a:round/>
+                      <a:headEnd type="none" w="med" len="med"/>
+                      <a:tailEnd type="none" w="med" len="med"/>
+                    </a:lnR>
+                    <a:lnT w="9525" cap="flat" cmpd="sng" algn="ctr">
+                      <a:solidFill>
+                        <a:srgbClr val="D9DEE4"/>
+                      </a:solidFill>
+                      <a:prstDash val="solid"/>
+                      <a:round/>
+                      <a:headEnd type="none" w="med" len="med"/>
+                      <a:tailEnd type="none" w="med" len="med"/>
+                    </a:lnT>
+                    <a:lnB w="9525" cap="flat" cmpd="sng" algn="ctr">
+                      <a:solidFill>
+                        <a:srgbClr val="D9DEE4"/>
+                      </a:solidFill>
+                      <a:prstDash val="solid"/>
+                      <a:round/>
+                      <a:headEnd type="none" w="med" len="med"/>
+                      <a:tailEnd type="none" w="med" len="med"/>
+                    </a:lnB>
+                    <a:solidFill>
+                      <a:schemeClr val="bg1">
+                        <a:lumMod val="50000"/>
+                      </a:schemeClr>
+                    </a:solidFill>
+                  </a:tcPr>
+                </a:tc>
+                <a:tc>
+                  <a:txBody>
+                    <a:bodyPr/>
+                    <a:lstStyle/>
+                    <a:p>
+                      <a:pPr marL="0" indent="0" algn="ctr">
+                        <a:buNone/>
+                      </a:pPr>
+                      <a:r>
+                        <a:rPr lang="en-US" sz="950" b="1" dirty="0">
+                          <a:solidFill>
+                            <a:srgbClr val="FFFFFF"/>
+                          </a:solidFill>
+                        </a:rPr>
+                        <a:t>Amount</a:t>
+                      </a:r>
+                      <a:endParaRPr lang="en-US" sz="950" dirty="0"/>
+                    </a:p>
+                  </a:txBody>
+                  <a:tcPr anchor="ctr">
+                    <a:lnL w="9525" cap="flat" cmpd="sng" algn="ctr">
+                      <a:solidFill>
+                        <a:srgbClr val="D9DEE4"/>
+                      </a:solidFill>
+                      <a:prstDash val="solid"/>
+                      <a:round/>
+                      <a:headEnd type="none" w="med" len="med"/>
+                      <a:tailEnd type="none" w="med" len="med"/>
+                    </a:lnL>
+                    <a:lnR w="9525" cap="flat" cmpd="sng" algn="ctr">
+                      <a:solidFill>
+                        <a:srgbClr val="D9DEE4"/>
+                      </a:solidFill>
+                      <a:prstDash val="solid"/>
+                      <a:round/>
+                      <a:headEnd type="none" w="med" len="med"/>
+                      <a:tailEnd type="none" w="med" len="med"/>
+                    </a:lnR>
+                    <a:lnT w="9525" cap="flat" cmpd="sng" algn="ctr">
+                      <a:solidFill>
+                        <a:srgbClr val="D9DEE4"/>
+                      </a:solidFill>
+                      <a:prstDash val="solid"/>
+                      <a:round/>
+                      <a:headEnd type="none" w="med" len="med"/>
+                      <a:tailEnd type="none" w="med" len="med"/>
+                    </a:lnT>
+                    <a:lnB w="9525" cap="flat" cmpd="sng" algn="ctr">
+                      <a:solidFill>
+                        <a:srgbClr val="D9DEE4"/>
+                      </a:solidFill>
+                      <a:prstDash val="solid"/>
+                      <a:round/>
+                      <a:headEnd type="none" w="med" len="med"/>
+                      <a:tailEnd type="none" w="med" len="med"/>
+                    </a:lnB>
+                    <a:solidFill>
+                      <a:schemeClr val="bg1">
+                        <a:lumMod val="50000"/>
+                      </a:schemeClr>
+                    </a:solidFill>
+                  </a:tcPr>
+                </a:tc>
+                <a:tc>
+                  <a:txBody>
+                    <a:bodyPr/>
+                    <a:lstStyle/>
+                    <a:p>
+                      <a:pPr marL="0" indent="0" algn="ctr">
+                        <a:buNone/>
+                      </a:pPr>
+                      <a:r>
+                        <a:rPr lang="en-US" sz="950" b="1" dirty="0">
+                          <a:solidFill>
+                            <a:srgbClr val="FFFFFF"/>
+                          </a:solidFill>
+                        </a:rPr>
+                        <a:t>Duration</a:t>
+                      </a:r>
+                      <a:endParaRPr lang="en-US" sz="950" dirty="0"/>
+                    </a:p>
+                  </a:txBody>
+                  <a:tcPr anchor="ctr">
+                    <a:lnL w="9525" cap="flat" cmpd="sng" algn="ctr">
+                      <a:solidFill>
+                        <a:srgbClr val="D9DEE4"/>
+                      </a:solidFill>
+                      <a:prstDash val="solid"/>
+                      <a:round/>
+                      <a:headEnd type="none" w="med" len="med"/>
+                      <a:tailEnd type="none" w="med" len="med"/>
+                    </a:lnL>
+                    <a:lnR w="9525" cap="flat" cmpd="sng" algn="ctr">
+                      <a:solidFill>
+                        <a:srgbClr val="D9DEE4"/>
+                      </a:solidFill>
+                      <a:prstDash val="solid"/>
+                      <a:round/>
+                      <a:headEnd type="none" w="med" len="med"/>
+                      <a:tailEnd type="none" w="med" len="med"/>
+                    </a:lnR>
+                    <a:lnT w="9525" cap="flat" cmpd="sng" algn="ctr">
+                      <a:solidFill>
+                        <a:srgbClr val="D9DEE4"/>
+                      </a:solidFill>
+                      <a:prstDash val="solid"/>
+                      <a:round/>
+                      <a:headEnd type="none" w="med" len="med"/>
+                      <a:tailEnd type="none" w="med" len="med"/>
+                    </a:lnT>
+                    <a:lnB w="9525" cap="flat" cmpd="sng" algn="ctr">
+                      <a:solidFill>
+                        <a:srgbClr val="D9DEE4"/>
+                      </a:solidFill>
+                      <a:prstDash val="solid"/>
+                      <a:round/>
+                      <a:headEnd type="none" w="med" len="med"/>
+                      <a:tailEnd type="none" w="med" len="med"/>
+                    </a:lnB>
+                    <a:solidFill>
+                      <a:schemeClr val="bg1">
+                        <a:lumMod val="50000"/>
+                      </a:schemeClr>
+                    </a:solidFill>
+                  </a:tcPr>
+                </a:tc>
+                <a:tc>
+                  <a:txBody>
+                    <a:bodyPr/>
+                    <a:lstStyle/>
+                    <a:p>
+                      <a:pPr marL="0" indent="0" algn="ctr">
+                        <a:buNone/>
+                      </a:pPr>
+                      <a:r>
+                        <a:rPr lang="en-US" sz="950" b="1" dirty="0">
+                          <a:solidFill>
+                            <a:srgbClr val="FFFFFF"/>
+                          </a:solidFill>
+                        </a:rPr>
+                        <a:t>Reason</a:t>
+                      </a:r>
+                      <a:endParaRPr lang="en-US" sz="950" dirty="0"/>
+                    </a:p>
+                  </a:txBody>
+                  <a:tcPr anchor="ctr">
+                    <a:lnL w="9525" cap="flat" cmpd="sng" algn="ctr">
+                      <a:solidFill>
+                        <a:srgbClr val="D9DEE4"/>
+                      </a:solidFill>
+                      <a:prstDash val="solid"/>
+                      <a:round/>
+                      <a:headEnd type="none" w="med" len="med"/>
+                      <a:tailEnd type="none" w="med" len="med"/>
+                    </a:lnL>
+                    <a:lnR w="9525" cap="flat" cmpd="sng" algn="ctr">
+                      <a:solidFill>
+                        <a:srgbClr val="D9DEE4"/>
+                      </a:solidFill>
+                      <a:prstDash val="solid"/>
+                      <a:round/>
+                      <a:headEnd type="none" w="med" len="med"/>
+                      <a:tailEnd type="none" w="med" len="med"/>
+                    </a:lnR>
+                    <a:lnT w="9525" cap="flat" cmpd="sng" algn="ctr">
+                      <a:solidFill>
+                        <a:srgbClr val="D9DEE4"/>
+                      </a:solidFill>
+                      <a:prstDash val="solid"/>
+                      <a:round/>
+                      <a:headEnd type="none" w="med" len="med"/>
+                      <a:tailEnd type="none" w="med" len="med"/>
+                    </a:lnT>
+                    <a:lnB w="9525" cap="flat" cmpd="sng" algn="ctr">
+                      <a:solidFill>
+                        <a:srgbClr val="D9DEE4"/>
+                      </a:solidFill>
+                      <a:prstDash val="solid"/>
+                      <a:round/>
+                      <a:headEnd type="none" w="med" len="med"/>
+                      <a:tailEnd type="none" w="med" len="med"/>
+                    </a:lnB>
+                    <a:solidFill>
+                      <a:schemeClr val="bg1">
+                        <a:lumMod val="50000"/>
+                      </a:schemeClr>
+                    </a:solidFill>
+                  </a:tcPr>
+                </a:tc>
+                <a:tc>
+                  <a:txBody>
+                    <a:bodyPr/>
+                    <a:lstStyle/>
+                    <a:p>
+                      <a:pPr marL="0" indent="0" algn="ctr">
+                        <a:buNone/>
+                      </a:pPr>
+                      <a:r>
+                        <a:rPr lang="en-US" sz="950" b="1" dirty="0">
+                          <a:solidFill>
+                            <a:srgbClr val="FFFFFF"/>
+                          </a:solidFill>
+                        </a:rPr>
+                        <a:t>Responsible</a:t>
+                      </a:r>
+                      <a:endParaRPr lang="en-US" sz="950" dirty="0"/>
+                    </a:p>
+                  </a:txBody>
+                  <a:tcPr anchor="ctr">
+                    <a:lnL w="9525" cap="flat" cmpd="sng" algn="ctr">
+                      <a:solidFill>
+                        <a:srgbClr val="D9DEE4"/>
+                      </a:solidFill>
+                      <a:prstDash val="solid"/>
+                      <a:round/>
+                      <a:headEnd type="none" w="med" len="med"/>
+                      <a:tailEnd type="none" w="med" len="med"/>
+                    </a:lnL>
+                    <a:lnR w="9525" cap="flat" cmpd="sng" algn="ctr">
+                      <a:solidFill>
+                        <a:srgbClr val="D9DEE4"/>
+                      </a:solidFill>
+                      <a:prstDash val="solid"/>
+                      <a:round/>
+                      <a:headEnd type="none" w="med" len="med"/>
+                      <a:tailEnd type="none" w="med" len="med"/>
+                    </a:lnR>
+                    <a:lnT w="9525" cap="flat" cmpd="sng" algn="ctr">
+                      <a:solidFill>
+                        <a:srgbClr val="D9DEE4"/>
+                      </a:solidFill>
+                      <a:prstDash val="solid"/>
+                      <a:round/>
+                      <a:headEnd type="none" w="med" len="med"/>
+                      <a:tailEnd type="none" w="med" len="med"/>
+                    </a:lnT>
+                    <a:lnB w="9525" cap="flat" cmpd="sng" algn="ctr">
+                      <a:solidFill>
+                        <a:srgbClr val="D9DEE4"/>
+                      </a:solidFill>
+                      <a:prstDash val="solid"/>
+                      <a:round/>
+                      <a:headEnd type="none" w="med" len="med"/>
+                      <a:tailEnd type="none" w="med" len="med"/>
+                    </a:lnB>
+                    <a:solidFill>
+                      <a:schemeClr val="bg1">
+                        <a:lumMod val="50000"/>
+                      </a:schemeClr>
+                    </a:solidFill>
+                  </a:tcPr>
+                </a:tc>
+                <a:tc>
+                  <a:txBody>
+                    <a:bodyPr/>
+                    <a:lstStyle/>
+                    <a:p>
+                      <a:pPr marL="0" indent="0" algn="ctr">
+                        <a:buNone/>
+                      </a:pPr>
+                      <a:r>
+                        <a:rPr lang="en-US" sz="950" b="1" dirty="0">
+                          <a:solidFill>
+                            <a:srgbClr val="FFFFFF"/>
+                          </a:solidFill>
+                        </a:rPr>
+                        <a:t>Action to be Taken</a:t>
+                      </a:r>
+                      <a:endParaRPr lang="en-US" sz="950" dirty="0"/>
+                    </a:p>
+                  </a:txBody>
+                  <a:tcPr anchor="ctr">
+                    <a:lnL w="9525" cap="flat" cmpd="sng" algn="ctr">
+                      <a:solidFill>
+                        <a:srgbClr val="D9DEE4"/>
+                      </a:solidFill>
+                      <a:prstDash val="solid"/>
+                      <a:round/>
+                      <a:headEnd type="none" w="med" len="med"/>
+                      <a:tailEnd type="none" w="med" len="med"/>
+                    </a:lnL>
+                    <a:lnR w="9525" cap="flat" cmpd="sng" algn="ctr">
+                      <a:solidFill>
+                        <a:srgbClr val="D9DEE4"/>
+                      </a:solidFill>
+                      <a:prstDash val="solid"/>
+                      <a:round/>
+                      <a:headEnd type="none" w="med" len="med"/>
+                      <a:tailEnd type="none" w="med" len="med"/>
+                    </a:lnR>
+                    <a:lnT w="9525" cap="flat" cmpd="sng" algn="ctr">
+                      <a:solidFill>
+                        <a:srgbClr val="D9DEE4"/>
+                      </a:solidFill>
+                      <a:prstDash val="solid"/>
+                      <a:round/>
+                      <a:headEnd type="none" w="med" len="med"/>
+                      <a:tailEnd type="none" w="med" len="med"/>
+                    </a:lnT>
+                    <a:lnB w="9525" cap="flat" cmpd="sng" algn="ctr">
+                      <a:solidFill>
+                        <a:srgbClr val="D9DEE4"/>
+                      </a:solidFill>
+                      <a:prstDash val="solid"/>
+                      <a:round/>
+                      <a:headEnd type="none" w="med" len="med"/>
+                      <a:tailEnd type="none" w="med" len="med"/>
+                    </a:lnB>
+                    <a:solidFill>
+                      <a:schemeClr val="bg1">
+                        <a:lumMod val="50000"/>
+                      </a:schemeClr>
+                    </a:solidFill>
+                  </a:tcPr>
+                </a:tc>
+                <a:tc>
+                  <a:txBody>
+                    <a:bodyPr/>
+                    <a:lstStyle/>
+                    <a:p>
+                      <a:pPr marL="0" indent="0" algn="ctr">
+                        <a:buNone/>
+                      </a:pPr>
+                      <a:r>
+                        <a:rPr lang="en-US" sz="950" b="1" dirty="0">
+                          <a:solidFill>
+                            <a:srgbClr val="FFFFFF"/>
+                          </a:solidFill>
+                        </a:rPr>
+                        <a:t>Expected</a:t>
+                      </a:r>
+                      <a:endParaRPr lang="en-US" sz="950" dirty="0"/>
+                    </a:p>
+                    <a:p>
+                      <a:pPr marL="0" indent="0" algn="ctr">
+                        <a:buNone/>
+                      </a:pPr>
+                      <a:r>
+                        <a:rPr lang="en-US" sz="950" b="1" dirty="0">
+                          <a:solidFill>
+                            <a:srgbClr val="FFFFFF"/>
+                          </a:solidFill>
+                        </a:rPr>
+                        <a:t>Collection Date</a:t>
+                      </a:r>
+                      <a:endParaRPr lang="en-US" sz="950" dirty="0"/>
+                    </a:p>
+                  </a:txBody>
+                  <a:tcPr anchor="ctr">
+                    <a:lnL w="9525" cap="flat" cmpd="sng" algn="ctr">
+                      <a:solidFill>
+                        <a:srgbClr val="D9DEE4"/>
+                      </a:solidFill>
+                      <a:prstDash val="solid"/>
+                      <a:round/>
+                      <a:headEnd type="none" w="med" len="med"/>
+                      <a:tailEnd type="none" w="med" len="med"/>
+                    </a:lnL>
+                    <a:lnR w="9525" cap="flat" cmpd="sng" algn="ctr">
+                      <a:solidFill>
+                        <a:srgbClr val="D9DEE4"/>
+                      </a:solidFill>
+                      <a:prstDash val="solid"/>
+                      <a:round/>
+                      <a:headEnd type="none" w="med" len="med"/>
+                      <a:tailEnd type="none" w="med" len="med"/>
+                    </a:lnR>
+                    <a:lnT w="9525" cap="flat" cmpd="sng" algn="ctr">
+                      <a:solidFill>
+                        <a:srgbClr val="D9DEE4"/>
+                      </a:solidFill>
+                      <a:prstDash val="solid"/>
+                      <a:round/>
+                      <a:headEnd type="none" w="med" len="med"/>
+                      <a:tailEnd type="none" w="med" len="med"/>
+                    </a:lnT>
+                    <a:lnB w="9525" cap="flat" cmpd="sng" algn="ctr">
+                      <a:solidFill>
+                        <a:srgbClr val="D9DEE4"/>
+                      </a:solidFill>
+                      <a:prstDash val="solid"/>
+                      <a:round/>
+                      <a:headEnd type="none" w="med" len="med"/>
+                      <a:tailEnd type="none" w="med" len="med"/>
+                    </a:lnB>
+                    <a:solidFill>
+                      <a:schemeClr val="bg1">
+                        <a:lumMod val="50000"/>
+                      </a:schemeClr>
+                    </a:solidFill>
+                  </a:tcPr>
+                </a:tc>
+                <a:extLst>
+                  <a:ext uri="{0D108BD9-81ED-4DB2-BD59-A6C34878D82A}">
+                    <a16:rowId xmlns:a16="http://schemas.microsoft.com/office/drawing/2014/main" val="10000"/>
+                  </a:ext>
+                </a:extLst>
+              </a:tr>
+              <a:tr h="270000">
+                <a:tc>
+                  <a:txBody>
+                    <a:bodyPr/>
+                    <a:lstStyle/>
+                    <a:p>
+                      <a:pPr marL="0" indent="0" algn="l">
+                        <a:buNone/>
+                      </a:pPr>
+                      <a:r>
+                        <a:rPr lang="en-US" sz="900" b="1" dirty="0">
+                          <a:solidFill>
+                            <a:srgbClr val="1F2933"/>
+                          </a:solidFill>
+                        </a:rPr>
+                        <a:t>NPS – Tal Al Wathba Transport and General Contracting L.L.C - S.P.C</a:t>
+                      </a:r>
+                      <a:endParaRPr lang="en-US" sz="950" dirty="0"/>
+                    </a:p>
+                  </a:txBody>
+                  <a:tcPr anchor="ctr">
+                    <a:lnL w="9525" cap="flat" cmpd="sng" algn="ctr">
+                      <a:solidFill>
+                        <a:srgbClr val="D9DEE4"/>
+                      </a:solidFill>
+                      <a:prstDash val="solid"/>
+                      <a:round/>
+                      <a:headEnd type="none" w="med" len="med"/>
+                      <a:tailEnd type="none" w="med" len="med"/>
+                    </a:lnL>
+                    <a:lnR w="9525" cap="flat" cmpd="sng" algn="ctr">
+                      <a:solidFill>
+                        <a:srgbClr val="D9DEE4"/>
+                      </a:solidFill>
+                      <a:prstDash val="solid"/>
+                      <a:round/>
+                      <a:headEnd type="none" w="med" len="med"/>
+                      <a:tailEnd type="none" w="med" len="med"/>
+                    </a:lnR>
+                    <a:lnT w="9525" cap="flat" cmpd="sng" algn="ctr">
+                      <a:solidFill>
+                        <a:srgbClr val="D9DEE4"/>
+                      </a:solidFill>
+                      <a:prstDash val="solid"/>
+                      <a:round/>
+                      <a:headEnd type="none" w="med" len="med"/>
+                      <a:tailEnd type="none" w="med" len="med"/>
+                    </a:lnT>
+                    <a:lnB w="9525" cap="flat" cmpd="sng" algn="ctr">
+                      <a:solidFill>
+                        <a:srgbClr val="D9DEE4"/>
+                      </a:solidFill>
+                      <a:prstDash val="solid"/>
+                      <a:round/>
+                      <a:headEnd type="none" w="med" len="med"/>
+                      <a:tailEnd type="none" w="med" len="med"/>
+                    </a:lnB>
+                    <a:solidFill>
+                      <a:srgbClr val="FFFFFF"/>
+                    </a:solidFill>
+                  </a:tcPr>
+                </a:tc>
+                <a:tc>
+                  <a:txBody>
+                    <a:bodyPr/>
+                    <a:lstStyle/>
+                    <a:p>
+                      <a:pPr marL="0" indent="0" algn="ctr">
+                        <a:buNone/>
+                      </a:pPr>
+                      <a:r>
+                        <a:rPr lang="en-US" sz="900" dirty="0">
+                          <a:solidFill>
+                            <a:srgbClr val="1F2933"/>
+                          </a:solidFill>
+                        </a:rPr>
+                        <a:t>2.83m</a:t>
+                      </a:r>
+                      <a:endParaRPr lang="en-US" sz="950" dirty="0"/>
+                    </a:p>
+                  </a:txBody>
+                  <a:tcPr anchor="ctr">
+                    <a:lnL w="9525" cap="flat" cmpd="sng" algn="ctr">
+                      <a:solidFill>
+                        <a:srgbClr val="D9DEE4"/>
+                      </a:solidFill>
+                      <a:prstDash val="solid"/>
+                      <a:round/>
+                      <a:headEnd type="none" w="med" len="med"/>
+                      <a:tailEnd type="none" w="med" len="med"/>
+                    </a:lnL>
+                    <a:lnR w="9525" cap="flat" cmpd="sng" algn="ctr">
+                      <a:solidFill>
+                        <a:srgbClr val="D9DEE4"/>
+                      </a:solidFill>
+                      <a:prstDash val="solid"/>
+                      <a:round/>
+                      <a:headEnd type="none" w="med" len="med"/>
+                      <a:tailEnd type="none" w="med" len="med"/>
+                    </a:lnR>
+                    <a:lnT w="9525" cap="flat" cmpd="sng" algn="ctr">
+                      <a:solidFill>
+                        <a:srgbClr val="D9DEE4"/>
+                      </a:solidFill>
+                      <a:prstDash val="solid"/>
+                      <a:round/>
+                      <a:headEnd type="none" w="med" len="med"/>
+                      <a:tailEnd type="none" w="med" len="med"/>
+                    </a:lnT>
+                    <a:lnB w="9525" cap="flat" cmpd="sng" algn="ctr">
+                      <a:solidFill>
+                        <a:srgbClr val="D9DEE4"/>
+                      </a:solidFill>
+                      <a:prstDash val="solid"/>
+                      <a:round/>
+                      <a:headEnd type="none" w="med" len="med"/>
+                      <a:tailEnd type="none" w="med" len="med"/>
+                    </a:lnB>
+                    <a:solidFill>
+                      <a:srgbClr val="FFFFFF"/>
+                    </a:solidFill>
+                  </a:tcPr>
+                </a:tc>
+                <a:tc>
+                  <a:txBody>
+                    <a:bodyPr/>
+                    <a:lstStyle/>
+                    <a:p>
+                      <a:pPr marL="0" indent="0" algn="ctr">
+                        <a:buNone/>
+                      </a:pPr>
+                      <a:r>
+                        <a:rPr lang="en-US" sz="900" dirty="0">
+                          <a:solidFill>
+                            <a:srgbClr val="1F2933"/>
+                          </a:solidFill>
+                        </a:rPr>
+                        <a:t>0 days</a:t>
+                      </a:r>
+                      <a:endParaRPr lang="en-US" sz="950" dirty="0"/>
+                    </a:p>
+                  </a:txBody>
+                  <a:tcPr anchor="ctr">
+                    <a:lnL w="9525" cap="flat" cmpd="sng" algn="ctr">
+                      <a:solidFill>
+                        <a:srgbClr val="D9DEE4"/>
+                      </a:solidFill>
+                      <a:prstDash val="solid"/>
+                      <a:round/>
+                      <a:headEnd type="none" w="med" len="med"/>
+                      <a:tailEnd type="none" w="med" len="med"/>
+                    </a:lnL>
+                    <a:lnR w="9525" cap="flat" cmpd="sng" algn="ctr">
+                      <a:solidFill>
+                        <a:srgbClr val="D9DEE4"/>
+                      </a:solidFill>
+                      <a:prstDash val="solid"/>
+                      <a:round/>
+                      <a:headEnd type="none" w="med" len="med"/>
+                      <a:tailEnd type="none" w="med" len="med"/>
+                    </a:lnR>
+                    <a:lnT w="9525" cap="flat" cmpd="sng" algn="ctr">
+                      <a:solidFill>
+                        <a:srgbClr val="D9DEE4"/>
+                      </a:solidFill>
+                      <a:prstDash val="solid"/>
+                      <a:round/>
+                      <a:headEnd type="none" w="med" len="med"/>
+                      <a:tailEnd type="none" w="med" len="med"/>
+                    </a:lnT>
+                    <a:lnB w="9525" cap="flat" cmpd="sng" algn="ctr">
+                      <a:solidFill>
+                        <a:srgbClr val="D9DEE4"/>
+                      </a:solidFill>
+                      <a:prstDash val="solid"/>
+                      <a:round/>
+                      <a:headEnd type="none" w="med" len="med"/>
+                      <a:tailEnd type="none" w="med" len="med"/>
+                    </a:lnB>
+                    <a:solidFill>
+                      <a:srgbClr val="FFFFFF"/>
+                    </a:solidFill>
+                  </a:tcPr>
+                </a:tc>
+                <a:tc>
+                  <a:txBody>
+                    <a:bodyPr/>
+                    <a:lstStyle/>
+                    <a:p>
+                      <a:pPr marL="0" indent="0" algn="l">
+                        <a:buNone/>
+                      </a:pPr>
+                      <a:r>
+                        <a:rPr lang="en-US" sz="900" dirty="0">
+                          <a:solidFill>
+                            <a:srgbClr val="1F2933"/>
+                          </a:solidFill>
+                        </a:rPr>
+                        <a:t>TBD</a:t>
+                      </a:r>
+                      <a:endParaRPr lang="en-US" sz="950" dirty="0"/>
+                    </a:p>
+                  </a:txBody>
+                  <a:tcPr anchor="ctr">
+                    <a:lnL w="9525" cap="flat" cmpd="sng" algn="ctr">
+                      <a:solidFill>
+                        <a:srgbClr val="D9DEE4"/>
+                      </a:solidFill>
+                      <a:prstDash val="solid"/>
+                      <a:round/>
+                      <a:headEnd type="none" w="med" len="med"/>
+                      <a:tailEnd type="none" w="med" len="med"/>
+                    </a:lnL>
+                    <a:lnR w="9525" cap="flat" cmpd="sng" algn="ctr">
+                      <a:solidFill>
+                        <a:srgbClr val="D9DEE4"/>
+                      </a:solidFill>
+                      <a:prstDash val="solid"/>
+                      <a:round/>
+                      <a:headEnd type="none" w="med" len="med"/>
+                      <a:tailEnd type="none" w="med" len="med"/>
+                    </a:lnR>
+                    <a:lnT w="9525" cap="flat" cmpd="sng" algn="ctr">
+                      <a:solidFill>
+                        <a:srgbClr val="D9DEE4"/>
+                      </a:solidFill>
+                      <a:prstDash val="solid"/>
+                      <a:round/>
+                      <a:headEnd type="none" w="med" len="med"/>
+                      <a:tailEnd type="none" w="med" len="med"/>
+                    </a:lnT>
+                    <a:lnB w="9525" cap="flat" cmpd="sng" algn="ctr">
+                      <a:solidFill>
+                        <a:srgbClr val="D9DEE4"/>
+                      </a:solidFill>
+                      <a:prstDash val="solid"/>
+                      <a:round/>
+                      <a:headEnd type="none" w="med" len="med"/>
+                      <a:tailEnd type="none" w="med" len="med"/>
+                    </a:lnB>
+                    <a:solidFill>
+                      <a:srgbClr val="FFFFFF"/>
+                    </a:solidFill>
+                  </a:tcPr>
+                </a:tc>
+                <a:tc>
+                  <a:txBody>
+                    <a:bodyPr/>
+                    <a:lstStyle/>
+                    <a:p>
+                      <a:pPr marL="0" indent="0" algn="ctr">
+                        <a:buNone/>
+                      </a:pPr>
+                      <a:r>
+                        <a:rPr lang="en-US" sz="900" dirty="0">
+                          <a:solidFill>
+                            <a:srgbClr val="1F2933"/>
+                          </a:solidFill>
+                        </a:rPr>
+                        <a:t>TBD</a:t>
+                      </a:r>
+                      <a:endParaRPr lang="en-US" sz="950" dirty="0"/>
+                    </a:p>
+                  </a:txBody>
+                  <a:tcPr anchor="ctr">
+                    <a:lnL w="9525" cap="flat" cmpd="sng" algn="ctr">
+                      <a:solidFill>
+                        <a:srgbClr val="D9DEE4"/>
+                      </a:solidFill>
+                      <a:prstDash val="solid"/>
+                      <a:round/>
+                      <a:headEnd type="none" w="med" len="med"/>
+                      <a:tailEnd type="none" w="med" len="med"/>
+                    </a:lnL>
+                    <a:lnR w="9525" cap="flat" cmpd="sng" algn="ctr">
+                      <a:solidFill>
+                        <a:srgbClr val="D9DEE4"/>
+                      </a:solidFill>
+                      <a:prstDash val="solid"/>
+                      <a:round/>
+                      <a:headEnd type="none" w="med" len="med"/>
+                      <a:tailEnd type="none" w="med" len="med"/>
+                    </a:lnR>
+                    <a:lnT w="9525" cap="flat" cmpd="sng" algn="ctr">
+                      <a:solidFill>
+                        <a:srgbClr val="D9DEE4"/>
+                      </a:solidFill>
+                      <a:prstDash val="solid"/>
+                      <a:round/>
+                      <a:headEnd type="none" w="med" len="med"/>
+                      <a:tailEnd type="none" w="med" len="med"/>
+                    </a:lnT>
+                    <a:lnB w="9525" cap="flat" cmpd="sng" algn="ctr">
+                      <a:solidFill>
+                        <a:srgbClr val="D9DEE4"/>
+                      </a:solidFill>
+                      <a:prstDash val="solid"/>
+                      <a:round/>
+                      <a:headEnd type="none" w="med" len="med"/>
+                      <a:tailEnd type="none" w="med" len="med"/>
+                    </a:lnB>
+                    <a:solidFill>
+                      <a:srgbClr val="FFFFFF"/>
+                    </a:solidFill>
+                  </a:tcPr>
+                </a:tc>
+                <a:tc>
+                  <a:txBody>
+                    <a:bodyPr/>
+                    <a:lstStyle/>
+                    <a:p>
+                      <a:pPr marL="0" indent="0" algn="l">
+                        <a:buNone/>
+                      </a:pPr>
+                      <a:r>
+                        <a:rPr lang="en-US" sz="900" i="1" dirty="0">
+                          <a:solidFill>
+                            <a:srgbClr val="1F2933"/>
+                          </a:solidFill>
+                        </a:rPr>
+                        <a:t>To be determined in the meeting</a:t>
+                      </a:r>
+                      <a:endParaRPr lang="en-US" sz="950" dirty="0"/>
+                    </a:p>
+                  </a:txBody>
+                  <a:tcPr anchor="ctr">
+                    <a:lnL w="9525" cap="flat" cmpd="sng" algn="ctr">
+                      <a:solidFill>
+                        <a:srgbClr val="D9DEE4"/>
+                      </a:solidFill>
+                      <a:prstDash val="solid"/>
+                      <a:round/>
+                      <a:headEnd type="none" w="med" len="med"/>
+                      <a:tailEnd type="none" w="med" len="med"/>
+                    </a:lnL>
+                    <a:lnR w="9525" cap="flat" cmpd="sng" algn="ctr">
+                      <a:solidFill>
+                        <a:srgbClr val="D9DEE4"/>
+                      </a:solidFill>
+                      <a:prstDash val="solid"/>
+                      <a:round/>
+                      <a:headEnd type="none" w="med" len="med"/>
+                      <a:tailEnd type="none" w="med" len="med"/>
+                    </a:lnR>
+                    <a:lnT w="9525" cap="flat" cmpd="sng" algn="ctr">
+                      <a:solidFill>
+                        <a:srgbClr val="D9DEE4"/>
+                      </a:solidFill>
+                      <a:prstDash val="solid"/>
+                      <a:round/>
+                      <a:headEnd type="none" w="med" len="med"/>
+                      <a:tailEnd type="none" w="med" len="med"/>
+                    </a:lnT>
+                    <a:lnB w="9525" cap="flat" cmpd="sng" algn="ctr">
+                      <a:solidFill>
+                        <a:srgbClr val="D9DEE4"/>
+                      </a:solidFill>
+                      <a:prstDash val="solid"/>
+                      <a:round/>
+                      <a:headEnd type="none" w="med" len="med"/>
+                      <a:tailEnd type="none" w="med" len="med"/>
+                    </a:lnB>
+                    <a:solidFill>
+                      <a:srgbClr val="FFFFFF"/>
+                    </a:solidFill>
+                  </a:tcPr>
+                </a:tc>
+                <a:tc>
+                  <a:txBody>
+                    <a:bodyPr/>
+                    <a:lstStyle/>
+                    <a:p>
+                      <a:pPr marL="0" indent="0" algn="ctr">
+                        <a:buNone/>
+                      </a:pPr>
+                      <a:r>
+                        <a:rPr lang="en-US" sz="900" dirty="0">
+                          <a:solidFill>
+                            <a:srgbClr val="1F2933"/>
+                          </a:solidFill>
+                        </a:rPr>
+                        <a:t>TBD</a:t>
+                      </a:r>
+                      <a:endParaRPr lang="en-US" sz="950" dirty="0"/>
+                    </a:p>
+                  </a:txBody>
+                  <a:tcPr anchor="ctr">
+                    <a:lnL w="9525" cap="flat" cmpd="sng" algn="ctr">
+                      <a:solidFill>
+                        <a:srgbClr val="D9DEE4"/>
+                      </a:solidFill>
+                      <a:prstDash val="solid"/>
+                      <a:round/>
+                      <a:headEnd type="none" w="med" len="med"/>
+                      <a:tailEnd type="none" w="med" len="med"/>
+                    </a:lnL>
+                    <a:lnR w="9525" cap="flat" cmpd="sng" algn="ctr">
+                      <a:solidFill>
+                        <a:srgbClr val="D9DEE4"/>
+                      </a:solidFill>
+                      <a:prstDash val="solid"/>
+                      <a:round/>
+                      <a:headEnd type="none" w="med" len="med"/>
+                      <a:tailEnd type="none" w="med" len="med"/>
+                    </a:lnR>
+                    <a:lnT w="9525" cap="flat" cmpd="sng" algn="ctr">
+                      <a:solidFill>
+                        <a:srgbClr val="D9DEE4"/>
+                      </a:solidFill>
+                      <a:prstDash val="solid"/>
+                      <a:round/>
+                      <a:headEnd type="none" w="med" len="med"/>
+                      <a:tailEnd type="none" w="med" len="med"/>
+                    </a:lnT>
+                    <a:lnB w="9525" cap="flat" cmpd="sng" algn="ctr">
+                      <a:solidFill>
+                        <a:srgbClr val="D9DEE4"/>
+                      </a:solidFill>
+                      <a:prstDash val="solid"/>
+                      <a:round/>
+                      <a:headEnd type="none" w="med" len="med"/>
+                      <a:tailEnd type="none" w="med" len="med"/>
+                    </a:lnB>
+                    <a:solidFill>
+                      <a:srgbClr val="FFFFFF"/>
+                    </a:solidFill>
+                  </a:tcPr>
+                </a:tc>
+                <a:extLst>
+                  <a:ext uri="{0D108BD9-81ED-4DB2-BD59-A6C34878D82A}">
+                    <a16:rowId xmlns:a16="http://schemas.microsoft.com/office/drawing/2014/main" val="10001"/>
+                  </a:ext>
+                </a:extLst>
+              </a:tr>
+              <a:tr h="270000">
+                <a:tc>
+                  <a:txBody>
+                    <a:bodyPr/>
+                    <a:lstStyle/>
+                    <a:p>
+                      <a:pPr marL="0" indent="0" algn="l">
+                        <a:buNone/>
+                      </a:pPr>
+                      <a:r>
+                        <a:rPr lang="en-US" sz="900" b="1" dirty="0">
+                          <a:solidFill>
+                            <a:srgbClr val="1F2933"/>
+                          </a:solidFill>
+                        </a:rPr>
+                        <a:t>NPS – Due from EOM</a:t>
+                      </a:r>
+                      <a:endParaRPr lang="en-US" sz="950" dirty="0"/>
+                    </a:p>
+                  </a:txBody>
+                  <a:tcPr anchor="ctr">
+                    <a:lnL w="9525" cap="flat" cmpd="sng" algn="ctr">
+                      <a:solidFill>
+                        <a:srgbClr val="D9DEE4"/>
+                      </a:solidFill>
+                      <a:prstDash val="solid"/>
+                      <a:round/>
+                      <a:headEnd type="none" w="med" len="med"/>
+                      <a:tailEnd type="none" w="med" len="med"/>
+                    </a:lnL>
+                    <a:lnR w="9525" cap="flat" cmpd="sng" algn="ctr">
+                      <a:solidFill>
+                        <a:srgbClr val="D9DEE4"/>
+                      </a:solidFill>
+                      <a:prstDash val="solid"/>
+                      <a:round/>
+                      <a:headEnd type="none" w="med" len="med"/>
+                      <a:tailEnd type="none" w="med" len="med"/>
+                    </a:lnR>
+                    <a:lnT w="9525" cap="flat" cmpd="sng" algn="ctr">
+                      <a:solidFill>
+                        <a:srgbClr val="D9DEE4"/>
+                      </a:solidFill>
+                      <a:prstDash val="solid"/>
+                      <a:round/>
+                      <a:headEnd type="none" w="med" len="med"/>
+                      <a:tailEnd type="none" w="med" len="med"/>
+                    </a:lnT>
+                    <a:lnB w="9525" cap="flat" cmpd="sng" algn="ctr">
+                      <a:solidFill>
+                        <a:srgbClr val="D9DEE4"/>
+                      </a:solidFill>
+                      <a:prstDash val="solid"/>
+                      <a:round/>
+                      <a:headEnd type="none" w="med" len="med"/>
+                      <a:tailEnd type="none" w="med" len="med"/>
+                    </a:lnB>
+                    <a:solidFill>
+                      <a:srgbClr val="F4F6F8"/>
+                    </a:solidFill>
+                  </a:tcPr>
+                </a:tc>
+                <a:tc>
+                  <a:txBody>
+                    <a:bodyPr/>
+                    <a:lstStyle/>
+                    <a:p>
+                      <a:pPr marL="0" indent="0" algn="ctr">
+                        <a:buNone/>
+                      </a:pPr>
+                      <a:r>
+                        <a:rPr lang="en-US" sz="900" dirty="0">
+                          <a:solidFill>
+                            <a:srgbClr val="1F2933"/>
+                          </a:solidFill>
+                        </a:rPr>
+                        <a:t>0.28m</a:t>
+                      </a:r>
+                      <a:endParaRPr lang="en-US" sz="950" dirty="0"/>
+                    </a:p>
+                  </a:txBody>
+                  <a:tcPr anchor="ctr">
+                    <a:lnL w="9525" cap="flat" cmpd="sng" algn="ctr">
+                      <a:solidFill>
+                        <a:srgbClr val="D9DEE4"/>
+                      </a:solidFill>
+                      <a:prstDash val="solid"/>
+                      <a:round/>
+                      <a:headEnd type="none" w="med" len="med"/>
+                      <a:tailEnd type="none" w="med" len="med"/>
+                    </a:lnL>
+                    <a:lnR w="9525" cap="flat" cmpd="sng" algn="ctr">
+                      <a:solidFill>
+                        <a:srgbClr val="D9DEE4"/>
+                      </a:solidFill>
+                      <a:prstDash val="solid"/>
+                      <a:round/>
+                      <a:headEnd type="none" w="med" len="med"/>
+                      <a:tailEnd type="none" w="med" len="med"/>
+                    </a:lnR>
+                    <a:lnT w="9525" cap="flat" cmpd="sng" algn="ctr">
+                      <a:solidFill>
+                        <a:srgbClr val="D9DEE4"/>
+                      </a:solidFill>
+                      <a:prstDash val="solid"/>
+                      <a:round/>
+                      <a:headEnd type="none" w="med" len="med"/>
+                      <a:tailEnd type="none" w="med" len="med"/>
+                    </a:lnT>
+                    <a:lnB w="9525" cap="flat" cmpd="sng" algn="ctr">
+                      <a:solidFill>
+                        <a:srgbClr val="D9DEE4"/>
+                      </a:solidFill>
+                      <a:prstDash val="solid"/>
+                      <a:round/>
+                      <a:headEnd type="none" w="med" len="med"/>
+                      <a:tailEnd type="none" w="med" len="med"/>
+                    </a:lnB>
+                    <a:solidFill>
+                      <a:srgbClr val="F4F6F8"/>
+                    </a:solidFill>
+                  </a:tcPr>
+                </a:tc>
+                <a:tc>
+                  <a:txBody>
+                    <a:bodyPr/>
+                    <a:lstStyle/>
+                    <a:p>
+                      <a:pPr marL="0" indent="0" algn="ctr">
+                        <a:buNone/>
+                      </a:pPr>
+                      <a:r>
+                        <a:rPr lang="en-US" sz="900" dirty="0">
+                          <a:solidFill>
+                            <a:srgbClr val="1F2933"/>
+                          </a:solidFill>
+                        </a:rPr>
+                        <a:t>273 days</a:t>
+                      </a:r>
+                      <a:endParaRPr lang="en-US" sz="950" dirty="0"/>
+                    </a:p>
+                  </a:txBody>
+                  <a:tcPr anchor="ctr">
+                    <a:lnL w="9525" cap="flat" cmpd="sng" algn="ctr">
+                      <a:solidFill>
+                        <a:srgbClr val="D9DEE4"/>
+                      </a:solidFill>
+                      <a:prstDash val="solid"/>
+                      <a:round/>
+                      <a:headEnd type="none" w="med" len="med"/>
+                      <a:tailEnd type="none" w="med" len="med"/>
+                    </a:lnL>
+                    <a:lnR w="9525" cap="flat" cmpd="sng" algn="ctr">
+                      <a:solidFill>
+                        <a:srgbClr val="D9DEE4"/>
+                      </a:solidFill>
+                      <a:prstDash val="solid"/>
+                      <a:round/>
+                      <a:headEnd type="none" w="med" len="med"/>
+                      <a:tailEnd type="none" w="med" len="med"/>
+                    </a:lnR>
+                    <a:lnT w="9525" cap="flat" cmpd="sng" algn="ctr">
+                      <a:solidFill>
+                        <a:srgbClr val="D9DEE4"/>
+                      </a:solidFill>
+                      <a:prstDash val="solid"/>
+                      <a:round/>
+                      <a:headEnd type="none" w="med" len="med"/>
+                      <a:tailEnd type="none" w="med" len="med"/>
+                    </a:lnT>
+                    <a:lnB w="9525" cap="flat" cmpd="sng" algn="ctr">
+                      <a:solidFill>
+                        <a:srgbClr val="D9DEE4"/>
+                      </a:solidFill>
+                      <a:prstDash val="solid"/>
+                      <a:round/>
+                      <a:headEnd type="none" w="med" len="med"/>
+                      <a:tailEnd type="none" w="med" len="med"/>
+                    </a:lnB>
+                    <a:solidFill>
+                      <a:srgbClr val="F4F6F8"/>
+                    </a:solidFill>
+                  </a:tcPr>
+                </a:tc>
+                <a:tc>
+                  <a:txBody>
+                    <a:bodyPr/>
+                    <a:lstStyle/>
+                    <a:p>
+                      <a:pPr marL="0" indent="0" algn="l">
+                        <a:buNone/>
+                      </a:pPr>
+                      <a:r>
+                        <a:rPr lang="en-US" sz="900" dirty="0">
+                          <a:solidFill>
+                            <a:srgbClr val="1F2933"/>
+                          </a:solidFill>
+                        </a:rPr>
+                        <a:t>TBD</a:t>
+                      </a:r>
+                      <a:endParaRPr lang="en-US" sz="950" dirty="0"/>
+                    </a:p>
+                  </a:txBody>
+                  <a:tcPr anchor="ctr">
+                    <a:lnL w="9525" cap="flat" cmpd="sng" algn="ctr">
+                      <a:solidFill>
+                        <a:srgbClr val="D9DEE4"/>
+                      </a:solidFill>
+                      <a:prstDash val="solid"/>
+                      <a:round/>
+                      <a:headEnd type="none" w="med" len="med"/>
+                      <a:tailEnd type="none" w="med" len="med"/>
+                    </a:lnL>
+                    <a:lnR w="9525" cap="flat" cmpd="sng" algn="ctr">
+                      <a:solidFill>
+                        <a:srgbClr val="D9DEE4"/>
+                      </a:solidFill>
+                      <a:prstDash val="solid"/>
+                      <a:round/>
+                      <a:headEnd type="none" w="med" len="med"/>
+                      <a:tailEnd type="none" w="med" len="med"/>
+                    </a:lnR>
+                    <a:lnT w="9525" cap="flat" cmpd="sng" algn="ctr">
+                      <a:solidFill>
+                        <a:srgbClr val="D9DEE4"/>
+                      </a:solidFill>
+                      <a:prstDash val="solid"/>
+                      <a:round/>
+                      <a:headEnd type="none" w="med" len="med"/>
+                      <a:tailEnd type="none" w="med" len="med"/>
+                    </a:lnT>
+                    <a:lnB w="9525" cap="flat" cmpd="sng" algn="ctr">
+                      <a:solidFill>
+                        <a:srgbClr val="D9DEE4"/>
+                      </a:solidFill>
+                      <a:prstDash val="solid"/>
+                      <a:round/>
+                      <a:headEnd type="none" w="med" len="med"/>
+                      <a:tailEnd type="none" w="med" len="med"/>
+                    </a:lnB>
+                    <a:solidFill>
+                      <a:srgbClr val="F4F6F8"/>
+                    </a:solidFill>
+                  </a:tcPr>
+                </a:tc>
+                <a:tc>
+                  <a:txBody>
+                    <a:bodyPr/>
+                    <a:lstStyle/>
+                    <a:p>
+                      <a:pPr marL="0" indent="0" algn="ctr">
+                        <a:buNone/>
+                      </a:pPr>
+                      <a:r>
+                        <a:rPr lang="en-US" sz="900" dirty="0">
+                          <a:solidFill>
+                            <a:srgbClr val="1F2933"/>
+                          </a:solidFill>
+                        </a:rPr>
+                        <a:t>TBD</a:t>
+                      </a:r>
+                      <a:endParaRPr lang="en-US" sz="950" dirty="0"/>
+                    </a:p>
+                  </a:txBody>
+                  <a:tcPr anchor="ctr">
+                    <a:lnL w="9525" cap="flat" cmpd="sng" algn="ctr">
+                      <a:solidFill>
+                        <a:srgbClr val="D9DEE4"/>
+                      </a:solidFill>
+                      <a:prstDash val="solid"/>
+                      <a:round/>
+                      <a:headEnd type="none" w="med" len="med"/>
+                      <a:tailEnd type="none" w="med" len="med"/>
+                    </a:lnL>
+                    <a:lnR w="9525" cap="flat" cmpd="sng" algn="ctr">
+                      <a:solidFill>
+                        <a:srgbClr val="D9DEE4"/>
+                      </a:solidFill>
+                      <a:prstDash val="solid"/>
+                      <a:round/>
+                      <a:headEnd type="none" w="med" len="med"/>
+                      <a:tailEnd type="none" w="med" len="med"/>
+                    </a:lnR>
+                    <a:lnT w="9525" cap="flat" cmpd="sng" algn="ctr">
+                      <a:solidFill>
+                        <a:srgbClr val="D9DEE4"/>
+                      </a:solidFill>
+                      <a:prstDash val="solid"/>
+                      <a:round/>
+                      <a:headEnd type="none" w="med" len="med"/>
+                      <a:tailEnd type="none" w="med" len="med"/>
+                    </a:lnT>
+                    <a:lnB w="9525" cap="flat" cmpd="sng" algn="ctr">
+                      <a:solidFill>
+                        <a:srgbClr val="D9DEE4"/>
+                      </a:solidFill>
+                      <a:prstDash val="solid"/>
+                      <a:round/>
+                      <a:headEnd type="none" w="med" len="med"/>
+                      <a:tailEnd type="none" w="med" len="med"/>
+                    </a:lnB>
+                    <a:solidFill>
+                      <a:srgbClr val="F4F6F8"/>
+                    </a:solidFill>
+                  </a:tcPr>
+                </a:tc>
+                <a:tc>
+                  <a:txBody>
+                    <a:bodyPr/>
+                    <a:lstStyle/>
+                    <a:p>
+                      <a:pPr marL="0" indent="0" algn="l">
+                        <a:buNone/>
+                      </a:pPr>
+                      <a:r>
+                        <a:rPr lang="en-US" sz="900" i="1" dirty="0">
+                          <a:solidFill>
+                            <a:srgbClr val="1F2933"/>
+                          </a:solidFill>
+                        </a:rPr>
+                        <a:t>To be determined in the meeting</a:t>
+                      </a:r>
+                      <a:endParaRPr lang="en-US" sz="950" dirty="0"/>
+                    </a:p>
+                  </a:txBody>
+                  <a:tcPr anchor="ctr">
+                    <a:lnL w="9525" cap="flat" cmpd="sng" algn="ctr">
+                      <a:solidFill>
+                        <a:srgbClr val="D9DEE4"/>
+                      </a:solidFill>
+                      <a:prstDash val="solid"/>
+                      <a:round/>
+                      <a:headEnd type="none" w="med" len="med"/>
+                      <a:tailEnd type="none" w="med" len="med"/>
+                    </a:lnL>
+                    <a:lnR w="9525" cap="flat" cmpd="sng" algn="ctr">
+                      <a:solidFill>
+                        <a:srgbClr val="D9DEE4"/>
+                      </a:solidFill>
+                      <a:prstDash val="solid"/>
+                      <a:round/>
+                      <a:headEnd type="none" w="med" len="med"/>
+                      <a:tailEnd type="none" w="med" len="med"/>
+                    </a:lnR>
+                    <a:lnT w="9525" cap="flat" cmpd="sng" algn="ctr">
+                      <a:solidFill>
+                        <a:srgbClr val="D9DEE4"/>
+                      </a:solidFill>
+                      <a:prstDash val="solid"/>
+                      <a:round/>
+                      <a:headEnd type="none" w="med" len="med"/>
+                      <a:tailEnd type="none" w="med" len="med"/>
+                    </a:lnT>
+                    <a:lnB w="9525" cap="flat" cmpd="sng" algn="ctr">
+                      <a:solidFill>
+                        <a:srgbClr val="D9DEE4"/>
+                      </a:solidFill>
+                      <a:prstDash val="solid"/>
+                      <a:round/>
+                      <a:headEnd type="none" w="med" len="med"/>
+                      <a:tailEnd type="none" w="med" len="med"/>
+                    </a:lnB>
+                    <a:solidFill>
+                      <a:srgbClr val="F4F6F8"/>
+                    </a:solidFill>
+                  </a:tcPr>
+                </a:tc>
+                <a:tc>
+                  <a:txBody>
+                    <a:bodyPr/>
+                    <a:lstStyle/>
+                    <a:p>
+                      <a:pPr marL="0" indent="0" algn="ctr">
+                        <a:buNone/>
+                      </a:pPr>
+                      <a:r>
+                        <a:rPr lang="en-US" sz="900" dirty="0">
+                          <a:solidFill>
+                            <a:srgbClr val="1F2933"/>
+                          </a:solidFill>
+                        </a:rPr>
+                        <a:t>TBD</a:t>
+                      </a:r>
+                      <a:endParaRPr lang="en-US" sz="950" dirty="0"/>
+                    </a:p>
+                  </a:txBody>
+                  <a:tcPr anchor="ctr">
+                    <a:lnL w="9525" cap="flat" cmpd="sng" algn="ctr">
+                      <a:solidFill>
+                        <a:srgbClr val="D9DEE4"/>
+                      </a:solidFill>
+                      <a:prstDash val="solid"/>
+                      <a:round/>
+                      <a:headEnd type="none" w="med" len="med"/>
+                      <a:tailEnd type="none" w="med" len="med"/>
+                    </a:lnL>
+                    <a:lnR w="9525" cap="flat" cmpd="sng" algn="ctr">
+                      <a:solidFill>
+                        <a:srgbClr val="D9DEE4"/>
+                      </a:solidFill>
+                      <a:prstDash val="solid"/>
+                      <a:round/>
+                      <a:headEnd type="none" w="med" len="med"/>
+                      <a:tailEnd type="none" w="med" len="med"/>
+                    </a:lnR>
+                    <a:lnT w="9525" cap="flat" cmpd="sng" algn="ctr">
+                      <a:solidFill>
+                        <a:srgbClr val="D9DEE4"/>
+                      </a:solidFill>
+                      <a:prstDash val="solid"/>
+                      <a:round/>
+                      <a:headEnd type="none" w="med" len="med"/>
+                      <a:tailEnd type="none" w="med" len="med"/>
+                    </a:lnT>
+                    <a:lnB w="9525" cap="flat" cmpd="sng" algn="ctr">
+                      <a:solidFill>
+                        <a:srgbClr val="D9DEE4"/>
+                      </a:solidFill>
+                      <a:prstDash val="solid"/>
+                      <a:round/>
+                      <a:headEnd type="none" w="med" len="med"/>
+                      <a:tailEnd type="none" w="med" len="med"/>
+                    </a:lnB>
+                    <a:solidFill>
+                      <a:srgbClr val="F4F6F8"/>
+                    </a:solidFill>
+                  </a:tcPr>
+                </a:tc>
+                <a:extLst>
+                  <a:ext uri="{0D108BD9-81ED-4DB2-BD59-A6C34878D82A}">
+                    <a16:rowId xmlns:a16="http://schemas.microsoft.com/office/drawing/2014/main" val="10002"/>
+                  </a:ext>
+                </a:extLst>
+              </a:tr>
+              <a:tr h="270000">
+                <a:tc>
+                  <a:txBody>
+                    <a:bodyPr/>
+                    <a:lstStyle/>
+                    <a:p>
+                      <a:pPr marL="0" indent="0" algn="l">
+                        <a:buNone/>
+                      </a:pPr>
+                      <a:r>
+                        <a:rPr lang="en-US" sz="900" b="1" dirty="0">
+                          <a:solidFill>
+                            <a:srgbClr val="1F2933"/>
+                          </a:solidFill>
+                        </a:rPr>
+                        <a:t>NPM – H.H. Sheikh Mansour Bin Zayed Al Nahyan Engineering Office</a:t>
+                      </a:r>
+                      <a:endParaRPr lang="en-US" sz="950" dirty="0"/>
+                    </a:p>
+                  </a:txBody>
+                  <a:tcPr anchor="ctr">
+                    <a:lnL w="9525" cap="flat" cmpd="sng" algn="ctr">
+                      <a:solidFill>
+                        <a:srgbClr val="D9DEE4"/>
+                      </a:solidFill>
+                      <a:prstDash val="solid"/>
+                      <a:round/>
+                      <a:headEnd type="none" w="med" len="med"/>
+                      <a:tailEnd type="none" w="med" len="med"/>
+                    </a:lnL>
+                    <a:lnR w="9525" cap="flat" cmpd="sng" algn="ctr">
+                      <a:solidFill>
+                        <a:srgbClr val="D9DEE4"/>
+                      </a:solidFill>
+                      <a:prstDash val="solid"/>
+                      <a:round/>
+                      <a:headEnd type="none" w="med" len="med"/>
+                      <a:tailEnd type="none" w="med" len="med"/>
+                    </a:lnR>
+                    <a:lnT w="9525" cap="flat" cmpd="sng" algn="ctr">
+                      <a:solidFill>
+                        <a:srgbClr val="D9DEE4"/>
+                      </a:solidFill>
+                      <a:prstDash val="solid"/>
+                      <a:round/>
+                      <a:headEnd type="none" w="med" len="med"/>
+                      <a:tailEnd type="none" w="med" len="med"/>
+                    </a:lnT>
+                    <a:lnB w="9525" cap="flat" cmpd="sng" algn="ctr">
+                      <a:solidFill>
+                        <a:srgbClr val="D9DEE4"/>
+                      </a:solidFill>
+                      <a:prstDash val="solid"/>
+                      <a:round/>
+                      <a:headEnd type="none" w="med" len="med"/>
+                      <a:tailEnd type="none" w="med" len="med"/>
+                    </a:lnB>
+                    <a:solidFill>
+                      <a:srgbClr val="FFFFFF"/>
+                    </a:solidFill>
+                  </a:tcPr>
+                </a:tc>
+                <a:tc>
+                  <a:txBody>
+                    <a:bodyPr/>
+                    <a:lstStyle/>
+                    <a:p>
+                      <a:pPr marL="0" indent="0" algn="ctr">
+                        <a:buNone/>
+                      </a:pPr>
+                      <a:r>
+                        <a:rPr lang="en-US" sz="900" dirty="0">
+                          <a:solidFill>
+                            <a:srgbClr val="1F2933"/>
+                          </a:solidFill>
+                        </a:rPr>
+                        <a:t>7.28m</a:t>
+                      </a:r>
+                      <a:endParaRPr lang="en-US" sz="950" dirty="0"/>
+                    </a:p>
+                  </a:txBody>
+                  <a:tcPr anchor="ctr">
+                    <a:lnL w="9525" cap="flat" cmpd="sng" algn="ctr">
+                      <a:solidFill>
+                        <a:srgbClr val="D9DEE4"/>
+                      </a:solidFill>
+                      <a:prstDash val="solid"/>
+                      <a:round/>
+                      <a:headEnd type="none" w="med" len="med"/>
+                      <a:tailEnd type="none" w="med" len="med"/>
+                    </a:lnL>
+                    <a:lnR w="9525" cap="flat" cmpd="sng" algn="ctr">
+                      <a:solidFill>
+                        <a:srgbClr val="D9DEE4"/>
+                      </a:solidFill>
+                      <a:prstDash val="solid"/>
+                      <a:round/>
+                      <a:headEnd type="none" w="med" len="med"/>
+                      <a:tailEnd type="none" w="med" len="med"/>
+                    </a:lnR>
+                    <a:lnT w="9525" cap="flat" cmpd="sng" algn="ctr">
+                      <a:solidFill>
+                        <a:srgbClr val="D9DEE4"/>
+                      </a:solidFill>
+                      <a:prstDash val="solid"/>
+                      <a:round/>
+                      <a:headEnd type="none" w="med" len="med"/>
+                      <a:tailEnd type="none" w="med" len="med"/>
+                    </a:lnT>
+                    <a:lnB w="9525" cap="flat" cmpd="sng" algn="ctr">
+                      <a:solidFill>
+                        <a:srgbClr val="D9DEE4"/>
+                      </a:solidFill>
+                      <a:prstDash val="solid"/>
+                      <a:round/>
+                      <a:headEnd type="none" w="med" len="med"/>
+                      <a:tailEnd type="none" w="med" len="med"/>
+                    </a:lnB>
+                    <a:solidFill>
+                      <a:srgbClr val="FFFFFF"/>
+                    </a:solidFill>
+                  </a:tcPr>
+                </a:tc>
+                <a:tc>
+                  <a:txBody>
+                    <a:bodyPr/>
+                    <a:lstStyle/>
+                    <a:p>
+                      <a:pPr marL="0" indent="0" algn="ctr">
+                        <a:buNone/>
+                      </a:pPr>
+                      <a:r>
+                        <a:rPr lang="en-US" sz="900" dirty="0">
+                          <a:solidFill>
+                            <a:srgbClr val="1F2933"/>
+                          </a:solidFill>
+                        </a:rPr>
+                        <a:t>60 days</a:t>
+                      </a:r>
+                      <a:endParaRPr lang="en-US" sz="950" dirty="0"/>
+                    </a:p>
+                  </a:txBody>
+                  <a:tcPr anchor="ctr">
+                    <a:lnL w="9525" cap="flat" cmpd="sng" algn="ctr">
+                      <a:solidFill>
+                        <a:srgbClr val="D9DEE4"/>
+                      </a:solidFill>
+                      <a:prstDash val="solid"/>
+                      <a:round/>
+                      <a:headEnd type="none" w="med" len="med"/>
+                      <a:tailEnd type="none" w="med" len="med"/>
+                    </a:lnL>
+                    <a:lnR w="9525" cap="flat" cmpd="sng" algn="ctr">
+                      <a:solidFill>
+                        <a:srgbClr val="D9DEE4"/>
+                      </a:solidFill>
+                      <a:prstDash val="solid"/>
+                      <a:round/>
+                      <a:headEnd type="none" w="med" len="med"/>
+                      <a:tailEnd type="none" w="med" len="med"/>
+                    </a:lnR>
+                    <a:lnT w="9525" cap="flat" cmpd="sng" algn="ctr">
+                      <a:solidFill>
+                        <a:srgbClr val="D9DEE4"/>
+                      </a:solidFill>
+                      <a:prstDash val="solid"/>
+                      <a:round/>
+                      <a:headEnd type="none" w="med" len="med"/>
+                      <a:tailEnd type="none" w="med" len="med"/>
+                    </a:lnT>
+                    <a:lnB w="9525" cap="flat" cmpd="sng" algn="ctr">
+                      <a:solidFill>
+                        <a:srgbClr val="D9DEE4"/>
+                      </a:solidFill>
+                      <a:prstDash val="solid"/>
+                      <a:round/>
+                      <a:headEnd type="none" w="med" len="med"/>
+                      <a:tailEnd type="none" w="med" len="med"/>
+                    </a:lnB>
+                    <a:solidFill>
+                      <a:srgbClr val="FFFFFF"/>
+                    </a:solidFill>
+                  </a:tcPr>
+                </a:tc>
+                <a:tc>
+                  <a:txBody>
+                    <a:bodyPr/>
+                    <a:lstStyle/>
+                    <a:p>
+                      <a:pPr marL="0" indent="0" algn="l">
+                        <a:buNone/>
+                      </a:pPr>
+                      <a:r>
+                        <a:rPr lang="en-US" sz="900" dirty="0">
+                          <a:solidFill>
+                            <a:srgbClr val="1F2933"/>
+                          </a:solidFill>
+                        </a:rPr>
+                        <a:t>TBD</a:t>
+                      </a:r>
+                      <a:endParaRPr lang="en-US" sz="950" dirty="0"/>
+                    </a:p>
+                  </a:txBody>
+                  <a:tcPr anchor="ctr">
+                    <a:lnL w="9525" cap="flat" cmpd="sng" algn="ctr">
+                      <a:solidFill>
+                        <a:srgbClr val="D9DEE4"/>
+                      </a:solidFill>
+                      <a:prstDash val="solid"/>
+                      <a:round/>
+                      <a:headEnd type="none" w="med" len="med"/>
+                      <a:tailEnd type="none" w="med" len="med"/>
+                    </a:lnL>
+                    <a:lnR w="9525" cap="flat" cmpd="sng" algn="ctr">
+                      <a:solidFill>
+                        <a:srgbClr val="D9DEE4"/>
+                      </a:solidFill>
+                      <a:prstDash val="solid"/>
+                      <a:round/>
+                      <a:headEnd type="none" w="med" len="med"/>
+                      <a:tailEnd type="none" w="med" len="med"/>
+                    </a:lnR>
+                    <a:lnT w="9525" cap="flat" cmpd="sng" algn="ctr">
+                      <a:solidFill>
+                        <a:srgbClr val="D9DEE4"/>
+                      </a:solidFill>
+                      <a:prstDash val="solid"/>
+                      <a:round/>
+                      <a:headEnd type="none" w="med" len="med"/>
+                      <a:tailEnd type="none" w="med" len="med"/>
+                    </a:lnT>
+                    <a:lnB w="9525" cap="flat" cmpd="sng" algn="ctr">
+                      <a:solidFill>
+                        <a:srgbClr val="D9DEE4"/>
+                      </a:solidFill>
+                      <a:prstDash val="solid"/>
+                      <a:round/>
+                      <a:headEnd type="none" w="med" len="med"/>
+                      <a:tailEnd type="none" w="med" len="med"/>
+                    </a:lnB>
+                    <a:solidFill>
+                      <a:srgbClr val="FFFFFF"/>
+                    </a:solidFill>
+                  </a:tcPr>
+                </a:tc>
+                <a:tc>
+                  <a:txBody>
+                    <a:bodyPr/>
+                    <a:lstStyle/>
+                    <a:p>
+                      <a:pPr marL="0" indent="0" algn="ctr">
+                        <a:buNone/>
+                      </a:pPr>
+                      <a:r>
+                        <a:rPr lang="en-US" sz="900" dirty="0">
+                          <a:solidFill>
+                            <a:srgbClr val="1F2933"/>
+                          </a:solidFill>
+                        </a:rPr>
+                        <a:t>TBD</a:t>
+                      </a:r>
+                      <a:endParaRPr lang="en-US" sz="950" dirty="0"/>
+                    </a:p>
+                  </a:txBody>
+                  <a:tcPr anchor="ctr">
+                    <a:lnL w="9525" cap="flat" cmpd="sng" algn="ctr">
+                      <a:solidFill>
+                        <a:srgbClr val="D9DEE4"/>
+                      </a:solidFill>
+                      <a:prstDash val="solid"/>
+                      <a:round/>
+                      <a:headEnd type="none" w="med" len="med"/>
+                      <a:tailEnd type="none" w="med" len="med"/>
+                    </a:lnL>
+                    <a:lnR w="9525" cap="flat" cmpd="sng" algn="ctr">
+                      <a:solidFill>
+                        <a:srgbClr val="D9DEE4"/>
+                      </a:solidFill>
+                      <a:prstDash val="solid"/>
+                      <a:round/>
+                      <a:headEnd type="none" w="med" len="med"/>
+                      <a:tailEnd type="none" w="med" len="med"/>
+                    </a:lnR>
+                    <a:lnT w="9525" cap="flat" cmpd="sng" algn="ctr">
+                      <a:solidFill>
+                        <a:srgbClr val="D9DEE4"/>
+                      </a:solidFill>
+                      <a:prstDash val="solid"/>
+                      <a:round/>
+                      <a:headEnd type="none" w="med" len="med"/>
+                      <a:tailEnd type="none" w="med" len="med"/>
+                    </a:lnT>
+                    <a:lnB w="9525" cap="flat" cmpd="sng" algn="ctr">
+                      <a:solidFill>
+                        <a:srgbClr val="D9DEE4"/>
+                      </a:solidFill>
+                      <a:prstDash val="solid"/>
+                      <a:round/>
+                      <a:headEnd type="none" w="med" len="med"/>
+                      <a:tailEnd type="none" w="med" len="med"/>
+                    </a:lnB>
+                    <a:solidFill>
+                      <a:srgbClr val="FFFFFF"/>
+                    </a:solidFill>
+                  </a:tcPr>
+                </a:tc>
+                <a:tc>
+                  <a:txBody>
+                    <a:bodyPr/>
+                    <a:lstStyle/>
+                    <a:p>
+                      <a:pPr marL="0" indent="0" algn="l">
+                        <a:buNone/>
+                      </a:pPr>
+                      <a:r>
+                        <a:rPr lang="en-US" sz="900" i="1" dirty="0">
+                          <a:solidFill>
+                            <a:srgbClr val="1F2933"/>
+                          </a:solidFill>
+                        </a:rPr>
+                        <a:t>To be determined in the meeting</a:t>
+                      </a:r>
+                      <a:endParaRPr lang="en-US" sz="950" dirty="0"/>
+                    </a:p>
+                  </a:txBody>
+                  <a:tcPr anchor="ctr">
+                    <a:lnL w="9525" cap="flat" cmpd="sng" algn="ctr">
+                      <a:solidFill>
+                        <a:srgbClr val="D9DEE4"/>
+                      </a:solidFill>
+                      <a:prstDash val="solid"/>
+                      <a:round/>
+                      <a:headEnd type="none" w="med" len="med"/>
+                      <a:tailEnd type="none" w="med" len="med"/>
+                    </a:lnL>
+                    <a:lnR w="9525" cap="flat" cmpd="sng" algn="ctr">
+                      <a:solidFill>
+                        <a:srgbClr val="D9DEE4"/>
+                      </a:solidFill>
+                      <a:prstDash val="solid"/>
+                      <a:round/>
+                      <a:headEnd type="none" w="med" len="med"/>
+                      <a:tailEnd type="none" w="med" len="med"/>
+                    </a:lnR>
+                    <a:lnT w="9525" cap="flat" cmpd="sng" algn="ctr">
+                      <a:solidFill>
+                        <a:srgbClr val="D9DEE4"/>
+                      </a:solidFill>
+                      <a:prstDash val="solid"/>
+                      <a:round/>
+                      <a:headEnd type="none" w="med" len="med"/>
+                      <a:tailEnd type="none" w="med" len="med"/>
+                    </a:lnT>
+                    <a:lnB w="9525" cap="flat" cmpd="sng" algn="ctr">
+                      <a:solidFill>
+                        <a:srgbClr val="D9DEE4"/>
+                      </a:solidFill>
+                      <a:prstDash val="solid"/>
+                      <a:round/>
+                      <a:headEnd type="none" w="med" len="med"/>
+                      <a:tailEnd type="none" w="med" len="med"/>
+                    </a:lnB>
+                    <a:solidFill>
+                      <a:srgbClr val="FFFFFF"/>
+                    </a:solidFill>
+                  </a:tcPr>
+                </a:tc>
+                <a:tc>
+                  <a:txBody>
+                    <a:bodyPr/>
+                    <a:lstStyle/>
+                    <a:p>
+                      <a:pPr marL="0" indent="0" algn="ctr">
+                        <a:buNone/>
+                      </a:pPr>
+                      <a:r>
+                        <a:rPr lang="en-US" sz="900" dirty="0">
+                          <a:solidFill>
+                            <a:srgbClr val="1F2933"/>
+                          </a:solidFill>
+                        </a:rPr>
+                        <a:t>TBD</a:t>
+                      </a:r>
+                      <a:endParaRPr lang="en-US" sz="950" dirty="0"/>
+                    </a:p>
+                  </a:txBody>
+                  <a:tcPr anchor="ctr">
+                    <a:lnL w="9525" cap="flat" cmpd="sng" algn="ctr">
+                      <a:solidFill>
+                        <a:srgbClr val="D9DEE4"/>
+                      </a:solidFill>
+                      <a:prstDash val="solid"/>
+                      <a:round/>
+                      <a:headEnd type="none" w="med" len="med"/>
+                      <a:tailEnd type="none" w="med" len="med"/>
+                    </a:lnL>
+                    <a:lnR w="9525" cap="flat" cmpd="sng" algn="ctr">
+                      <a:solidFill>
+                        <a:srgbClr val="D9DEE4"/>
+                      </a:solidFill>
+                      <a:prstDash val="solid"/>
+                      <a:round/>
+                      <a:headEnd type="none" w="med" len="med"/>
+                      <a:tailEnd type="none" w="med" len="med"/>
+                    </a:lnR>
+                    <a:lnT w="9525" cap="flat" cmpd="sng" algn="ctr">
+                      <a:solidFill>
+                        <a:srgbClr val="D9DEE4"/>
+                      </a:solidFill>
+                      <a:prstDash val="solid"/>
+                      <a:round/>
+                      <a:headEnd type="none" w="med" len="med"/>
+                      <a:tailEnd type="none" w="med" len="med"/>
+                    </a:lnT>
+                    <a:lnB w="9525" cap="flat" cmpd="sng" algn="ctr">
+                      <a:solidFill>
+                        <a:srgbClr val="D9DEE4"/>
+                      </a:solidFill>
+                      <a:prstDash val="solid"/>
+                      <a:round/>
+                      <a:headEnd type="none" w="med" len="med"/>
+                      <a:tailEnd type="none" w="med" len="med"/>
+                    </a:lnB>
+                    <a:solidFill>
+                      <a:srgbClr val="FFFFFF"/>
+                    </a:solidFill>
+                  </a:tcPr>
+                </a:tc>
+                <a:extLst>
+                  <a:ext uri="{0D108BD9-81ED-4DB2-BD59-A6C34878D82A}">
+                    <a16:rowId xmlns:a16="http://schemas.microsoft.com/office/drawing/2014/main" val="10001"/>
+                  </a:ext>
+                </a:extLst>
+              </a:tr>
+              <a:tr h="270000">
+                <a:tc>
+                  <a:txBody>
+                    <a:bodyPr/>
+                    <a:lstStyle/>
+                    <a:p>
+                      <a:pPr marL="0" indent="0" algn="l">
+                        <a:buNone/>
+                      </a:pPr>
+                      <a:r>
+                        <a:rPr lang="en-US" sz="900" b="1" dirty="0">
+                          <a:solidFill>
+                            <a:srgbClr val="1F2933"/>
+                          </a:solidFill>
+                        </a:rPr>
+                        <a:t>NPM – E11 Eng Conslt And Project Mgt - N</a:t>
+                      </a:r>
+                      <a:endParaRPr lang="en-US" sz="950" dirty="0"/>
+                    </a:p>
+                  </a:txBody>
+                  <a:tcPr anchor="ctr">
+                    <a:lnL w="9525" cap="flat" cmpd="sng" algn="ctr">
+                      <a:solidFill>
+                        <a:srgbClr val="D9DEE4"/>
+                      </a:solidFill>
+                      <a:prstDash val="solid"/>
+                      <a:round/>
+                      <a:headEnd type="none" w="med" len="med"/>
+                      <a:tailEnd type="none" w="med" len="med"/>
+                    </a:lnL>
+                    <a:lnR w="9525" cap="flat" cmpd="sng" algn="ctr">
+                      <a:solidFill>
+                        <a:srgbClr val="D9DEE4"/>
+                      </a:solidFill>
+                      <a:prstDash val="solid"/>
+                      <a:round/>
+                      <a:headEnd type="none" w="med" len="med"/>
+                      <a:tailEnd type="none" w="med" len="med"/>
+                    </a:lnR>
+                    <a:lnT w="9525" cap="flat" cmpd="sng" algn="ctr">
+                      <a:solidFill>
+                        <a:srgbClr val="D9DEE4"/>
+                      </a:solidFill>
+                      <a:prstDash val="solid"/>
+                      <a:round/>
+                      <a:headEnd type="none" w="med" len="med"/>
+                      <a:tailEnd type="none" w="med" len="med"/>
+                    </a:lnT>
+                    <a:lnB w="9525" cap="flat" cmpd="sng" algn="ctr">
+                      <a:solidFill>
+                        <a:srgbClr val="D9DEE4"/>
+                      </a:solidFill>
+                      <a:prstDash val="solid"/>
+                      <a:round/>
+                      <a:headEnd type="none" w="med" len="med"/>
+                      <a:tailEnd type="none" w="med" len="med"/>
+                    </a:lnB>
+                    <a:solidFill>
+                      <a:srgbClr val="F4F6F8"/>
+                    </a:solidFill>
+                  </a:tcPr>
+                </a:tc>
+                <a:tc>
+                  <a:txBody>
+                    <a:bodyPr/>
+                    <a:lstStyle/>
+                    <a:p>
+                      <a:pPr marL="0" indent="0" algn="ctr">
+                        <a:buNone/>
+                      </a:pPr>
+                      <a:r>
+                        <a:rPr lang="en-US" sz="900" dirty="0">
+                          <a:solidFill>
+                            <a:srgbClr val="1F2933"/>
+                          </a:solidFill>
+                        </a:rPr>
+                        <a:t>1.74m</a:t>
+                      </a:r>
+                      <a:endParaRPr lang="en-US" sz="950" dirty="0"/>
+                    </a:p>
+                  </a:txBody>
+                  <a:tcPr anchor="ctr">
+                    <a:lnL w="9525" cap="flat" cmpd="sng" algn="ctr">
+                      <a:solidFill>
+                        <a:srgbClr val="D9DEE4"/>
+                      </a:solidFill>
+                      <a:prstDash val="solid"/>
+                      <a:round/>
+                      <a:headEnd type="none" w="med" len="med"/>
+                      <a:tailEnd type="none" w="med" len="med"/>
+                    </a:lnL>
+                    <a:lnR w="9525" cap="flat" cmpd="sng" algn="ctr">
+                      <a:solidFill>
+                        <a:srgbClr val="D9DEE4"/>
+                      </a:solidFill>
+                      <a:prstDash val="solid"/>
+                      <a:round/>
+                      <a:headEnd type="none" w="med" len="med"/>
+                      <a:tailEnd type="none" w="med" len="med"/>
+                    </a:lnR>
+                    <a:lnT w="9525" cap="flat" cmpd="sng" algn="ctr">
+                      <a:solidFill>
+                        <a:srgbClr val="D9DEE4"/>
+                      </a:solidFill>
+                      <a:prstDash val="solid"/>
+                      <a:round/>
+                      <a:headEnd type="none" w="med" len="med"/>
+                      <a:tailEnd type="none" w="med" len="med"/>
+                    </a:lnT>
+                    <a:lnB w="9525" cap="flat" cmpd="sng" algn="ctr">
+                      <a:solidFill>
+                        <a:srgbClr val="D9DEE4"/>
+                      </a:solidFill>
+                      <a:prstDash val="solid"/>
+                      <a:round/>
+                      <a:headEnd type="none" w="med" len="med"/>
+                      <a:tailEnd type="none" w="med" len="med"/>
+                    </a:lnB>
+                    <a:solidFill>
+                      <a:srgbClr val="F4F6F8"/>
+                    </a:solidFill>
+                  </a:tcPr>
+                </a:tc>
+                <a:tc>
+                  <a:txBody>
+                    <a:bodyPr/>
+                    <a:lstStyle/>
+                    <a:p>
+                      <a:pPr marL="0" indent="0" algn="ctr">
+                        <a:buNone/>
+                      </a:pPr>
+                      <a:r>
+                        <a:rPr lang="en-US" sz="900" dirty="0">
+                          <a:solidFill>
+                            <a:srgbClr val="1F2933"/>
+                          </a:solidFill>
+                        </a:rPr>
+                        <a:t>273 days</a:t>
+                      </a:r>
+                      <a:endParaRPr lang="en-US" sz="950" dirty="0"/>
+                    </a:p>
+                  </a:txBody>
+                  <a:tcPr anchor="ctr">
+                    <a:lnL w="9525" cap="flat" cmpd="sng" algn="ctr">
+                      <a:solidFill>
+                        <a:srgbClr val="D9DEE4"/>
+                      </a:solidFill>
+                      <a:prstDash val="solid"/>
+                      <a:round/>
+                      <a:headEnd type="none" w="med" len="med"/>
+                      <a:tailEnd type="none" w="med" len="med"/>
+                    </a:lnL>
+                    <a:lnR w="9525" cap="flat" cmpd="sng" algn="ctr">
+                      <a:solidFill>
+                        <a:srgbClr val="D9DEE4"/>
+                      </a:solidFill>
+                      <a:prstDash val="solid"/>
+                      <a:round/>
+                      <a:headEnd type="none" w="med" len="med"/>
+                      <a:tailEnd type="none" w="med" len="med"/>
+                    </a:lnR>
+                    <a:lnT w="9525" cap="flat" cmpd="sng" algn="ctr">
+                      <a:solidFill>
+                        <a:srgbClr val="D9DEE4"/>
+                      </a:solidFill>
+                      <a:prstDash val="solid"/>
+                      <a:round/>
+                      <a:headEnd type="none" w="med" len="med"/>
+                      <a:tailEnd type="none" w="med" len="med"/>
+                    </a:lnT>
+                    <a:lnB w="9525" cap="flat" cmpd="sng" algn="ctr">
+                      <a:solidFill>
+                        <a:srgbClr val="D9DEE4"/>
+                      </a:solidFill>
+                      <a:prstDash val="solid"/>
+                      <a:round/>
+                      <a:headEnd type="none" w="med" len="med"/>
+                      <a:tailEnd type="none" w="med" len="med"/>
+                    </a:lnB>
+                    <a:solidFill>
+                      <a:srgbClr val="F4F6F8"/>
+                    </a:solidFill>
+                  </a:tcPr>
+                </a:tc>
+                <a:tc>
+                  <a:txBody>
+                    <a:bodyPr/>
+                    <a:lstStyle/>
+                    <a:p>
+                      <a:pPr marL="0" indent="0" algn="l">
+                        <a:buNone/>
+                      </a:pPr>
+                      <a:r>
+                        <a:rPr lang="en-US" sz="900" dirty="0">
+                          <a:solidFill>
+                            <a:srgbClr val="1F2933"/>
+                          </a:solidFill>
+                        </a:rPr>
+                        <a:t>TBD</a:t>
+                      </a:r>
+                      <a:endParaRPr lang="en-US" sz="950" dirty="0"/>
+                    </a:p>
+                  </a:txBody>
+                  <a:tcPr anchor="ctr">
+                    <a:lnL w="9525" cap="flat" cmpd="sng" algn="ctr">
+                      <a:solidFill>
+                        <a:srgbClr val="D9DEE4"/>
+                      </a:solidFill>
+                      <a:prstDash val="solid"/>
+                      <a:round/>
+                      <a:headEnd type="none" w="med" len="med"/>
+                      <a:tailEnd type="none" w="med" len="med"/>
+                    </a:lnL>
+                    <a:lnR w="9525" cap="flat" cmpd="sng" algn="ctr">
+                      <a:solidFill>
+                        <a:srgbClr val="D9DEE4"/>
+                      </a:solidFill>
+                      <a:prstDash val="solid"/>
+                      <a:round/>
+                      <a:headEnd type="none" w="med" len="med"/>
+                      <a:tailEnd type="none" w="med" len="med"/>
+                    </a:lnR>
+                    <a:lnT w="9525" cap="flat" cmpd="sng" algn="ctr">
+                      <a:solidFill>
+                        <a:srgbClr val="D9DEE4"/>
+                      </a:solidFill>
+                      <a:prstDash val="solid"/>
+                      <a:round/>
+                      <a:headEnd type="none" w="med" len="med"/>
+                      <a:tailEnd type="none" w="med" len="med"/>
+                    </a:lnT>
+                    <a:lnB w="9525" cap="flat" cmpd="sng" algn="ctr">
+                      <a:solidFill>
+                        <a:srgbClr val="D9DEE4"/>
+                      </a:solidFill>
+                      <a:prstDash val="solid"/>
+                      <a:round/>
+                      <a:headEnd type="none" w="med" len="med"/>
+                      <a:tailEnd type="none" w="med" len="med"/>
+                    </a:lnB>
+                    <a:solidFill>
+                      <a:srgbClr val="F4F6F8"/>
+                    </a:solidFill>
+                  </a:tcPr>
+                </a:tc>
+                <a:tc>
+                  <a:txBody>
+                    <a:bodyPr/>
+                    <a:lstStyle/>
+                    <a:p>
+                      <a:pPr marL="0" indent="0" algn="ctr">
+                        <a:buNone/>
+                      </a:pPr>
+                      <a:r>
+                        <a:rPr lang="en-US" sz="900" dirty="0">
+                          <a:solidFill>
+                            <a:srgbClr val="1F2933"/>
+                          </a:solidFill>
+                        </a:rPr>
+                        <a:t>TBD</a:t>
+                      </a:r>
+                      <a:endParaRPr lang="en-US" sz="950" dirty="0"/>
+                    </a:p>
+                  </a:txBody>
+                  <a:tcPr anchor="ctr">
+                    <a:lnL w="9525" cap="flat" cmpd="sng" algn="ctr">
+                      <a:solidFill>
+                        <a:srgbClr val="D9DEE4"/>
+                      </a:solidFill>
+                      <a:prstDash val="solid"/>
+                      <a:round/>
+                      <a:headEnd type="none" w="med" len="med"/>
+                      <a:tailEnd type="none" w="med" len="med"/>
+                    </a:lnL>
+                    <a:lnR w="9525" cap="flat" cmpd="sng" algn="ctr">
+                      <a:solidFill>
+                        <a:srgbClr val="D9DEE4"/>
+                      </a:solidFill>
+                      <a:prstDash val="solid"/>
+                      <a:round/>
+                      <a:headEnd type="none" w="med" len="med"/>
+                      <a:tailEnd type="none" w="med" len="med"/>
+                    </a:lnR>
+                    <a:lnT w="9525" cap="flat" cmpd="sng" algn="ctr">
+                      <a:solidFill>
+                        <a:srgbClr val="D9DEE4"/>
+                      </a:solidFill>
+                      <a:prstDash val="solid"/>
+                      <a:round/>
+                      <a:headEnd type="none" w="med" len="med"/>
+                      <a:tailEnd type="none" w="med" len="med"/>
+                    </a:lnT>
+                    <a:lnB w="9525" cap="flat" cmpd="sng" algn="ctr">
+                      <a:solidFill>
+                        <a:srgbClr val="D9DEE4"/>
+                      </a:solidFill>
+                      <a:prstDash val="solid"/>
+                      <a:round/>
+                      <a:headEnd type="none" w="med" len="med"/>
+                      <a:tailEnd type="none" w="med" len="med"/>
+                    </a:lnB>
+                    <a:solidFill>
+                      <a:srgbClr val="F4F6F8"/>
+                    </a:solidFill>
+                  </a:tcPr>
+                </a:tc>
+                <a:tc>
+                  <a:txBody>
+                    <a:bodyPr/>
+                    <a:lstStyle/>
+                    <a:p>
+                      <a:pPr marL="0" indent="0" algn="l">
+                        <a:buNone/>
+                      </a:pPr>
+                      <a:r>
+                        <a:rPr lang="en-US" sz="900" i="1" dirty="0">
+                          <a:solidFill>
+                            <a:srgbClr val="1F2933"/>
+                          </a:solidFill>
+                        </a:rPr>
+                        <a:t>To be determined in the meeting</a:t>
+                      </a:r>
+                      <a:endParaRPr lang="en-US" sz="950" dirty="0"/>
+                    </a:p>
+                  </a:txBody>
+                  <a:tcPr anchor="ctr">
+                    <a:lnL w="9525" cap="flat" cmpd="sng" algn="ctr">
+                      <a:solidFill>
+                        <a:srgbClr val="D9DEE4"/>
+                      </a:solidFill>
+                      <a:prstDash val="solid"/>
+                      <a:round/>
+                      <a:headEnd type="none" w="med" len="med"/>
+                      <a:tailEnd type="none" w="med" len="med"/>
+                    </a:lnL>
+                    <a:lnR w="9525" cap="flat" cmpd="sng" algn="ctr">
+                      <a:solidFill>
+                        <a:srgbClr val="D9DEE4"/>
+                      </a:solidFill>
+                      <a:prstDash val="solid"/>
+                      <a:round/>
+                      <a:headEnd type="none" w="med" len="med"/>
+                      <a:tailEnd type="none" w="med" len="med"/>
+                    </a:lnR>
+                    <a:lnT w="9525" cap="flat" cmpd="sng" algn="ctr">
+                      <a:solidFill>
+                        <a:srgbClr val="D9DEE4"/>
+                      </a:solidFill>
+                      <a:prstDash val="solid"/>
+                      <a:round/>
+                      <a:headEnd type="none" w="med" len="med"/>
+                      <a:tailEnd type="none" w="med" len="med"/>
+                    </a:lnT>
+                    <a:lnB w="9525" cap="flat" cmpd="sng" algn="ctr">
+                      <a:solidFill>
+                        <a:srgbClr val="D9DEE4"/>
+                      </a:solidFill>
+                      <a:prstDash val="solid"/>
+                      <a:round/>
+                      <a:headEnd type="none" w="med" len="med"/>
+                      <a:tailEnd type="none" w="med" len="med"/>
+                    </a:lnB>
+                    <a:solidFill>
+                      <a:srgbClr val="F4F6F8"/>
+                    </a:solidFill>
+                  </a:tcPr>
+                </a:tc>
+                <a:tc>
+                  <a:txBody>
+                    <a:bodyPr/>
+                    <a:lstStyle/>
+                    <a:p>
+                      <a:pPr marL="0" indent="0" algn="ctr">
+                        <a:buNone/>
+                      </a:pPr>
+                      <a:r>
+                        <a:rPr lang="en-US" sz="900" dirty="0">
+                          <a:solidFill>
+                            <a:srgbClr val="1F2933"/>
+                          </a:solidFill>
+                        </a:rPr>
+                        <a:t>TBD</a:t>
+                      </a:r>
+                      <a:endParaRPr lang="en-US" sz="950" dirty="0"/>
+                    </a:p>
+                  </a:txBody>
+                  <a:tcPr anchor="ctr">
+                    <a:lnL w="9525" cap="flat" cmpd="sng" algn="ctr">
+                      <a:solidFill>
+                        <a:srgbClr val="D9DEE4"/>
+                      </a:solidFill>
+                      <a:prstDash val="solid"/>
+                      <a:round/>
+                      <a:headEnd type="none" w="med" len="med"/>
+                      <a:tailEnd type="none" w="med" len="med"/>
+                    </a:lnL>
+                    <a:lnR w="9525" cap="flat" cmpd="sng" algn="ctr">
+                      <a:solidFill>
+                        <a:srgbClr val="D9DEE4"/>
+                      </a:solidFill>
+                      <a:prstDash val="solid"/>
+                      <a:round/>
+                      <a:headEnd type="none" w="med" len="med"/>
+                      <a:tailEnd type="none" w="med" len="med"/>
+                    </a:lnR>
+                    <a:lnT w="9525" cap="flat" cmpd="sng" algn="ctr">
+                      <a:solidFill>
+                        <a:srgbClr val="D9DEE4"/>
+                      </a:solidFill>
+                      <a:prstDash val="solid"/>
+                      <a:round/>
+                      <a:headEnd type="none" w="med" len="med"/>
+                      <a:tailEnd type="none" w="med" len="med"/>
+                    </a:lnT>
+                    <a:lnB w="9525" cap="flat" cmpd="sng" algn="ctr">
+                      <a:solidFill>
+                        <a:srgbClr val="D9DEE4"/>
+                      </a:solidFill>
+                      <a:prstDash val="solid"/>
+                      <a:round/>
+                      <a:headEnd type="none" w="med" len="med"/>
+                      <a:tailEnd type="none" w="med" len="med"/>
+                    </a:lnB>
+                    <a:solidFill>
+                      <a:srgbClr val="F4F6F8"/>
+                    </a:solidFill>
+                  </a:tcPr>
+                </a:tc>
+                <a:extLst>
+                  <a:ext uri="{0D108BD9-81ED-4DB2-BD59-A6C34878D82A}">
+                    <a16:rowId xmlns:a16="http://schemas.microsoft.com/office/drawing/2014/main" val="10002"/>
+                  </a:ext>
+                </a:extLst>
+              </a:tr>
+            </a:tbl>
+          </a:graphicData>
+        </a:graphic>
+      </p:graphicFrame>
+      <p:sp>
+        <p:nvSpPr>
+          <p:cNvPr id="7" name="Text 4"/>
+          <p:cNvSpPr/>
+          <p:nvPr/>
+        </p:nvSpPr>
+        <p:spPr>
+          <a:xfrm>
+            <a:off x="457200" y="3080200"/>
+            <a:ext cx="11274552" cy="320040"/>
+          </a:xfrm>
+          <a:prstGeom prst="rect">
+            <a:avLst/>
+          </a:prstGeom>
+          <a:noFill/>
+          <a:ln/>
+        </p:spPr>
+        <p:txBody>
+          <a:bodyPr wrap="square" rtlCol="0" anchor="ctr"/>
+          <a:lstStyle/>
+          <a:p>
+            <a:pPr marL="0" indent="0">
+              <a:buNone/>
+            </a:pPr>
+            <a:r>
+              <a:rPr lang="en-US" sz="1250" b="1" dirty="0">
+                <a:solidFill>
+                  <a:srgbClr val="0F6E6E"/>
+                </a:solidFill>
+                <a:latin typeface="Calibri" pitchFamily="34" charset="0"/>
+                <a:ea typeface="Calibri" pitchFamily="34" charset="-122"/>
+                <a:cs typeface="Calibri" pitchFamily="34" charset="-120"/>
+              </a:rPr>
+              <a:t>Fifth:  </a:t>
+            </a:r>
+            <a:r>
+              <a:rPr lang="en-US" sz="1250" dirty="0">
+                <a:solidFill>
+                  <a:srgbClr val="1F2933"/>
+                </a:solidFill>
+                <a:latin typeface="Calibri" pitchFamily="34" charset="0"/>
+                <a:ea typeface="Calibri" pitchFamily="34" charset="-122"/>
+                <a:cs typeface="Calibri" pitchFamily="34" charset="-120"/>
+              </a:rPr>
+              <a:t>A Simple Traffic Light Dashboard — one-page view by overdue ratio and by aging Receivables</a:t>
+            </a:r>
+            <a:endParaRPr lang="en-US" sz="1250" dirty="0"/>
+          </a:p>
+        </p:txBody>
+      </p:sp>
+      <p:sp>
+        <p:nvSpPr>
+          <p:cNvPr id="8" name="Shape 5"/>
+          <p:cNvSpPr/>
+          <p:nvPr/>
+        </p:nvSpPr>
+        <p:spPr>
+          <a:xfrm>
+            <a:off x="457200" y="3491680"/>
+            <a:ext cx="5522976" cy="960120"/>
+          </a:xfrm>
+          <a:prstGeom prst="rect">
+            <a:avLst/>
+          </a:prstGeom>
+          <a:solidFill>
+            <a:srgbClr val="F4F6F8"/>
+          </a:solidFill>
+          <a:ln w="9525">
+            <a:solidFill>
+              <a:srgbClr val="D9DEE4"/>
+            </a:solidFill>
+            <a:prstDash val="solid"/>
+          </a:ln>
+        </p:spPr>
+        <p:txBody>
+          <a:bodyPr/>
+          <a:lstStyle/>
+          <a:p>
+            <a:endParaRPr lang="en-AE" dirty="0"/>
+          </a:p>
+        </p:txBody>
+      </p:sp>
+      <p:sp>
+        <p:nvSpPr>
+          <p:cNvPr id="9" name="Text 6"/>
+          <p:cNvSpPr/>
+          <p:nvPr/>
+        </p:nvSpPr>
+        <p:spPr>
+          <a:xfrm>
+            <a:off x="594360" y="3564832"/>
+            <a:ext cx="5248656" cy="256032"/>
+          </a:xfrm>
+          <a:prstGeom prst="rect">
+            <a:avLst/>
+          </a:prstGeom>
+          <a:noFill/>
+          <a:ln/>
+        </p:spPr>
+        <p:txBody>
+          <a:bodyPr wrap="square" rtlCol="0" anchor="ctr"/>
+          <a:lstStyle/>
+          <a:p>
+            <a:pPr marL="0" indent="0">
+              <a:buNone/>
+            </a:pPr>
+            <a:r>
+              <a:rPr lang="en-US" sz="1100" b="1" dirty="0">
+                <a:solidFill>
+                  <a:srgbClr val="1B2A4A"/>
+                </a:solidFill>
+                <a:latin typeface="Calibri" pitchFamily="34" charset="0"/>
+                <a:ea typeface="Calibri" pitchFamily="34" charset="-122"/>
+                <a:cs typeface="Calibri" pitchFamily="34" charset="-120"/>
+              </a:rPr>
+              <a:t>Overdue Ratio</a:t>
+            </a:r>
+            <a:endParaRPr lang="en-US" sz="1100" dirty="0"/>
+          </a:p>
+        </p:txBody>
+      </p:sp>
+      <p:sp>
+        <p:nvSpPr>
+          <p:cNvPr id="10" name="Shape 7"/>
+          <p:cNvSpPr/>
+          <p:nvPr/>
+        </p:nvSpPr>
+        <p:spPr>
+          <a:xfrm>
+            <a:off x="621792" y="3875728"/>
+            <a:ext cx="128016" cy="128016"/>
+          </a:xfrm>
+          <a:prstGeom prst="ellipse">
+            <a:avLst/>
+          </a:prstGeom>
+          <a:solidFill>
+            <a:srgbClr val="C0392B"/>
+          </a:solidFill>
+          <a:ln/>
+        </p:spPr>
+        <p:txBody>
+          <a:bodyPr/>
+          <a:lstStyle/>
+          <a:p>
+            <a:endParaRPr lang="en-AE"/>
+          </a:p>
+        </p:txBody>
+      </p:sp>
+      <p:sp>
+        <p:nvSpPr>
+          <p:cNvPr id="11" name="Text 8"/>
+          <p:cNvSpPr/>
+          <p:nvPr/>
+        </p:nvSpPr>
+        <p:spPr>
+          <a:xfrm>
+            <a:off x="841248" y="3830008"/>
+            <a:ext cx="4974336" cy="201168"/>
+          </a:xfrm>
+          <a:prstGeom prst="rect">
+            <a:avLst/>
+          </a:prstGeom>
+          <a:noFill/>
+          <a:ln/>
+        </p:spPr>
+        <p:txBody>
+          <a:bodyPr wrap="square" rtlCol="0" anchor="ctr"/>
+          <a:lstStyle/>
+          <a:p>
+            <a:pPr marL="0" indent="0">
+              <a:buNone/>
+            </a:pPr>
+            <a:r>
+              <a:rPr lang="en-US" sz="950" dirty="0">
+                <a:solidFill>
+                  <a:srgbClr val="1F2933"/>
+                </a:solidFill>
+                <a:latin typeface="Calibri" pitchFamily="34" charset="0"/>
+                <a:ea typeface="Calibri" pitchFamily="34" charset="-122"/>
+                <a:cs typeface="Calibri" pitchFamily="34" charset="-120"/>
+              </a:rPr>
+              <a:t>Exceeding 15%</a:t>
+            </a:r>
+            <a:endParaRPr lang="en-US" sz="950" dirty="0"/>
+          </a:p>
+        </p:txBody>
+      </p:sp>
+      <p:sp>
+        <p:nvSpPr>
+          <p:cNvPr id="12" name="Shape 9"/>
+          <p:cNvSpPr/>
+          <p:nvPr/>
+        </p:nvSpPr>
+        <p:spPr>
+          <a:xfrm>
+            <a:off x="621792" y="4072324"/>
+            <a:ext cx="128016" cy="128016"/>
+          </a:xfrm>
+          <a:prstGeom prst="ellipse">
+            <a:avLst/>
+          </a:prstGeom>
+          <a:solidFill>
+            <a:srgbClr val="D98E1E"/>
+          </a:solidFill>
+          <a:ln/>
+        </p:spPr>
+        <p:txBody>
+          <a:bodyPr/>
+          <a:lstStyle/>
+          <a:p>
+            <a:endParaRPr lang="en-AE"/>
+          </a:p>
+        </p:txBody>
+      </p:sp>
+      <p:sp>
+        <p:nvSpPr>
+          <p:cNvPr id="13" name="Text 10"/>
+          <p:cNvSpPr/>
+          <p:nvPr/>
+        </p:nvSpPr>
+        <p:spPr>
+          <a:xfrm>
+            <a:off x="841248" y="4026604"/>
+            <a:ext cx="4974336" cy="201168"/>
+          </a:xfrm>
+          <a:prstGeom prst="rect">
+            <a:avLst/>
+          </a:prstGeom>
+          <a:noFill/>
+          <a:ln/>
+        </p:spPr>
+        <p:txBody>
+          <a:bodyPr wrap="square" rtlCol="0" anchor="ctr"/>
+          <a:lstStyle/>
+          <a:p>
+            <a:pPr marL="0" indent="0">
+              <a:buNone/>
+            </a:pPr>
+            <a:r>
+              <a:rPr lang="en-US" sz="950" dirty="0">
+                <a:solidFill>
+                  <a:srgbClr val="1F2933"/>
+                </a:solidFill>
+                <a:latin typeface="Calibri" pitchFamily="34" charset="0"/>
+                <a:ea typeface="Calibri" pitchFamily="34" charset="-122"/>
+                <a:cs typeface="Calibri" pitchFamily="34" charset="-120"/>
+              </a:rPr>
+              <a:t>Between 6% and 15%</a:t>
+            </a:r>
+            <a:endParaRPr lang="en-US" sz="950" dirty="0"/>
+          </a:p>
+        </p:txBody>
+      </p:sp>
+      <p:sp>
+        <p:nvSpPr>
+          <p:cNvPr id="14" name="Shape 11"/>
+          <p:cNvSpPr/>
+          <p:nvPr/>
+        </p:nvSpPr>
+        <p:spPr>
+          <a:xfrm>
+            <a:off x="621792" y="4268920"/>
+            <a:ext cx="128016" cy="128016"/>
+          </a:xfrm>
+          <a:prstGeom prst="ellipse">
+            <a:avLst/>
+          </a:prstGeom>
+          <a:solidFill>
+            <a:srgbClr val="2E8B57"/>
+          </a:solidFill>
+          <a:ln/>
+        </p:spPr>
+        <p:txBody>
+          <a:bodyPr/>
+          <a:lstStyle/>
+          <a:p>
+            <a:endParaRPr lang="en-AE"/>
+          </a:p>
+        </p:txBody>
+      </p:sp>
+      <p:sp>
+        <p:nvSpPr>
+          <p:cNvPr id="15" name="Text 12"/>
+          <p:cNvSpPr/>
+          <p:nvPr/>
+        </p:nvSpPr>
+        <p:spPr>
+          <a:xfrm>
+            <a:off x="841248" y="4223200"/>
+            <a:ext cx="4974336" cy="201168"/>
+          </a:xfrm>
+          <a:prstGeom prst="rect">
+            <a:avLst/>
+          </a:prstGeom>
+          <a:noFill/>
+          <a:ln/>
+        </p:spPr>
+        <p:txBody>
+          <a:bodyPr wrap="square" rtlCol="0" anchor="ctr"/>
+          <a:lstStyle/>
+          <a:p>
+            <a:pPr marL="0" indent="0">
+              <a:buNone/>
+            </a:pPr>
+            <a:r>
+              <a:rPr lang="en-US" sz="950" dirty="0">
+                <a:solidFill>
+                  <a:srgbClr val="1F2933"/>
+                </a:solidFill>
+                <a:latin typeface="Calibri" pitchFamily="34" charset="0"/>
+                <a:ea typeface="Calibri" pitchFamily="34" charset="-122"/>
+                <a:cs typeface="Calibri" pitchFamily="34" charset="-120"/>
+              </a:rPr>
+              <a:t>Not exceeding 5%</a:t>
+            </a:r>
+            <a:endParaRPr lang="en-US" sz="950" dirty="0"/>
+          </a:p>
+        </p:txBody>
+      </p:sp>
+      <p:sp>
+        <p:nvSpPr>
+          <p:cNvPr id="16" name="Shape 13"/>
+          <p:cNvSpPr/>
+          <p:nvPr/>
+        </p:nvSpPr>
+        <p:spPr>
+          <a:xfrm>
+            <a:off x="6208776" y="3491680"/>
+            <a:ext cx="5522976" cy="960120"/>
+          </a:xfrm>
+          <a:prstGeom prst="rect">
+            <a:avLst/>
+          </a:prstGeom>
+          <a:solidFill>
+            <a:srgbClr val="F4F6F8"/>
+          </a:solidFill>
+          <a:ln w="9525">
+            <a:solidFill>
+              <a:srgbClr val="D9DEE4"/>
+            </a:solidFill>
+            <a:prstDash val="solid"/>
+          </a:ln>
+        </p:spPr>
+        <p:txBody>
+          <a:bodyPr/>
+          <a:lstStyle/>
+          <a:p>
+            <a:endParaRPr lang="en-AE"/>
+          </a:p>
+        </p:txBody>
+      </p:sp>
+      <p:sp>
+        <p:nvSpPr>
+          <p:cNvPr id="17" name="Text 14"/>
+          <p:cNvSpPr/>
+          <p:nvPr/>
+        </p:nvSpPr>
+        <p:spPr>
+          <a:xfrm>
+            <a:off x="6345936" y="3564832"/>
+            <a:ext cx="5248656" cy="256032"/>
+          </a:xfrm>
+          <a:prstGeom prst="rect">
+            <a:avLst/>
+          </a:prstGeom>
+          <a:noFill/>
+          <a:ln/>
+        </p:spPr>
+        <p:txBody>
+          <a:bodyPr wrap="square" rtlCol="0" anchor="ctr"/>
+          <a:lstStyle/>
+          <a:p>
+            <a:pPr marL="0" indent="0">
+              <a:buNone/>
+            </a:pPr>
+            <a:r>
+              <a:rPr lang="en-US" sz="1100" b="1" dirty="0">
+                <a:solidFill>
+                  <a:srgbClr val="1B2A4A"/>
+                </a:solidFill>
+                <a:latin typeface="Calibri" pitchFamily="34" charset="0"/>
+                <a:ea typeface="Calibri" pitchFamily="34" charset="-122"/>
+                <a:cs typeface="Calibri" pitchFamily="34" charset="-120"/>
+              </a:rPr>
+              <a:t>Receivables Aging</a:t>
+            </a:r>
+            <a:endParaRPr lang="en-US" sz="1100" dirty="0"/>
+          </a:p>
+        </p:txBody>
+      </p:sp>
+      <p:sp>
+        <p:nvSpPr>
+          <p:cNvPr id="18" name="Shape 15"/>
+          <p:cNvSpPr/>
+          <p:nvPr/>
+        </p:nvSpPr>
+        <p:spPr>
+          <a:xfrm>
+            <a:off x="6373368" y="3875728"/>
+            <a:ext cx="128016" cy="128016"/>
+          </a:xfrm>
+          <a:prstGeom prst="ellipse">
+            <a:avLst/>
+          </a:prstGeom>
+          <a:solidFill>
+            <a:srgbClr val="C0392B"/>
+          </a:solidFill>
+          <a:ln/>
+        </p:spPr>
+        <p:txBody>
+          <a:bodyPr/>
+          <a:lstStyle/>
+          <a:p>
+            <a:endParaRPr lang="en-AE"/>
+          </a:p>
+        </p:txBody>
+      </p:sp>
+      <p:sp>
+        <p:nvSpPr>
+          <p:cNvPr id="19" name="Text 16"/>
+          <p:cNvSpPr/>
+          <p:nvPr/>
+        </p:nvSpPr>
+        <p:spPr>
+          <a:xfrm>
+            <a:off x="6592824" y="3830008"/>
+            <a:ext cx="4974336" cy="201168"/>
+          </a:xfrm>
+          <a:prstGeom prst="rect">
+            <a:avLst/>
+          </a:prstGeom>
+          <a:noFill/>
+          <a:ln/>
+        </p:spPr>
+        <p:txBody>
+          <a:bodyPr wrap="square" rtlCol="0" anchor="ctr"/>
+          <a:lstStyle/>
+          <a:p>
+            <a:r>
+              <a:rPr lang="en-US" sz="950" dirty="0">
+                <a:solidFill>
+                  <a:srgbClr val="1F2933"/>
+                </a:solidFill>
+                <a:latin typeface="Calibri" pitchFamily="34" charset="0"/>
+                <a:ea typeface="Calibri" pitchFamily="34" charset="-122"/>
+                <a:cs typeface="Calibri" pitchFamily="34" charset="-120"/>
+              </a:rPr>
+              <a:t>Over 60 days — Amount In AED          Critical</a:t>
+            </a:r>
+            <a:endParaRPr lang="en-US" sz="950" dirty="0"/>
+          </a:p>
+        </p:txBody>
+      </p:sp>
+      <p:sp>
+        <p:nvSpPr>
+          <p:cNvPr id="20" name="Shape 17"/>
+          <p:cNvSpPr/>
+          <p:nvPr/>
+        </p:nvSpPr>
+        <p:spPr>
+          <a:xfrm>
+            <a:off x="6373368" y="4072324"/>
+            <a:ext cx="128016" cy="128016"/>
+          </a:xfrm>
+          <a:prstGeom prst="ellipse">
+            <a:avLst/>
+          </a:prstGeom>
+          <a:solidFill>
+            <a:srgbClr val="D98E1E"/>
+          </a:solidFill>
+          <a:ln/>
+        </p:spPr>
+        <p:txBody>
+          <a:bodyPr/>
+          <a:lstStyle/>
+          <a:p>
+            <a:endParaRPr lang="en-AE"/>
+          </a:p>
+        </p:txBody>
+      </p:sp>
+      <p:sp>
+        <p:nvSpPr>
+          <p:cNvPr id="21" name="Text 18"/>
+          <p:cNvSpPr/>
+          <p:nvPr/>
+        </p:nvSpPr>
+        <p:spPr>
+          <a:xfrm>
+            <a:off x="6592824" y="4026604"/>
+            <a:ext cx="4974336" cy="201168"/>
+          </a:xfrm>
+          <a:prstGeom prst="rect">
+            <a:avLst/>
+          </a:prstGeom>
+          <a:noFill/>
+          <a:ln/>
+        </p:spPr>
+        <p:txBody>
+          <a:bodyPr wrap="square" rtlCol="0" anchor="ctr"/>
+          <a:lstStyle/>
+          <a:p>
+            <a:r>
+              <a:rPr lang="en-US" sz="950" dirty="0">
+                <a:solidFill>
+                  <a:srgbClr val="1F2933"/>
+                </a:solidFill>
+                <a:latin typeface="Calibri" pitchFamily="34" charset="0"/>
+                <a:ea typeface="Calibri" pitchFamily="34" charset="-122"/>
+                <a:cs typeface="Calibri" pitchFamily="34" charset="-120"/>
+              </a:rPr>
+              <a:t>31–60 days —  Amount  In AED           Moderate</a:t>
+            </a:r>
+            <a:endParaRPr lang="en-US" sz="950" dirty="0"/>
+          </a:p>
+        </p:txBody>
+      </p:sp>
+      <p:sp>
+        <p:nvSpPr>
+          <p:cNvPr id="22" name="Shape 19"/>
+          <p:cNvSpPr/>
+          <p:nvPr/>
+        </p:nvSpPr>
+        <p:spPr>
+          <a:xfrm>
+            <a:off x="6373368" y="4268920"/>
+            <a:ext cx="128016" cy="128016"/>
+          </a:xfrm>
+          <a:prstGeom prst="ellipse">
+            <a:avLst/>
+          </a:prstGeom>
+          <a:solidFill>
+            <a:srgbClr val="2E8B57"/>
+          </a:solidFill>
+          <a:ln/>
+        </p:spPr>
+        <p:txBody>
+          <a:bodyPr/>
+          <a:lstStyle/>
+          <a:p>
+            <a:endParaRPr lang="en-AE"/>
+          </a:p>
+        </p:txBody>
+      </p:sp>
+      <p:sp>
+        <p:nvSpPr>
+          <p:cNvPr id="23" name="Text 20"/>
+          <p:cNvSpPr/>
+          <p:nvPr/>
+        </p:nvSpPr>
+        <p:spPr>
+          <a:xfrm>
+            <a:off x="6592824" y="4223200"/>
+            <a:ext cx="4974336" cy="201168"/>
+          </a:xfrm>
+          <a:prstGeom prst="rect">
+            <a:avLst/>
+          </a:prstGeom>
+          <a:noFill/>
+          <a:ln/>
+        </p:spPr>
+        <p:txBody>
+          <a:bodyPr wrap="square" rtlCol="0" anchor="ctr"/>
+          <a:lstStyle/>
+          <a:p>
+            <a:pPr marL="0" indent="0">
+              <a:buNone/>
+            </a:pPr>
+            <a:r>
+              <a:rPr lang="en-US" sz="950" dirty="0">
+                <a:solidFill>
+                  <a:srgbClr val="1F2933"/>
+                </a:solidFill>
+                <a:latin typeface="Calibri" pitchFamily="34" charset="0"/>
+                <a:ea typeface="Calibri" pitchFamily="34" charset="-122"/>
+                <a:cs typeface="Calibri" pitchFamily="34" charset="-120"/>
+              </a:rPr>
+              <a:t>Less than 31 days — Amount In AED  Low</a:t>
+            </a:r>
+            <a:endParaRPr lang="en-US" sz="950" dirty="0"/>
+          </a:p>
+        </p:txBody>
+      </p:sp>
+      <p:sp>
+        <p:nvSpPr>
+          <p:cNvPr id="24" name="Shape 21"/>
+          <p:cNvSpPr/>
+          <p:nvPr/>
+        </p:nvSpPr>
+        <p:spPr>
+          <a:xfrm>
+            <a:off x="457200" y="4634680"/>
+            <a:ext cx="3605784" cy="1234440"/>
+          </a:xfrm>
+          <a:prstGeom prst="rect">
+            <a:avLst/>
+          </a:prstGeom>
+          <a:solidFill>
+            <a:srgbClr val="FBF1DE"/>
+          </a:solidFill>
+          <a:ln w="9525">
+            <a:solidFill>
+              <a:srgbClr val="D9DEE4"/>
+            </a:solidFill>
+            <a:prstDash val="solid"/>
+          </a:ln>
+        </p:spPr>
+        <p:txBody>
+          <a:bodyPr/>
+          <a:lstStyle/>
+          <a:p>
+            <a:endParaRPr lang="en-AE"/>
+          </a:p>
+        </p:txBody>
+      </p:sp>
+      <p:sp>
+        <p:nvSpPr>
+          <p:cNvPr id="25" name="Text 22"/>
+          <p:cNvSpPr/>
+          <p:nvPr/>
+        </p:nvSpPr>
+        <p:spPr>
+          <a:xfrm>
+            <a:off x="594360" y="4726120"/>
+            <a:ext cx="3331464" cy="274320"/>
+          </a:xfrm>
+          <a:prstGeom prst="rect">
+            <a:avLst/>
+          </a:prstGeom>
+          <a:noFill/>
+          <a:ln/>
+        </p:spPr>
+        <p:txBody>
+          <a:bodyPr wrap="square" rtlCol="0" anchor="ctr"/>
+          <a:lstStyle/>
+          <a:p>
+            <a:pPr marL="0" indent="0">
+              <a:buNone/>
+            </a:pPr>
+            <a:r>
+              <a:rPr lang="en-US" sz="1250" b="1" dirty="0">
+                <a:solidFill>
+                  <a:srgbClr val="1B2A4A"/>
+                </a:solidFill>
+                <a:latin typeface="Calibri" pitchFamily="34" charset="0"/>
+                <a:ea typeface="Calibri" pitchFamily="34" charset="-122"/>
+                <a:cs typeface="Calibri" pitchFamily="34" charset="-120"/>
+              </a:rPr>
+              <a:t>NPS</a:t>
+            </a:r>
+            <a:endParaRPr lang="en-US" sz="1250" dirty="0"/>
+          </a:p>
+        </p:txBody>
+      </p:sp>
+      <p:sp>
+        <p:nvSpPr>
+          <p:cNvPr id="26" name="Shape 23"/>
+          <p:cNvSpPr/>
+          <p:nvPr/>
+        </p:nvSpPr>
+        <p:spPr>
+          <a:xfrm>
+            <a:off x="3697224" y="4753552"/>
+            <a:ext cx="201168" cy="201168"/>
+          </a:xfrm>
+          <a:prstGeom prst="ellipse">
+            <a:avLst/>
+          </a:prstGeom>
+          <a:solidFill>
+            <a:srgbClr val="D98E1E"/>
+          </a:solidFill>
+          <a:ln/>
+        </p:spPr>
+        <p:txBody>
+          <a:bodyPr/>
+          <a:lstStyle/>
+          <a:p>
+            <a:endParaRPr lang="en-AE"/>
+          </a:p>
+        </p:txBody>
+      </p:sp>
+      <p:sp>
+        <p:nvSpPr>
+          <p:cNvPr id="27" name="Text 24"/>
+          <p:cNvSpPr/>
+          <p:nvPr/>
+        </p:nvSpPr>
+        <p:spPr>
+          <a:xfrm>
+            <a:off x="594360" y="5073592"/>
+            <a:ext cx="3331464" cy="320040"/>
+          </a:xfrm>
+          <a:prstGeom prst="rect">
+            <a:avLst/>
+          </a:prstGeom>
+          <a:noFill/>
+          <a:ln/>
+        </p:spPr>
+        <p:txBody>
+          <a:bodyPr wrap="square" rtlCol="0" anchor="ctr"/>
+          <a:lstStyle/>
+          <a:p>
+            <a:r>
+              <a:rPr lang="en-US" sz="1400" b="1" dirty="0">
+                <a:solidFill>
+                  <a:srgbClr val="D98E1E"/>
+                </a:solidFill>
+                <a:latin typeface="Calibri" pitchFamily="34" charset="0"/>
+                <a:ea typeface="Calibri" pitchFamily="34" charset="-122"/>
+                <a:cs typeface="Calibri" pitchFamily="34" charset="-120"/>
+              </a:rPr>
+              <a:t>13.5%  –  Amber</a:t>
+            </a:r>
+            <a:endParaRPr lang="en-US" sz="1400" dirty="0"/>
+          </a:p>
+        </p:txBody>
+      </p:sp>
+      <p:sp>
+        <p:nvSpPr>
+          <p:cNvPr id="28" name="Text 25"/>
+          <p:cNvSpPr/>
+          <p:nvPr/>
+        </p:nvSpPr>
+        <p:spPr>
+          <a:xfrm>
+            <a:off x="594360" y="5439352"/>
+            <a:ext cx="3331464" cy="365760"/>
+          </a:xfrm>
+          <a:prstGeom prst="rect">
+            <a:avLst/>
+          </a:prstGeom>
+          <a:noFill/>
+          <a:ln/>
+        </p:spPr>
+        <p:txBody>
+          <a:bodyPr wrap="square" rtlCol="0" anchor="ctr"/>
+          <a:lstStyle/>
+          <a:p>
+            <a:pPr marL="0" indent="0">
+              <a:buNone/>
+            </a:pPr>
+            <a:r>
+              <a:rPr lang="en-US" sz="880" dirty="0">
+                <a:solidFill>
+                  <a:srgbClr val="5A6472"/>
+                </a:solidFill>
+                <a:latin typeface="Calibri" pitchFamily="34" charset="0"/>
+                <a:ea typeface="Calibri" pitchFamily="34" charset="-122"/>
+                <a:cs typeface="Calibri" pitchFamily="34" charset="-120"/>
+              </a:rPr>
+              <a:t>Over 60d: 0.50m  |  31–60d: 0.04m  |  &lt;31d: 3.17m  |  Total: 3.71m</a:t>
+            </a:r>
+            <a:endParaRPr lang="en-US" sz="880" dirty="0"/>
+          </a:p>
+        </p:txBody>
+      </p:sp>
+      <p:sp>
+        <p:nvSpPr>
+          <p:cNvPr id="29" name="Shape 26"/>
+          <p:cNvSpPr/>
+          <p:nvPr/>
+        </p:nvSpPr>
+        <p:spPr>
+          <a:xfrm>
+            <a:off x="4291584" y="4634680"/>
+            <a:ext cx="3605784" cy="1234440"/>
+          </a:xfrm>
+          <a:prstGeom prst="rect">
+            <a:avLst/>
+          </a:prstGeom>
+          <a:solidFill>
+            <a:srgbClr val="FAE7E4"/>
+          </a:solidFill>
+          <a:ln w="9525">
+            <a:solidFill>
+              <a:srgbClr val="D9DEE4"/>
+            </a:solidFill>
+            <a:prstDash val="solid"/>
+          </a:ln>
+        </p:spPr>
+        <p:txBody>
+          <a:bodyPr/>
+          <a:lstStyle/>
+          <a:p>
+            <a:endParaRPr lang="en-AE"/>
+          </a:p>
+        </p:txBody>
+      </p:sp>
+      <p:sp>
+        <p:nvSpPr>
+          <p:cNvPr id="30" name="Text 27"/>
+          <p:cNvSpPr/>
+          <p:nvPr/>
+        </p:nvSpPr>
+        <p:spPr>
+          <a:xfrm>
+            <a:off x="4428744" y="4726120"/>
+            <a:ext cx="3331464" cy="274320"/>
+          </a:xfrm>
+          <a:prstGeom prst="rect">
+            <a:avLst/>
+          </a:prstGeom>
+          <a:noFill/>
+          <a:ln/>
+        </p:spPr>
+        <p:txBody>
+          <a:bodyPr wrap="square" rtlCol="0" anchor="ctr"/>
+          <a:lstStyle/>
+          <a:p>
+            <a:pPr marL="0" indent="0">
+              <a:buNone/>
+            </a:pPr>
+            <a:r>
+              <a:rPr lang="en-US" sz="1250" b="1" dirty="0">
+                <a:solidFill>
+                  <a:srgbClr val="1B2A4A"/>
+                </a:solidFill>
+                <a:latin typeface="Calibri" pitchFamily="34" charset="0"/>
+                <a:ea typeface="Calibri" pitchFamily="34" charset="-122"/>
+                <a:cs typeface="Calibri" pitchFamily="34" charset="-120"/>
+              </a:rPr>
+              <a:t>NPM</a:t>
+            </a:r>
+            <a:endParaRPr lang="en-US" sz="1250" dirty="0"/>
+          </a:p>
+        </p:txBody>
+      </p:sp>
+      <p:sp>
+        <p:nvSpPr>
+          <p:cNvPr id="31" name="Shape 28"/>
+          <p:cNvSpPr/>
+          <p:nvPr/>
+        </p:nvSpPr>
+        <p:spPr>
+          <a:xfrm>
+            <a:off x="7531608" y="4753552"/>
             <a:ext cx="201168" cy="201168"/>
           </a:xfrm>
           <a:prstGeom prst="ellipse">
@@ -9765,7 +16006,7 @@
         </p:nvSpPr>
         <p:spPr>
           <a:xfrm>
-            <a:off x="4428744" y="5613592"/>
+            <a:off x="4428744" y="5073592"/>
             <a:ext cx="3331464" cy="320040"/>
           </a:xfrm>
           <a:prstGeom prst="rect">
@@ -9804,7 +16045,7 @@
         </p:nvSpPr>
         <p:spPr>
           <a:xfrm>
-            <a:off x="4428744" y="5979352"/>
+            <a:off x="4428744" y="5439352"/>
             <a:ext cx="3331464" cy="365760"/>
           </a:xfrm>
           <a:prstGeom prst="rect">
@@ -9843,7 +16084,7 @@
         </p:nvSpPr>
         <p:spPr>
           <a:xfrm>
-            <a:off x="8125968" y="5174680"/>
+            <a:off x="8125968" y="4634680"/>
             <a:ext cx="3605784" cy="1234440"/>
           </a:xfrm>
           <a:prstGeom prst="rect">
@@ -9875,7 +16116,7 @@
         </p:nvSpPr>
         <p:spPr>
           <a:xfrm>
-            <a:off x="8263128" y="5266120"/>
+            <a:off x="8263128" y="4726120"/>
             <a:ext cx="3331464" cy="274320"/>
           </a:xfrm>
           <a:prstGeom prst="rect">
@@ -9914,7 +16155,7 @@
         </p:nvSpPr>
         <p:spPr>
           <a:xfrm>
-            <a:off x="11365992" y="5293552"/>
+            <a:off x="11365992" y="4753552"/>
             <a:ext cx="201168" cy="201168"/>
           </a:xfrm>
           <a:prstGeom prst="ellipse">
@@ -9941,7 +16182,7 @@
         </p:nvSpPr>
         <p:spPr>
           <a:xfrm>
-            <a:off x="8263128" y="5613592"/>
+            <a:off x="8263128" y="5073592"/>
             <a:ext cx="3331464" cy="320040"/>
           </a:xfrm>
           <a:prstGeom prst="rect">
@@ -9963,7 +16204,7 @@
                 <a:ea typeface="Calibri" pitchFamily="34" charset="-122"/>
                 <a:cs typeface="Calibri" pitchFamily="34" charset="-120"/>
               </a:rPr>
-              <a:t>25.6%  –  Red</a:t>
+              <a:t>25.9%  –  Red</a:t>
             </a:r>
             <a:endParaRPr lang="en-US" sz="1400" dirty="0"/>
           </a:p>
@@ -9977,7 +16218,7 @@
         </p:nvSpPr>
         <p:spPr>
           <a:xfrm>
-            <a:off x="8263128" y="5979352"/>
+            <a:off x="8263128" y="5439352"/>
             <a:ext cx="3331464" cy="365760"/>
           </a:xfrm>
           <a:prstGeom prst="rect">
@@ -10002,7 +16243,7 @@
                 <a:ea typeface="Calibri" pitchFamily="34" charset="-122"/>
                 <a:cs typeface="Calibri" pitchFamily="34" charset="-120"/>
               </a:rPr>
-              <a:t>Over 60d: 3.92m  |  31–60d: 0.23m  |  &lt;31d: 11.16m  |  Total: 15.31m</a:t>
+              <a:t>Over 60d: 3.73m  |  31–60d: 0.23m  |  &lt;31d: 10.41m  |  Total: 14.38m</a:t>
             </a:r>
             <a:endParaRPr lang="en-US" sz="880" dirty="0"/>
           </a:p>
@@ -10016,7 +16257,7 @@
         </p:nvSpPr>
         <p:spPr>
           <a:xfrm>
-            <a:off x="457200" y="6463984"/>
+            <a:off x="457200" y="5923984"/>
             <a:ext cx="11274552" cy="380000"/>
           </a:xfrm>
           <a:prstGeom prst="rect">
@@ -10041,7 +16282,7 @@
                 <a:ea typeface="Calibri" pitchFamily="34" charset="-122"/>
                 <a:cs typeface="Calibri" pitchFamily="34" charset="-120"/>
               </a:rPr>
-              <a:t>Overdue ratio and aging cover all receivables (clients + intercompany), net of collections to 16 Oct 2026. Reason, Responsible, Action and Expected Date to be completed in the meeting.</a:t>
+              <a:t>Overdue ratio and aging cover intercompany receivables only (subsidiaries, holding company, Engineering Office), net of collections to 16 Oct 2026. Reason, Responsible, Action and Expected Date to be completed in the meeting.</a:t>
             </a:r>
             <a:endParaRPr lang="en-US" sz="850" dirty="0"/>
           </a:p>
